--- a/B2_Stripe.pptx
+++ b/B2_Stripe.pptx
@@ -2,38 +2,40 @@
 <file path=ppt/presentation.xml><?xml version="1.0" encoding="utf-8"?>
 <p:presentation xmlns:a="http://schemas.openxmlformats.org/drawingml/2006/main" xmlns:r="http://schemas.openxmlformats.org/officeDocument/2006/relationships" xmlns:mc="http://schemas.openxmlformats.org/markup-compatibility/2006" xmlns:mv="urn:schemas-microsoft-com:mac:vml" xmlns:p="http://schemas.openxmlformats.org/presentationml/2006/main" xmlns:c="http://schemas.openxmlformats.org/drawingml/2006/chart" xmlns:dgm="http://schemas.openxmlformats.org/drawingml/2006/diagram" xmlns:o="urn:schemas-microsoft-com:office:office" xmlns:v="urn:schemas-microsoft-com:vml" xmlns:pvml="urn:schemas-microsoft-com:office:powerpoint" xmlns:com="http://schemas.openxmlformats.org/drawingml/2006/compatibility" xmlns:p14="http://schemas.microsoft.com/office/powerpoint/2010/main" xmlns:p15="http://schemas.microsoft.com/office/powerpoint/2012/main" xmlns:ahyp="http://schemas.microsoft.com/office/drawing/2018/hyperlinkcolor" autoCompressPictures="0" embedTrueTypeFonts="1" strictFirstAndLastChars="0" saveSubsetFonts="1">
   <p:sldMasterIdLst>
-    <p:sldMasterId id="2147483648" r:id="rId3"/>
-    <p:sldMasterId id="2147483660" r:id="rId4"/>
+    <p:sldMasterId id="2147483648" r:id="rId4"/>
+    <p:sldMasterId id="2147483660" r:id="rId5"/>
   </p:sldMasterIdLst>
   <p:notesMasterIdLst>
-    <p:notesMasterId r:id="rId5"/>
+    <p:notesMasterId r:id="rId6"/>
   </p:notesMasterIdLst>
   <p:sldIdLst>
-    <p:sldId id="256" r:id="rId6"/>
-    <p:sldId id="257" r:id="rId7"/>
-    <p:sldId id="258" r:id="rId8"/>
-    <p:sldId id="259" r:id="rId9"/>
-    <p:sldId id="260" r:id="rId10"/>
-    <p:sldId id="261" r:id="rId11"/>
-    <p:sldId id="262" r:id="rId12"/>
-    <p:sldId id="263" r:id="rId13"/>
+    <p:sldId id="256" r:id="rId7"/>
+    <p:sldId id="257" r:id="rId8"/>
+    <p:sldId id="258" r:id="rId9"/>
+    <p:sldId id="259" r:id="rId10"/>
+    <p:sldId id="260" r:id="rId11"/>
+    <p:sldId id="261" r:id="rId12"/>
+    <p:sldId id="262" r:id="rId13"/>
+    <p:sldId id="263" r:id="rId14"/>
+    <p:sldId id="264" r:id="rId15"/>
+    <p:sldId id="265" r:id="rId16"/>
   </p:sldIdLst>
   <p:sldSz cy="5143500" cx="9144000"/>
   <p:notesSz cx="6858000" cy="9144000"/>
   <p:embeddedFontLst>
     <p:embeddedFont>
       <p:font typeface="Inter SemiBold"/>
-      <p:regular r:id="rId14"/>
-      <p:bold r:id="rId15"/>
-      <p:italic r:id="rId16"/>
-      <p:boldItalic r:id="rId17"/>
+      <p:regular r:id="rId17"/>
+      <p:bold r:id="rId18"/>
+      <p:italic r:id="rId19"/>
+      <p:boldItalic r:id="rId20"/>
     </p:embeddedFont>
     <p:embeddedFont>
       <p:font typeface="Inter Medium"/>
-      <p:regular r:id="rId18"/>
-      <p:bold r:id="rId19"/>
-      <p:italic r:id="rId20"/>
-      <p:boldItalic r:id="rId21"/>
+      <p:regular r:id="rId21"/>
+      <p:bold r:id="rId22"/>
+      <p:italic r:id="rId23"/>
+      <p:boldItalic r:id="rId24"/>
     </p:embeddedFont>
   </p:embeddedFontLst>
   <p:defaultTextStyle>
@@ -266,8 +268,17 @@
     </a:lvl9pPr>
   </p:defaultTextStyle>
   <p:extLst>
+    <p:ext uri="{EFAFB233-063F-42B5-8137-9DF3F51BA10A}">
+      <p15:sldGuideLst>
+        <p15:guide id="1" orient="horz">
+          <p15:clr>
+            <a:srgbClr val="747775"/>
+          </p15:clr>
+        </p15:guide>
+      </p15:sldGuideLst>
+    </p:ext>
     <p:ext uri="GoogleSlidesCustomDataVersion2">
-      <go:slidesCustomData xmlns:go="http://customooxmlschemas.google.com/" r:id="rId22" roundtripDataSignature="AMtx7mhz5izVmjKjLxdcDaSvioKVKX/eXw=="/>
+      <go:slidesCustomData xmlns:go="http://customooxmlschemas.google.com/" r:id="rId25" roundtripDataSignature="AMtx7mhfeAxyoqQI1bIhKHkndOEmz8K8bw=="/>
     </p:ext>
   </p:extLst>
 </p:presentation>
@@ -958,6 +969,123 @@
 </p:notes>
 </file>
 
+<file path=ppt/notesSlides/notesSlide10.xml><?xml version="1.0" encoding="utf-8"?>
+<p:notes xmlns:a="http://schemas.openxmlformats.org/drawingml/2006/main" xmlns:r="http://schemas.openxmlformats.org/officeDocument/2006/relationships" xmlns:mc="http://schemas.openxmlformats.org/markup-compatibility/2006" xmlns:mv="urn:schemas-microsoft-com:mac:vml" xmlns:p="http://schemas.openxmlformats.org/presentationml/2006/main" xmlns:c="http://schemas.openxmlformats.org/drawingml/2006/chart" xmlns:dgm="http://schemas.openxmlformats.org/drawingml/2006/diagram" xmlns:o="urn:schemas-microsoft-com:office:office" xmlns:v="urn:schemas-microsoft-com:vml" xmlns:pvml="urn:schemas-microsoft-com:office:powerpoint" xmlns:com="http://schemas.openxmlformats.org/drawingml/2006/compatibility" xmlns:p14="http://schemas.microsoft.com/office/powerpoint/2010/main" xmlns:p15="http://schemas.microsoft.com/office/powerpoint/2012/main" xmlns:ahyp="http://schemas.microsoft.com/office/drawing/2018/hyperlinkcolor" showMasterPhAnim="0" showMasterSp="0">
+  <p:cSld>
+    <p:spTree>
+      <p:nvGrpSpPr>
+        <p:cNvPr id="210" name="Shape 210"/>
+        <p:cNvGrpSpPr/>
+        <p:nvPr/>
+      </p:nvGrpSpPr>
+      <p:grpSpPr>
+        <a:xfrm>
+          <a:off x="0" y="0"/>
+          <a:ext cx="0" cy="0"/>
+          <a:chOff x="0" y="0"/>
+          <a:chExt cx="0" cy="0"/>
+        </a:xfrm>
+      </p:grpSpPr>
+      <p:sp>
+        <p:nvSpPr>
+          <p:cNvPr id="211" name="Google Shape;211;p14:notes"/>
+          <p:cNvSpPr/>
+          <p:nvPr>
+            <p:ph idx="2" type="sldImg"/>
+          </p:nvPr>
+        </p:nvSpPr>
+        <p:spPr>
+          <a:xfrm>
+            <a:off x="381000" y="685800"/>
+            <a:ext cx="6096000" cy="3429000"/>
+          </a:xfrm>
+          <a:custGeom>
+            <a:rect b="b" l="l" r="r" t="t"/>
+            <a:pathLst>
+              <a:path extrusionOk="0" h="120000" w="120000">
+                <a:moveTo>
+                  <a:pt x="0" y="0"/>
+                </a:moveTo>
+                <a:lnTo>
+                  <a:pt x="120000" y="0"/>
+                </a:lnTo>
+                <a:lnTo>
+                  <a:pt x="120000" y="120000"/>
+                </a:lnTo>
+                <a:lnTo>
+                  <a:pt x="0" y="120000"/>
+                </a:lnTo>
+                <a:close/>
+              </a:path>
+            </a:pathLst>
+          </a:custGeom>
+          <a:noFill/>
+          <a:ln cap="flat" cmpd="sng" w="9525">
+            <a:solidFill>
+              <a:srgbClr val="000000"/>
+            </a:solidFill>
+            <a:prstDash val="solid"/>
+            <a:round/>
+            <a:headEnd len="sm" w="sm" type="none"/>
+            <a:tailEnd len="sm" w="sm" type="none"/>
+          </a:ln>
+        </p:spPr>
+      </p:sp>
+      <p:sp>
+        <p:nvSpPr>
+          <p:cNvPr id="212" name="Google Shape;212;p14:notes"/>
+          <p:cNvSpPr txBox="1"/>
+          <p:nvPr>
+            <p:ph idx="1" type="body"/>
+          </p:nvPr>
+        </p:nvSpPr>
+        <p:spPr>
+          <a:xfrm>
+            <a:off x="685800" y="4343400"/>
+            <a:ext cx="5486400" cy="4114800"/>
+          </a:xfrm>
+          <a:prstGeom prst="rect">
+            <a:avLst/>
+          </a:prstGeom>
+          <a:noFill/>
+          <a:ln>
+            <a:noFill/>
+          </a:ln>
+        </p:spPr>
+        <p:txBody>
+          <a:bodyPr anchorCtr="0" anchor="t" bIns="91425" lIns="91425" spcFirstLastPara="1" rIns="91425" wrap="square" tIns="91425">
+            <a:noAutofit/>
+          </a:bodyPr>
+          <a:lstStyle/>
+          <a:p>
+            <a:pPr indent="0" lvl="0" marL="0" rtl="0" algn="l">
+              <a:lnSpc>
+                <a:spcPct val="100000"/>
+              </a:lnSpc>
+              <a:spcBef>
+                <a:spcPts val="0"/>
+              </a:spcBef>
+              <a:spcAft>
+                <a:spcPts val="0"/>
+              </a:spcAft>
+              <a:buSzPts val="1100"/>
+              <a:buNone/>
+            </a:pPr>
+            <a:r>
+              <a:t/>
+            </a:r>
+            <a:endParaRPr/>
+          </a:p>
+        </p:txBody>
+      </p:sp>
+    </p:spTree>
+  </p:cSld>
+  <p:clrMapOvr>
+    <a:masterClrMapping/>
+  </p:clrMapOvr>
+</p:notes>
+</file>
+
 <file path=ppt/notesSlides/notesSlide2.xml><?xml version="1.0" encoding="utf-8"?>
 <p:notes xmlns:a="http://schemas.openxmlformats.org/drawingml/2006/main" xmlns:r="http://schemas.openxmlformats.org/officeDocument/2006/relationships" xmlns:mc="http://schemas.openxmlformats.org/markup-compatibility/2006" xmlns:mv="urn:schemas-microsoft-com:mac:vml" xmlns:p="http://schemas.openxmlformats.org/presentationml/2006/main" xmlns:c="http://schemas.openxmlformats.org/drawingml/2006/chart" xmlns:dgm="http://schemas.openxmlformats.org/drawingml/2006/diagram" xmlns:o="urn:schemas-microsoft-com:office:office" xmlns:v="urn:schemas-microsoft-com:vml" xmlns:pvml="urn:schemas-microsoft-com:office:powerpoint" xmlns:com="http://schemas.openxmlformats.org/drawingml/2006/compatibility" xmlns:p14="http://schemas.microsoft.com/office/powerpoint/2010/main" xmlns:p15="http://schemas.microsoft.com/office/powerpoint/2012/main" xmlns:ahyp="http://schemas.microsoft.com/office/drawing/2018/hyperlinkcolor" showMasterPhAnim="0" showMasterSp="0">
   <p:cSld>
@@ -1094,7 +1222,7 @@
       </p:grpSpPr>
       <p:sp>
         <p:nvSpPr>
-          <p:cNvPr id="127" name="Google Shape;127;p6:notes"/>
+          <p:cNvPr id="127" name="Google Shape;127;p11:notes"/>
           <p:cNvSpPr/>
           <p:nvPr>
             <p:ph idx="2" type="sldImg"/>
@@ -1139,7 +1267,7 @@
       </p:sp>
       <p:sp>
         <p:nvSpPr>
-          <p:cNvPr id="128" name="Google Shape;128;p6:notes"/>
+          <p:cNvPr id="128" name="Google Shape;128;p11:notes"/>
           <p:cNvSpPr txBox="1"/>
           <p:nvPr>
             <p:ph idx="1" type="body"/>
@@ -1164,498 +1292,24 @@
           </a:bodyPr>
           <a:lstStyle/>
           <a:p>
-            <a:pPr indent="0" lvl="0" marL="158750" rtl="0" algn="l">
-              <a:lnSpc>
-                <a:spcPct val="100000"/>
-              </a:lnSpc>
-              <a:spcBef>
-                <a:spcPts val="0"/>
-              </a:spcBef>
-              <a:spcAft>
-                <a:spcPts val="0"/>
-              </a:spcAft>
-              <a:buSzPts val="1100"/>
-              <a:buNone/>
-            </a:pPr>
-            <a:r>
-              <a:rPr b="0" lang="fr-FR"/>
-              <a:t>https://app.diagrams.net/?src=about#HSheikoh%2FREnergies_efficiency_prediction%2Fmain%2Fdiagrams%2Farchitecture.drawio#%7B%22pageId%22%3A%22bG0RTmb4xdSiPlx_l64v%22%7D</a:t>
-            </a:r>
-            <a:endParaRPr/>
-          </a:p>
-          <a:p>
-            <a:pPr indent="0" lvl="0" marL="158750" rtl="0" algn="l">
-              <a:lnSpc>
-                <a:spcPct val="100000"/>
-              </a:lnSpc>
-              <a:spcBef>
-                <a:spcPts val="0"/>
-              </a:spcBef>
-              <a:spcAft>
-                <a:spcPts val="0"/>
-              </a:spcAft>
-              <a:buSzPts val="1100"/>
-              <a:buNone/>
-            </a:pPr>
-            <a:r>
-              <a:t/>
-            </a:r>
-            <a:endParaRPr b="1"/>
-          </a:p>
-          <a:p>
-            <a:pPr indent="0" lvl="0" marL="158750" rtl="0" algn="l">
-              <a:lnSpc>
-                <a:spcPct val="100000"/>
-              </a:lnSpc>
-              <a:spcBef>
-                <a:spcPts val="0"/>
-              </a:spcBef>
-              <a:spcAft>
-                <a:spcPts val="0"/>
-              </a:spcAft>
-              <a:buSzPts val="1100"/>
-              <a:buNone/>
-            </a:pPr>
-            <a:r>
-              <a:t/>
-            </a:r>
-            <a:endParaRPr b="1"/>
-          </a:p>
-          <a:p>
-            <a:pPr indent="0" lvl="0" marL="158750" rtl="0" algn="l">
-              <a:lnSpc>
-                <a:spcPct val="100000"/>
-              </a:lnSpc>
-              <a:spcBef>
-                <a:spcPts val="0"/>
-              </a:spcBef>
-              <a:spcAft>
-                <a:spcPts val="0"/>
-              </a:spcAft>
-              <a:buSzPts val="1100"/>
-              <a:buNone/>
-            </a:pPr>
-            <a:r>
-              <a:rPr b="1" lang="fr-FR"/>
-              <a:t>1. Collecte des données</a:t>
-            </a:r>
-            <a:endParaRPr/>
-          </a:p>
-          <a:p>
-            <a:pPr indent="0" lvl="0" marL="158750" rtl="0" algn="l">
-              <a:lnSpc>
-                <a:spcPct val="100000"/>
-              </a:lnSpc>
-              <a:spcBef>
-                <a:spcPts val="0"/>
-              </a:spcBef>
-              <a:spcAft>
-                <a:spcPts val="0"/>
-              </a:spcAft>
-              <a:buSzPts val="1100"/>
+            <a:pPr indent="0" lvl="0" marL="114300" rtl="0" algn="l">
+              <a:lnSpc>
+                <a:spcPct val="115000"/>
+              </a:lnSpc>
+              <a:spcBef>
+                <a:spcPts val="0"/>
+              </a:spcBef>
+              <a:spcAft>
+                <a:spcPts val="0"/>
+              </a:spcAft>
+              <a:buSzPts val="1800"/>
               <a:buNone/>
             </a:pPr>
             <a:r>
               <a:rPr lang="fr-FR"/>
-              <a:t>Données météo OpenWeather (API)</a:t>
+              <a:t>générale architecture</a:t>
             </a:r>
-            <a:endParaRPr/>
-          </a:p>
-          <a:p>
-            <a:pPr indent="0" lvl="0" marL="158750" rtl="0" algn="l">
-              <a:lnSpc>
-                <a:spcPct val="100000"/>
-              </a:lnSpc>
-              <a:spcBef>
-                <a:spcPts val="0"/>
-              </a:spcBef>
-              <a:spcAft>
-                <a:spcPts val="0"/>
-              </a:spcAft>
-              <a:buSzPts val="1100"/>
-              <a:buNone/>
-            </a:pPr>
-            <a:r>
-              <a:rPr lang="fr-FR"/>
-              <a:t>Données satellite Landsat (USGS)</a:t>
-            </a:r>
-            <a:endParaRPr/>
-          </a:p>
-          <a:p>
-            <a:pPr indent="0" lvl="0" marL="158750" rtl="0" algn="l">
-              <a:lnSpc>
-                <a:spcPct val="100000"/>
-              </a:lnSpc>
-              <a:spcBef>
-                <a:spcPts val="0"/>
-              </a:spcBef>
-              <a:spcAft>
-                <a:spcPts val="0"/>
-              </a:spcAft>
-              <a:buSzPts val="1100"/>
-              <a:buNone/>
-            </a:pPr>
-            <a:r>
-              <a:rPr lang="fr-FR"/>
-              <a:t>Historique RTE</a:t>
-            </a:r>
-            <a:endParaRPr/>
-          </a:p>
-          <a:p>
-            <a:pPr indent="0" lvl="0" marL="158750" rtl="0" algn="l">
-              <a:lnSpc>
-                <a:spcPct val="100000"/>
-              </a:lnSpc>
-              <a:spcBef>
-                <a:spcPts val="0"/>
-              </a:spcBef>
-              <a:spcAft>
-                <a:spcPts val="0"/>
-              </a:spcAft>
-              <a:buSzPts val="1100"/>
-              <a:buNone/>
-            </a:pPr>
-            <a:r>
-              <a:rPr lang="fr-FR"/>
-              <a:t>Données solaires locales</a:t>
-            </a:r>
-            <a:endParaRPr/>
-          </a:p>
-          <a:p>
-            <a:pPr indent="0" lvl="0" marL="158750" rtl="0" algn="l">
-              <a:lnSpc>
-                <a:spcPct val="100000"/>
-              </a:lnSpc>
-              <a:spcBef>
-                <a:spcPts val="0"/>
-              </a:spcBef>
-              <a:spcAft>
-                <a:spcPts val="0"/>
-              </a:spcAft>
-              <a:buSzPts val="1100"/>
-              <a:buNone/>
-            </a:pPr>
-            <a:r>
-              <a:t/>
-            </a:r>
-            <a:endParaRPr/>
-          </a:p>
-          <a:p>
-            <a:pPr indent="0" lvl="0" marL="158750" rtl="0" algn="l">
-              <a:lnSpc>
-                <a:spcPct val="100000"/>
-              </a:lnSpc>
-              <a:spcBef>
-                <a:spcPts val="0"/>
-              </a:spcBef>
-              <a:spcAft>
-                <a:spcPts val="0"/>
-              </a:spcAft>
-              <a:buSzPts val="1100"/>
-              <a:buNone/>
-            </a:pPr>
-            <a:r>
-              <a:rPr b="1" lang="fr-FR"/>
-              <a:t>2. Préparation &amp; nettoyage</a:t>
-            </a:r>
-            <a:endParaRPr/>
-          </a:p>
-          <a:p>
-            <a:pPr indent="0" lvl="0" marL="158750" rtl="0" algn="l">
-              <a:lnSpc>
-                <a:spcPct val="100000"/>
-              </a:lnSpc>
-              <a:spcBef>
-                <a:spcPts val="0"/>
-              </a:spcBef>
-              <a:spcAft>
-                <a:spcPts val="0"/>
-              </a:spcAft>
-              <a:buSzPts val="1100"/>
-              <a:buNone/>
-            </a:pPr>
-            <a:r>
-              <a:rPr lang="fr-FR"/>
-              <a:t>Standardisation</a:t>
-            </a:r>
-            <a:endParaRPr/>
-          </a:p>
-          <a:p>
-            <a:pPr indent="0" lvl="0" marL="158750" rtl="0" algn="l">
-              <a:lnSpc>
-                <a:spcPct val="100000"/>
-              </a:lnSpc>
-              <a:spcBef>
-                <a:spcPts val="0"/>
-              </a:spcBef>
-              <a:spcAft>
-                <a:spcPts val="0"/>
-              </a:spcAft>
-              <a:buSzPts val="1100"/>
-              <a:buNone/>
-            </a:pPr>
-            <a:r>
-              <a:rPr lang="fr-FR"/>
-              <a:t>Alignement temporel</a:t>
-            </a:r>
-            <a:endParaRPr/>
-          </a:p>
-          <a:p>
-            <a:pPr indent="0" lvl="0" marL="158750" rtl="0" algn="l">
-              <a:lnSpc>
-                <a:spcPct val="100000"/>
-              </a:lnSpc>
-              <a:spcBef>
-                <a:spcPts val="0"/>
-              </a:spcBef>
-              <a:spcAft>
-                <a:spcPts val="0"/>
-              </a:spcAft>
-              <a:buSzPts val="1100"/>
-              <a:buNone/>
-            </a:pPr>
-            <a:r>
-              <a:rPr lang="fr-FR"/>
-              <a:t>Filtrage géographique Rhône-Alpes</a:t>
-            </a:r>
-            <a:endParaRPr/>
-          </a:p>
-          <a:p>
-            <a:pPr indent="0" lvl="0" marL="158750" rtl="0" algn="l">
-              <a:lnSpc>
-                <a:spcPct val="100000"/>
-              </a:lnSpc>
-              <a:spcBef>
-                <a:spcPts val="0"/>
-              </a:spcBef>
-              <a:spcAft>
-                <a:spcPts val="0"/>
-              </a:spcAft>
-              <a:buSzPts val="1100"/>
-              <a:buNone/>
-            </a:pPr>
-            <a:r>
-              <a:rPr lang="fr-FR"/>
-              <a:t>Mise en qualité</a:t>
-            </a:r>
-            <a:endParaRPr/>
-          </a:p>
-          <a:p>
-            <a:pPr indent="0" lvl="0" marL="158750" rtl="0" algn="l">
-              <a:lnSpc>
-                <a:spcPct val="100000"/>
-              </a:lnSpc>
-              <a:spcBef>
-                <a:spcPts val="0"/>
-              </a:spcBef>
-              <a:spcAft>
-                <a:spcPts val="0"/>
-              </a:spcAft>
-              <a:buSzPts val="1100"/>
-              <a:buNone/>
-            </a:pPr>
-            <a:r>
-              <a:t/>
-            </a:r>
-            <a:endParaRPr/>
-          </a:p>
-          <a:p>
-            <a:pPr indent="0" lvl="0" marL="158750" rtl="0" algn="l">
-              <a:lnSpc>
-                <a:spcPct val="100000"/>
-              </a:lnSpc>
-              <a:spcBef>
-                <a:spcPts val="0"/>
-              </a:spcBef>
-              <a:spcAft>
-                <a:spcPts val="0"/>
-              </a:spcAft>
-              <a:buSzPts val="1100"/>
-              <a:buNone/>
-            </a:pPr>
-            <a:r>
-              <a:rPr b="1" lang="fr-FR"/>
-              <a:t>3. Entraînement &amp; suivi du modèle</a:t>
-            </a:r>
-            <a:endParaRPr/>
-          </a:p>
-          <a:p>
-            <a:pPr indent="0" lvl="0" marL="158750" rtl="0" algn="l">
-              <a:lnSpc>
-                <a:spcPct val="100000"/>
-              </a:lnSpc>
-              <a:spcBef>
-                <a:spcPts val="0"/>
-              </a:spcBef>
-              <a:spcAft>
-                <a:spcPts val="0"/>
-              </a:spcAft>
-              <a:buSzPts val="1100"/>
-              <a:buNone/>
-            </a:pPr>
-            <a:r>
-              <a:rPr lang="fr-FR"/>
-              <a:t>Entraînement local</a:t>
-            </a:r>
-            <a:endParaRPr/>
-          </a:p>
-          <a:p>
-            <a:pPr indent="0" lvl="0" marL="158750" rtl="0" algn="l">
-              <a:lnSpc>
-                <a:spcPct val="100000"/>
-              </a:lnSpc>
-              <a:spcBef>
-                <a:spcPts val="0"/>
-              </a:spcBef>
-              <a:spcAft>
-                <a:spcPts val="0"/>
-              </a:spcAft>
-              <a:buSzPts val="1100"/>
-              <a:buNone/>
-            </a:pPr>
-            <a:r>
-              <a:rPr lang="fr-FR"/>
-              <a:t>Suivi via MLflow</a:t>
-            </a:r>
-            <a:endParaRPr/>
-          </a:p>
-          <a:p>
-            <a:pPr indent="0" lvl="0" marL="158750" rtl="0" algn="l">
-              <a:lnSpc>
-                <a:spcPct val="100000"/>
-              </a:lnSpc>
-              <a:spcBef>
-                <a:spcPts val="0"/>
-              </a:spcBef>
-              <a:spcAft>
-                <a:spcPts val="0"/>
-              </a:spcAft>
-              <a:buSzPts val="1100"/>
-              <a:buNone/>
-            </a:pPr>
-            <a:r>
-              <a:rPr lang="fr-FR"/>
-              <a:t>Versionning dans Model Registry</a:t>
-            </a:r>
-            <a:endParaRPr/>
-          </a:p>
-          <a:p>
-            <a:pPr indent="0" lvl="0" marL="158750" rtl="0" algn="l">
-              <a:lnSpc>
-                <a:spcPct val="100000"/>
-              </a:lnSpc>
-              <a:spcBef>
-                <a:spcPts val="0"/>
-              </a:spcBef>
-              <a:spcAft>
-                <a:spcPts val="0"/>
-              </a:spcAft>
-              <a:buSzPts val="1100"/>
-              <a:buNone/>
-            </a:pPr>
-            <a:r>
-              <a:t/>
-            </a:r>
-            <a:endParaRPr/>
-          </a:p>
-          <a:p>
-            <a:pPr indent="0" lvl="0" marL="158750" rtl="0" algn="l">
-              <a:lnSpc>
-                <a:spcPct val="100000"/>
-              </a:lnSpc>
-              <a:spcBef>
-                <a:spcPts val="0"/>
-              </a:spcBef>
-              <a:spcAft>
-                <a:spcPts val="0"/>
-              </a:spcAft>
-              <a:buSzPts val="1100"/>
-              <a:buNone/>
-            </a:pPr>
-            <a:r>
-              <a:rPr b="1" lang="fr-FR"/>
-              <a:t>4. API &amp; Application</a:t>
-            </a:r>
-            <a:endParaRPr/>
-          </a:p>
-          <a:p>
-            <a:pPr indent="0" lvl="0" marL="158750" rtl="0" algn="l">
-              <a:lnSpc>
-                <a:spcPct val="100000"/>
-              </a:lnSpc>
-              <a:spcBef>
-                <a:spcPts val="0"/>
-              </a:spcBef>
-              <a:spcAft>
-                <a:spcPts val="0"/>
-              </a:spcAft>
-              <a:buSzPts val="1100"/>
-              <a:buNone/>
-            </a:pPr>
-            <a:r>
-              <a:rPr lang="fr-FR"/>
-              <a:t>Modèle servi via une API</a:t>
-            </a:r>
-            <a:endParaRPr/>
-          </a:p>
-          <a:p>
-            <a:pPr indent="0" lvl="0" marL="158750" rtl="0" algn="l">
-              <a:lnSpc>
-                <a:spcPct val="100000"/>
-              </a:lnSpc>
-              <a:spcBef>
-                <a:spcPts val="0"/>
-              </a:spcBef>
-              <a:spcAft>
-                <a:spcPts val="0"/>
-              </a:spcAft>
-              <a:buSzPts val="1100"/>
-              <a:buNone/>
-            </a:pPr>
-            <a:r>
-              <a:rPr lang="fr-FR"/>
-              <a:t>Dashboard Streamlit</a:t>
-            </a:r>
-            <a:endParaRPr/>
-          </a:p>
-          <a:p>
-            <a:pPr indent="0" lvl="0" marL="158750" rtl="0" algn="l">
-              <a:lnSpc>
-                <a:spcPct val="100000"/>
-              </a:lnSpc>
-              <a:spcBef>
-                <a:spcPts val="0"/>
-              </a:spcBef>
-              <a:spcAft>
-                <a:spcPts val="0"/>
-              </a:spcAft>
-              <a:buSzPts val="1100"/>
-              <a:buNone/>
-            </a:pPr>
-            <a:r>
-              <a:rPr lang="fr-FR"/>
-              <a:t>EDA + prévisions 3 jours accessibles à l’utilisateur</a:t>
-            </a:r>
-            <a:endParaRPr/>
-          </a:p>
-          <a:p>
-            <a:pPr indent="0" lvl="0" marL="0" rtl="0" algn="l">
-              <a:lnSpc>
-                <a:spcPct val="100000"/>
-              </a:lnSpc>
-              <a:spcBef>
-                <a:spcPts val="0"/>
-              </a:spcBef>
-              <a:spcAft>
-                <a:spcPts val="0"/>
-              </a:spcAft>
-              <a:buSzPts val="1100"/>
-              <a:buNone/>
-            </a:pPr>
-            <a:r>
-              <a:t/>
-            </a:r>
-            <a:endParaRPr/>
+            <a:endParaRPr sz="1100"/>
           </a:p>
         </p:txBody>
       </p:sp>
@@ -1672,7 +1326,7 @@
   <p:cSld>
     <p:spTree>
       <p:nvGrpSpPr>
-        <p:cNvPr id="139" name="Shape 139"/>
+        <p:cNvPr id="137" name="Shape 137"/>
         <p:cNvGrpSpPr/>
         <p:nvPr/>
       </p:nvGrpSpPr>
@@ -1686,7 +1340,7 @@
       </p:grpSpPr>
       <p:sp>
         <p:nvSpPr>
-          <p:cNvPr id="140" name="Google Shape;140;p3:notes"/>
+          <p:cNvPr id="138" name="Google Shape;138;g3e3a03c189e_0_0:notes"/>
           <p:cNvSpPr/>
           <p:nvPr>
             <p:ph idx="2" type="sldImg"/>
@@ -1731,7 +1385,7 @@
       </p:sp>
       <p:sp>
         <p:nvSpPr>
-          <p:cNvPr id="141" name="Google Shape;141;p3:notes"/>
+          <p:cNvPr id="139" name="Google Shape;139;g3e3a03c189e_0_0:notes"/>
           <p:cNvSpPr txBox="1"/>
           <p:nvPr>
             <p:ph idx="1" type="body"/>
@@ -1756,24 +1410,23 @@
           </a:bodyPr>
           <a:lstStyle/>
           <a:p>
-            <a:pPr indent="0" lvl="0" marL="0" rtl="0" algn="l">
-              <a:lnSpc>
-                <a:spcPct val="100000"/>
-              </a:lnSpc>
-              <a:spcBef>
-                <a:spcPts val="0"/>
-              </a:spcBef>
-              <a:spcAft>
-                <a:spcPts val="0"/>
-              </a:spcAft>
-              <a:buSzPts val="1100"/>
+            <a:pPr indent="0" lvl="0" marL="114300" rtl="0" algn="l">
+              <a:lnSpc>
+                <a:spcPct val="115000"/>
+              </a:lnSpc>
+              <a:spcBef>
+                <a:spcPts val="0"/>
+              </a:spcBef>
+              <a:spcAft>
+                <a:spcPts val="0"/>
+              </a:spcAft>
+              <a:buSzPts val="1800"/>
               <a:buNone/>
             </a:pPr>
             <a:r>
-              <a:rPr lang="fr-FR"/>
-              <a:t>Quantité énergie perdues vs optimisation </a:t>
+              <a:t/>
             </a:r>
-            <a:endParaRPr/>
+            <a:endParaRPr sz="1100"/>
           </a:p>
         </p:txBody>
       </p:sp>
@@ -1804,7 +1457,7 @@
       </p:grpSpPr>
       <p:sp>
         <p:nvSpPr>
-          <p:cNvPr id="149" name="Google Shape;149;p11:notes"/>
+          <p:cNvPr id="149" name="Google Shape;149;g3e3a03c189e_0_15:notes"/>
           <p:cNvSpPr/>
           <p:nvPr>
             <p:ph idx="2" type="sldImg"/>
@@ -1849,7 +1502,7 @@
       </p:sp>
       <p:sp>
         <p:nvSpPr>
-          <p:cNvPr id="150" name="Google Shape;150;p11:notes"/>
+          <p:cNvPr id="150" name="Google Shape;150;g3e3a03c189e_0_15:notes"/>
           <p:cNvSpPr txBox="1"/>
           <p:nvPr>
             <p:ph idx="1" type="body"/>
@@ -1908,7 +1561,7 @@
   <p:cSld>
     <p:spTree>
       <p:nvGrpSpPr>
-        <p:cNvPr id="162" name="Shape 162"/>
+        <p:cNvPr id="159" name="Shape 159"/>
         <p:cNvGrpSpPr/>
         <p:nvPr/>
       </p:nvGrpSpPr>
@@ -1922,7 +1575,7 @@
       </p:grpSpPr>
       <p:sp>
         <p:nvSpPr>
-          <p:cNvPr id="163" name="Google Shape;163;p7:notes"/>
+          <p:cNvPr id="160" name="Google Shape;160;g3e436c1bcfb_0_2:notes"/>
           <p:cNvSpPr/>
           <p:nvPr>
             <p:ph idx="2" type="sldImg"/>
@@ -1967,7 +1620,7 @@
       </p:sp>
       <p:sp>
         <p:nvSpPr>
-          <p:cNvPr id="164" name="Google Shape;164;p7:notes"/>
+          <p:cNvPr id="161" name="Google Shape;161;g3e436c1bcfb_0_2:notes"/>
           <p:cNvSpPr txBox="1"/>
           <p:nvPr>
             <p:ph idx="1" type="body"/>
@@ -1994,102 +1647,22 @@
           <a:p>
             <a:pPr indent="0" lvl="0" marL="114300" rtl="0" algn="l">
               <a:lnSpc>
-                <a:spcPct val="100000"/>
-              </a:lnSpc>
-              <a:spcBef>
-                <a:spcPts val="0"/>
-              </a:spcBef>
-              <a:spcAft>
-                <a:spcPts val="0"/>
-              </a:spcAft>
-              <a:buSzPts val="1100"/>
+                <a:spcPct val="115000"/>
+              </a:lnSpc>
+              <a:spcBef>
+                <a:spcPts val="0"/>
+              </a:spcBef>
+              <a:spcAft>
+                <a:spcPts val="0"/>
+              </a:spcAft>
+              <a:buSzPts val="1800"/>
               <a:buNone/>
             </a:pPr>
             <a:r>
               <a:rPr lang="fr-FR" sz="1100"/>
-              <a:t>Axes de présentation </a:t>
+              <a:t>Plot des erreurs : prédiction meilleure sur données centrales que le sur valeurs basses et haute de la target</a:t>
             </a:r>
-            <a:endParaRPr/>
-          </a:p>
-          <a:p>
-            <a:pPr indent="-298450" lvl="0" marL="457200" rtl="0" algn="l">
-              <a:lnSpc>
-                <a:spcPct val="100000"/>
-              </a:lnSpc>
-              <a:spcBef>
-                <a:spcPts val="0"/>
-              </a:spcBef>
-              <a:spcAft>
-                <a:spcPts val="0"/>
-              </a:spcAft>
-              <a:buSzPts val="1100"/>
-              <a:buChar char="●"/>
-            </a:pPr>
-            <a:r>
-              <a:rPr lang="fr-FR" sz="1100"/>
-              <a:t>Comparaison évolution de la consommation</a:t>
-            </a:r>
-            <a:endParaRPr/>
-          </a:p>
-          <a:p>
-            <a:pPr indent="-298450" lvl="0" marL="457200" rtl="0" algn="l">
-              <a:lnSpc>
-                <a:spcPct val="100000"/>
-              </a:lnSpc>
-              <a:spcBef>
-                <a:spcPts val="0"/>
-              </a:spcBef>
-              <a:spcAft>
-                <a:spcPts val="0"/>
-              </a:spcAft>
-              <a:buSzPts val="1100"/>
-              <a:buChar char="●"/>
-            </a:pPr>
-            <a:r>
-              <a:rPr lang="fr-FR" sz="1100"/>
-              <a:t>Pics de consommations (comportements similaires entre le national et le régional)</a:t>
-            </a:r>
-            <a:endParaRPr/>
-          </a:p>
-          <a:p>
-            <a:pPr indent="-298450" lvl="0" marL="457200" rtl="0" algn="l">
-              <a:lnSpc>
-                <a:spcPct val="100000"/>
-              </a:lnSpc>
-              <a:spcBef>
-                <a:spcPts val="0"/>
-              </a:spcBef>
-              <a:spcAft>
-                <a:spcPts val="0"/>
-              </a:spcAft>
-              <a:buSzPts val="1100"/>
-              <a:buChar char="●"/>
-            </a:pPr>
-            <a:r>
-              <a:rPr lang="fr-FR" sz="1100"/>
-              <a:t>Mix énergétique : part de nucléaire au niveau national vs part des énergies renouvelables en AURA</a:t>
-            </a:r>
-            <a:endParaRPr/>
-          </a:p>
-          <a:p>
-            <a:pPr indent="-298450" lvl="0" marL="457200" rtl="0" algn="l">
-              <a:lnSpc>
-                <a:spcPct val="100000"/>
-              </a:lnSpc>
-              <a:spcBef>
-                <a:spcPts val="0"/>
-              </a:spcBef>
-              <a:spcAft>
-                <a:spcPts val="0"/>
-              </a:spcAft>
-              <a:buSzPts val="1100"/>
-              <a:buChar char="●"/>
-            </a:pPr>
-            <a:r>
-              <a:rPr lang="fr-FR" sz="1100"/>
-              <a:t>Part des échanges : export et import au niveau national vs régional (AURA fortement exportatrice 🡪 cf. part de l’hydro électrique)</a:t>
-            </a:r>
-            <a:endParaRPr/>
+            <a:endParaRPr sz="1100"/>
           </a:p>
         </p:txBody>
       </p:sp>
@@ -2106,7 +1679,7 @@
   <p:cSld>
     <p:spTree>
       <p:nvGrpSpPr>
-        <p:cNvPr id="180" name="Shape 180"/>
+        <p:cNvPr id="172" name="Shape 172"/>
         <p:cNvGrpSpPr/>
         <p:nvPr/>
       </p:nvGrpSpPr>
@@ -2120,7 +1693,7 @@
       </p:grpSpPr>
       <p:sp>
         <p:nvSpPr>
-          <p:cNvPr id="181" name="Google Shape;181;p12:notes"/>
+          <p:cNvPr id="173" name="Google Shape;173;g3e3a03c189e_0_28:notes"/>
           <p:cNvSpPr/>
           <p:nvPr>
             <p:ph idx="2" type="sldImg"/>
@@ -2165,7 +1738,7 @@
       </p:sp>
       <p:sp>
         <p:nvSpPr>
-          <p:cNvPr id="182" name="Google Shape;182;p12:notes"/>
+          <p:cNvPr id="174" name="Google Shape;174;g3e3a03c189e_0_28:notes"/>
           <p:cNvSpPr txBox="1"/>
           <p:nvPr>
             <p:ph idx="1" type="body"/>
@@ -2192,239 +1765,22 @@
           <a:p>
             <a:pPr indent="0" lvl="0" marL="114300" rtl="0" algn="l">
               <a:lnSpc>
-                <a:spcPct val="100000"/>
-              </a:lnSpc>
-              <a:spcBef>
-                <a:spcPts val="0"/>
-              </a:spcBef>
-              <a:spcAft>
-                <a:spcPts val="0"/>
-              </a:spcAft>
-              <a:buSzPts val="1100"/>
-              <a:buNone/>
-            </a:pPr>
-            <a:r>
-              <a:rPr b="1" lang="fr-FR" sz="1100"/>
-              <a:t>Valeur immédiate :</a:t>
-            </a:r>
-            <a:endParaRPr/>
-          </a:p>
-          <a:p>
-            <a:pPr indent="0" lvl="0" marL="114300" rtl="0" algn="l">
-              <a:lnSpc>
-                <a:spcPct val="100000"/>
-              </a:lnSpc>
-              <a:spcBef>
-                <a:spcPts val="0"/>
-              </a:spcBef>
-              <a:spcAft>
-                <a:spcPts val="0"/>
-              </a:spcAft>
-              <a:buSzPts val="1100"/>
+                <a:spcPct val="115000"/>
+              </a:lnSpc>
+              <a:spcBef>
+                <a:spcPts val="0"/>
+              </a:spcBef>
+              <a:spcAft>
+                <a:spcPts val="0"/>
+              </a:spcAft>
+              <a:buSzPts val="1800"/>
               <a:buNone/>
             </a:pPr>
             <a:r>
               <a:rPr lang="fr-FR" sz="1100"/>
-              <a:t>Visibilité sur 3 jours → meilleure planification.</a:t>
+              <a:t>Plot des erreurs : prédiction meilleure sur données centrales que le sur valeurs basses et haute de la target</a:t>
             </a:r>
-            <a:endParaRPr/>
-          </a:p>
-          <a:p>
-            <a:pPr indent="0" lvl="0" marL="114300" rtl="0" algn="l">
-              <a:lnSpc>
-                <a:spcPct val="100000"/>
-              </a:lnSpc>
-              <a:spcBef>
-                <a:spcPts val="0"/>
-              </a:spcBef>
-              <a:spcAft>
-                <a:spcPts val="0"/>
-              </a:spcAft>
-              <a:buSzPts val="1100"/>
-              <a:buNone/>
-            </a:pPr>
-            <a:r>
-              <a:rPr lang="fr-FR" sz="1100"/>
-              <a:t>Anticipation des pics et baisses → réseau plus stable, délestage de l’hydro électrique au profit du solaire</a:t>
-            </a:r>
-            <a:endParaRPr/>
-          </a:p>
-          <a:p>
-            <a:pPr indent="0" lvl="0" marL="114300" rtl="0" algn="l">
-              <a:lnSpc>
-                <a:spcPct val="100000"/>
-              </a:lnSpc>
-              <a:spcBef>
-                <a:spcPts val="0"/>
-              </a:spcBef>
-              <a:spcAft>
-                <a:spcPts val="0"/>
-              </a:spcAft>
-              <a:buSzPts val="1100"/>
-              <a:buNone/>
-            </a:pPr>
-            <a:r>
-              <a:rPr lang="fr-FR" sz="1100"/>
-              <a:t>Lecture régionale fine → priorisation des investissements ??</a:t>
-            </a:r>
-            <a:endParaRPr/>
-          </a:p>
-          <a:p>
-            <a:pPr indent="0" lvl="0" marL="114300" rtl="0" algn="l">
-              <a:lnSpc>
-                <a:spcPct val="100000"/>
-              </a:lnSpc>
-              <a:spcBef>
-                <a:spcPts val="0"/>
-              </a:spcBef>
-              <a:spcAft>
-                <a:spcPts val="0"/>
-              </a:spcAft>
-              <a:buSzPts val="1100"/>
-              <a:buNone/>
-            </a:pPr>
-            <a:r>
-              <a:rPr lang="fr-FR" sz="1100"/>
-              <a:t>Outil d’aide à la décision clair et exploitable</a:t>
-            </a:r>
-            <a:endParaRPr/>
-          </a:p>
-          <a:p>
-            <a:pPr indent="-228600" lvl="0" marL="457200" rtl="0" algn="l">
-              <a:lnSpc>
-                <a:spcPct val="100000"/>
-              </a:lnSpc>
-              <a:spcBef>
-                <a:spcPts val="0"/>
-              </a:spcBef>
-              <a:spcAft>
-                <a:spcPts val="0"/>
-              </a:spcAft>
-              <a:buSzPts val="1100"/>
-              <a:buNone/>
-            </a:pPr>
-            <a:r>
-              <a:t/>
-            </a:r>
-            <a:endParaRPr b="1" sz="1100"/>
-          </a:p>
-          <a:p>
-            <a:pPr indent="0" lvl="0" marL="114300" rtl="0" algn="l">
-              <a:lnSpc>
-                <a:spcPct val="100000"/>
-              </a:lnSpc>
-              <a:spcBef>
-                <a:spcPts val="0"/>
-              </a:spcBef>
-              <a:spcAft>
-                <a:spcPts val="0"/>
-              </a:spcAft>
-              <a:buSzPts val="1100"/>
-              <a:buNone/>
-            </a:pPr>
-            <a:r>
-              <a:rPr b="1" lang="fr-FR" sz="1100"/>
-              <a:t>Perspectives :</a:t>
-            </a:r>
-            <a:endParaRPr/>
-          </a:p>
-          <a:p>
-            <a:pPr indent="0" lvl="0" marL="114300" rtl="0" algn="l">
-              <a:lnSpc>
-                <a:spcPct val="100000"/>
-              </a:lnSpc>
-              <a:spcBef>
-                <a:spcPts val="0"/>
-              </a:spcBef>
-              <a:spcAft>
-                <a:spcPts val="0"/>
-              </a:spcAft>
-              <a:buSzPts val="1100"/>
-              <a:buNone/>
-            </a:pPr>
-            <a:r>
-              <a:rPr lang="fr-FR" sz="1100"/>
-              <a:t>Passage en temps réel</a:t>
-            </a:r>
-            <a:endParaRPr/>
-          </a:p>
-          <a:p>
-            <a:pPr indent="0" lvl="0" marL="114300" rtl="0" algn="l">
-              <a:lnSpc>
-                <a:spcPct val="100000"/>
-              </a:lnSpc>
-              <a:spcBef>
-                <a:spcPts val="0"/>
-              </a:spcBef>
-              <a:spcAft>
-                <a:spcPts val="0"/>
-              </a:spcAft>
-              <a:buSzPts val="1100"/>
-              <a:buNone/>
-            </a:pPr>
-            <a:r>
-              <a:rPr lang="fr-FR" sz="1100"/>
-              <a:t>Ajout de la prévision intra day (données de prod RTE disponibles à la demi heure)</a:t>
-            </a:r>
-            <a:endParaRPr/>
-          </a:p>
-          <a:p>
-            <a:pPr indent="0" lvl="0" marL="114300" rtl="0" algn="l">
-              <a:lnSpc>
-                <a:spcPct val="100000"/>
-              </a:lnSpc>
-              <a:spcBef>
-                <a:spcPts val="0"/>
-              </a:spcBef>
-              <a:spcAft>
-                <a:spcPts val="0"/>
-              </a:spcAft>
-              <a:buSzPts val="1100"/>
-              <a:buNone/>
-            </a:pPr>
-            <a:r>
-              <a:rPr lang="fr-FR" sz="1100"/>
-              <a:t>Enrichissement par données satellitaires</a:t>
-            </a:r>
-            <a:endParaRPr/>
-          </a:p>
-          <a:p>
-            <a:pPr indent="0" lvl="0" marL="158750" rtl="0" algn="l">
-              <a:lnSpc>
-                <a:spcPct val="100000"/>
-              </a:lnSpc>
-              <a:spcBef>
-                <a:spcPts val="0"/>
-              </a:spcBef>
-              <a:spcAft>
-                <a:spcPts val="0"/>
-              </a:spcAft>
-              <a:buSzPts val="1100"/>
-              <a:buNone/>
-            </a:pPr>
-            <a:r>
-              <a:t/>
-            </a:r>
-            <a:endParaRPr/>
-          </a:p>
-          <a:p>
-            <a:pPr indent="0" lvl="0" marL="0" rtl="0" algn="l">
-              <a:lnSpc>
-                <a:spcPct val="100000"/>
-              </a:lnSpc>
-              <a:spcBef>
-                <a:spcPts val="0"/>
-              </a:spcBef>
-              <a:spcAft>
-                <a:spcPts val="0"/>
-              </a:spcAft>
-              <a:buSzPts val="1100"/>
-              <a:buNone/>
-            </a:pPr>
-            <a:r>
-              <a:t/>
-            </a:r>
-            <a:endParaRPr/>
+            <a:endParaRPr sz="1100"/>
           </a:p>
         </p:txBody>
       </p:sp>
@@ -2441,7 +1797,7 @@
   <p:cSld>
     <p:spTree>
       <p:nvGrpSpPr>
-        <p:cNvPr id="196" name="Shape 196"/>
+        <p:cNvPr id="184" name="Shape 184"/>
         <p:cNvGrpSpPr/>
         <p:nvPr/>
       </p:nvGrpSpPr>
@@ -2455,7 +1811,7 @@
       </p:grpSpPr>
       <p:sp>
         <p:nvSpPr>
-          <p:cNvPr id="197" name="Google Shape;197;p14:notes"/>
+          <p:cNvPr id="185" name="Google Shape;185;g3e3a03c189e_0_42:notes"/>
           <p:cNvSpPr/>
           <p:nvPr>
             <p:ph idx="2" type="sldImg"/>
@@ -2500,7 +1856,7 @@
       </p:sp>
       <p:sp>
         <p:nvSpPr>
-          <p:cNvPr id="198" name="Google Shape;198;p14:notes"/>
+          <p:cNvPr id="186" name="Google Shape;186;g3e3a03c189e_0_42:notes"/>
           <p:cNvSpPr txBox="1"/>
           <p:nvPr>
             <p:ph idx="1" type="body"/>
@@ -2524,6 +1880,342 @@
             <a:noAutofit/>
           </a:bodyPr>
           <a:lstStyle/>
+          <a:p>
+            <a:pPr indent="0" lvl="0" marL="114300" rtl="0" algn="l">
+              <a:lnSpc>
+                <a:spcPct val="115000"/>
+              </a:lnSpc>
+              <a:spcBef>
+                <a:spcPts val="0"/>
+              </a:spcBef>
+              <a:spcAft>
+                <a:spcPts val="0"/>
+              </a:spcAft>
+              <a:buSzPts val="1800"/>
+              <a:buNone/>
+            </a:pPr>
+            <a:r>
+              <a:rPr lang="fr-FR" sz="1100"/>
+              <a:t>Plot des erreurs : prédiction meilleure sur données centrales que le sur valeurs basses et haute de la target</a:t>
+            </a:r>
+            <a:endParaRPr sz="1100"/>
+          </a:p>
+        </p:txBody>
+      </p:sp>
+    </p:spTree>
+  </p:cSld>
+  <p:clrMapOvr>
+    <a:masterClrMapping/>
+  </p:clrMapOvr>
+</p:notes>
+</file>
+
+<file path=ppt/notesSlides/notesSlide9.xml><?xml version="1.0" encoding="utf-8"?>
+<p:notes xmlns:a="http://schemas.openxmlformats.org/drawingml/2006/main" xmlns:r="http://schemas.openxmlformats.org/officeDocument/2006/relationships" xmlns:mc="http://schemas.openxmlformats.org/markup-compatibility/2006" xmlns:mv="urn:schemas-microsoft-com:mac:vml" xmlns:p="http://schemas.openxmlformats.org/presentationml/2006/main" xmlns:c="http://schemas.openxmlformats.org/drawingml/2006/chart" xmlns:dgm="http://schemas.openxmlformats.org/drawingml/2006/diagram" xmlns:o="urn:schemas-microsoft-com:office:office" xmlns:v="urn:schemas-microsoft-com:vml" xmlns:pvml="urn:schemas-microsoft-com:office:powerpoint" xmlns:com="http://schemas.openxmlformats.org/drawingml/2006/compatibility" xmlns:p14="http://schemas.microsoft.com/office/powerpoint/2010/main" xmlns:p15="http://schemas.microsoft.com/office/powerpoint/2012/main" xmlns:ahyp="http://schemas.microsoft.com/office/drawing/2018/hyperlinkcolor" showMasterPhAnim="0" showMasterSp="0">
+  <p:cSld>
+    <p:spTree>
+      <p:nvGrpSpPr>
+        <p:cNvPr id="198" name="Shape 198"/>
+        <p:cNvGrpSpPr/>
+        <p:nvPr/>
+      </p:nvGrpSpPr>
+      <p:grpSpPr>
+        <a:xfrm>
+          <a:off x="0" y="0"/>
+          <a:ext cx="0" cy="0"/>
+          <a:chOff x="0" y="0"/>
+          <a:chExt cx="0" cy="0"/>
+        </a:xfrm>
+      </p:grpSpPr>
+      <p:sp>
+        <p:nvSpPr>
+          <p:cNvPr id="199" name="Google Shape;199;p12:notes"/>
+          <p:cNvSpPr/>
+          <p:nvPr>
+            <p:ph idx="2" type="sldImg"/>
+          </p:nvPr>
+        </p:nvSpPr>
+        <p:spPr>
+          <a:xfrm>
+            <a:off x="381000" y="685800"/>
+            <a:ext cx="6096000" cy="3429000"/>
+          </a:xfrm>
+          <a:custGeom>
+            <a:rect b="b" l="l" r="r" t="t"/>
+            <a:pathLst>
+              <a:path extrusionOk="0" h="120000" w="120000">
+                <a:moveTo>
+                  <a:pt x="0" y="0"/>
+                </a:moveTo>
+                <a:lnTo>
+                  <a:pt x="120000" y="0"/>
+                </a:lnTo>
+                <a:lnTo>
+                  <a:pt x="120000" y="120000"/>
+                </a:lnTo>
+                <a:lnTo>
+                  <a:pt x="0" y="120000"/>
+                </a:lnTo>
+                <a:close/>
+              </a:path>
+            </a:pathLst>
+          </a:custGeom>
+          <a:noFill/>
+          <a:ln cap="flat" cmpd="sng" w="9525">
+            <a:solidFill>
+              <a:srgbClr val="000000"/>
+            </a:solidFill>
+            <a:prstDash val="solid"/>
+            <a:round/>
+            <a:headEnd len="sm" w="sm" type="none"/>
+            <a:tailEnd len="sm" w="sm" type="none"/>
+          </a:ln>
+        </p:spPr>
+      </p:sp>
+      <p:sp>
+        <p:nvSpPr>
+          <p:cNvPr id="200" name="Google Shape;200;p12:notes"/>
+          <p:cNvSpPr txBox="1"/>
+          <p:nvPr>
+            <p:ph idx="1" type="body"/>
+          </p:nvPr>
+        </p:nvSpPr>
+        <p:spPr>
+          <a:xfrm>
+            <a:off x="685800" y="4343400"/>
+            <a:ext cx="5486400" cy="4114800"/>
+          </a:xfrm>
+          <a:prstGeom prst="rect">
+            <a:avLst/>
+          </a:prstGeom>
+          <a:noFill/>
+          <a:ln>
+            <a:noFill/>
+          </a:ln>
+        </p:spPr>
+        <p:txBody>
+          <a:bodyPr anchorCtr="0" anchor="t" bIns="91425" lIns="91425" spcFirstLastPara="1" rIns="91425" wrap="square" tIns="91425">
+            <a:noAutofit/>
+          </a:bodyPr>
+          <a:lstStyle/>
+          <a:p>
+            <a:pPr indent="0" lvl="0" marL="114300" rtl="0" algn="l">
+              <a:lnSpc>
+                <a:spcPct val="100000"/>
+              </a:lnSpc>
+              <a:spcBef>
+                <a:spcPts val="0"/>
+              </a:spcBef>
+              <a:spcAft>
+                <a:spcPts val="0"/>
+              </a:spcAft>
+              <a:buSzPts val="1100"/>
+              <a:buNone/>
+            </a:pPr>
+            <a:r>
+              <a:rPr b="1" lang="fr-FR" sz="1100"/>
+              <a:t>Valeur immédiate :</a:t>
+            </a:r>
+            <a:endParaRPr/>
+          </a:p>
+          <a:p>
+            <a:pPr indent="0" lvl="0" marL="114300" rtl="0" algn="l">
+              <a:lnSpc>
+                <a:spcPct val="100000"/>
+              </a:lnSpc>
+              <a:spcBef>
+                <a:spcPts val="0"/>
+              </a:spcBef>
+              <a:spcAft>
+                <a:spcPts val="0"/>
+              </a:spcAft>
+              <a:buSzPts val="1100"/>
+              <a:buNone/>
+            </a:pPr>
+            <a:r>
+              <a:rPr lang="fr-FR" sz="1100"/>
+              <a:t>Visibilité sur 3 jours → meilleure planification.</a:t>
+            </a:r>
+            <a:endParaRPr/>
+          </a:p>
+          <a:p>
+            <a:pPr indent="0" lvl="0" marL="114300" rtl="0" algn="l">
+              <a:lnSpc>
+                <a:spcPct val="100000"/>
+              </a:lnSpc>
+              <a:spcBef>
+                <a:spcPts val="0"/>
+              </a:spcBef>
+              <a:spcAft>
+                <a:spcPts val="0"/>
+              </a:spcAft>
+              <a:buSzPts val="1100"/>
+              <a:buNone/>
+            </a:pPr>
+            <a:r>
+              <a:rPr lang="fr-FR" sz="1100"/>
+              <a:t>Anticipation des pics et baisses → réseau plus stable, délestage de l’hydro électrique au profit du solaire</a:t>
+            </a:r>
+            <a:endParaRPr/>
+          </a:p>
+          <a:p>
+            <a:pPr indent="0" lvl="0" marL="114300" rtl="0" algn="l">
+              <a:lnSpc>
+                <a:spcPct val="100000"/>
+              </a:lnSpc>
+              <a:spcBef>
+                <a:spcPts val="0"/>
+              </a:spcBef>
+              <a:spcAft>
+                <a:spcPts val="0"/>
+              </a:spcAft>
+              <a:buSzPts val="1100"/>
+              <a:buNone/>
+            </a:pPr>
+            <a:r>
+              <a:rPr lang="fr-FR" sz="1100"/>
+              <a:t>Lecture régionale fine → priorisation des investissements ??</a:t>
+            </a:r>
+            <a:endParaRPr/>
+          </a:p>
+          <a:p>
+            <a:pPr indent="0" lvl="0" marL="114300" rtl="0" algn="l">
+              <a:lnSpc>
+                <a:spcPct val="100000"/>
+              </a:lnSpc>
+              <a:spcBef>
+                <a:spcPts val="0"/>
+              </a:spcBef>
+              <a:spcAft>
+                <a:spcPts val="0"/>
+              </a:spcAft>
+              <a:buSzPts val="1100"/>
+              <a:buNone/>
+            </a:pPr>
+            <a:r>
+              <a:rPr lang="fr-FR" sz="1100"/>
+              <a:t>Outil d’aide à la décision clair et exploitable</a:t>
+            </a:r>
+            <a:endParaRPr/>
+          </a:p>
+          <a:p>
+            <a:pPr indent="-228600" lvl="0" marL="457200" rtl="0" algn="l">
+              <a:lnSpc>
+                <a:spcPct val="100000"/>
+              </a:lnSpc>
+              <a:spcBef>
+                <a:spcPts val="0"/>
+              </a:spcBef>
+              <a:spcAft>
+                <a:spcPts val="0"/>
+              </a:spcAft>
+              <a:buSzPts val="1100"/>
+              <a:buNone/>
+            </a:pPr>
+            <a:r>
+              <a:t/>
+            </a:r>
+            <a:endParaRPr b="1" sz="1100"/>
+          </a:p>
+          <a:p>
+            <a:pPr indent="0" lvl="0" marL="114300" rtl="0" algn="l">
+              <a:lnSpc>
+                <a:spcPct val="100000"/>
+              </a:lnSpc>
+              <a:spcBef>
+                <a:spcPts val="0"/>
+              </a:spcBef>
+              <a:spcAft>
+                <a:spcPts val="0"/>
+              </a:spcAft>
+              <a:buSzPts val="1100"/>
+              <a:buNone/>
+            </a:pPr>
+            <a:r>
+              <a:rPr b="1" lang="fr-FR" sz="1100"/>
+              <a:t>Perspectives :</a:t>
+            </a:r>
+            <a:endParaRPr/>
+          </a:p>
+          <a:p>
+            <a:pPr indent="0" lvl="0" marL="114300" rtl="0" algn="l">
+              <a:lnSpc>
+                <a:spcPct val="100000"/>
+              </a:lnSpc>
+              <a:spcBef>
+                <a:spcPts val="0"/>
+              </a:spcBef>
+              <a:spcAft>
+                <a:spcPts val="0"/>
+              </a:spcAft>
+              <a:buSzPts val="1100"/>
+              <a:buNone/>
+            </a:pPr>
+            <a:r>
+              <a:rPr lang="fr-FR" sz="1100"/>
+              <a:t>Passage en temps réel</a:t>
+            </a:r>
+            <a:endParaRPr/>
+          </a:p>
+          <a:p>
+            <a:pPr indent="0" lvl="0" marL="114300" rtl="0" algn="l">
+              <a:lnSpc>
+                <a:spcPct val="100000"/>
+              </a:lnSpc>
+              <a:spcBef>
+                <a:spcPts val="0"/>
+              </a:spcBef>
+              <a:spcAft>
+                <a:spcPts val="0"/>
+              </a:spcAft>
+              <a:buSzPts val="1100"/>
+              <a:buNone/>
+            </a:pPr>
+            <a:r>
+              <a:rPr lang="fr-FR" sz="1100"/>
+              <a:t>Ajout de la prévision intra day (données de prod RTE disponibles à la demi heure)</a:t>
+            </a:r>
+            <a:endParaRPr/>
+          </a:p>
+          <a:p>
+            <a:pPr indent="0" lvl="0" marL="114300" rtl="0" algn="l">
+              <a:lnSpc>
+                <a:spcPct val="100000"/>
+              </a:lnSpc>
+              <a:spcBef>
+                <a:spcPts val="0"/>
+              </a:spcBef>
+              <a:spcAft>
+                <a:spcPts val="0"/>
+              </a:spcAft>
+              <a:buSzPts val="1100"/>
+              <a:buNone/>
+            </a:pPr>
+            <a:r>
+              <a:rPr lang="fr-FR" sz="1100"/>
+              <a:t>Enrichissement par données satellitaires</a:t>
+            </a:r>
+            <a:endParaRPr/>
+          </a:p>
+          <a:p>
+            <a:pPr indent="0" lvl="0" marL="158750" rtl="0" algn="l">
+              <a:lnSpc>
+                <a:spcPct val="100000"/>
+              </a:lnSpc>
+              <a:spcBef>
+                <a:spcPts val="0"/>
+              </a:spcBef>
+              <a:spcAft>
+                <a:spcPts val="0"/>
+              </a:spcAft>
+              <a:buSzPts val="1100"/>
+              <a:buNone/>
+            </a:pPr>
+            <a:r>
+              <a:t/>
+            </a:r>
+            <a:endParaRPr/>
+          </a:p>
           <a:p>
             <a:pPr indent="0" lvl="0" marL="0" rtl="0" algn="l">
               <a:lnSpc>
@@ -18021,7 +17713,7 @@
                 <a:cs typeface="Inter SemiBold"/>
                 <a:sym typeface="Inter SemiBold"/>
               </a:rPr>
-              <a:t>Projet GetAround</a:t>
+              <a:t>Projet Stripe</a:t>
             </a:r>
             <a:endParaRPr sz="4000">
               <a:solidFill>
@@ -18139,7 +17831,7 @@
                 <a:cs typeface="Inter Medium"/>
                 <a:sym typeface="Inter Medium"/>
               </a:rPr>
-              <a:t>Déploiement d’outils d’aide à la décision</a:t>
+              <a:t>Design d’architecture</a:t>
             </a:r>
             <a:endParaRPr sz="2500">
               <a:solidFill>
@@ -18219,6 +17911,160 @@
           </a:p>
         </p:txBody>
       </p:sp>
+    </p:spTree>
+  </p:cSld>
+  <p:clrMapOvr>
+    <a:masterClrMapping/>
+  </p:clrMapOvr>
+</p:sld>
+</file>
+
+<file path=ppt/slides/slide10.xml><?xml version="1.0" encoding="utf-8"?>
+<p:sld xmlns:a="http://schemas.openxmlformats.org/drawingml/2006/main" xmlns:r="http://schemas.openxmlformats.org/officeDocument/2006/relationships" xmlns:mc="http://schemas.openxmlformats.org/markup-compatibility/2006" xmlns:mv="urn:schemas-microsoft-com:mac:vml" xmlns:p="http://schemas.openxmlformats.org/presentationml/2006/main" xmlns:c="http://schemas.openxmlformats.org/drawingml/2006/chart" xmlns:dgm="http://schemas.openxmlformats.org/drawingml/2006/diagram" xmlns:o="urn:schemas-microsoft-com:office:office" xmlns:v="urn:schemas-microsoft-com:vml" xmlns:pvml="urn:schemas-microsoft-com:office:powerpoint" xmlns:com="http://schemas.openxmlformats.org/drawingml/2006/compatibility" xmlns:p14="http://schemas.microsoft.com/office/powerpoint/2010/main" xmlns:p15="http://schemas.microsoft.com/office/powerpoint/2012/main" xmlns:ahyp="http://schemas.microsoft.com/office/drawing/2018/hyperlinkcolor">
+  <p:cSld>
+    <p:bg>
+      <p:bgPr>
+        <a:solidFill>
+          <a:srgbClr val="00DBD0"/>
+        </a:solidFill>
+      </p:bgPr>
+    </p:bg>
+    <p:spTree>
+      <p:nvGrpSpPr>
+        <p:cNvPr id="213" name="Shape 213"/>
+        <p:cNvGrpSpPr/>
+        <p:nvPr/>
+      </p:nvGrpSpPr>
+      <p:grpSpPr>
+        <a:xfrm>
+          <a:off x="0" y="0"/>
+          <a:ext cx="0" cy="0"/>
+          <a:chOff x="0" y="0"/>
+          <a:chExt cx="0" cy="0"/>
+        </a:xfrm>
+      </p:grpSpPr>
+      <p:sp>
+        <p:nvSpPr>
+          <p:cNvPr id="214" name="Google Shape;214;p14"/>
+          <p:cNvSpPr txBox="1"/>
+          <p:nvPr>
+            <p:ph idx="4294967295" type="ctrTitle"/>
+          </p:nvPr>
+        </p:nvSpPr>
+        <p:spPr>
+          <a:xfrm>
+            <a:off x="1089725" y="1970775"/>
+            <a:ext cx="6269100" cy="698400"/>
+          </a:xfrm>
+          <a:prstGeom prst="rect">
+            <a:avLst/>
+          </a:prstGeom>
+          <a:noFill/>
+          <a:ln>
+            <a:noFill/>
+          </a:ln>
+        </p:spPr>
+        <p:txBody>
+          <a:bodyPr anchorCtr="0" anchor="t" bIns="91425" lIns="91425" spcFirstLastPara="1" rIns="91425" wrap="square" tIns="91425">
+            <a:noAutofit/>
+          </a:bodyPr>
+          <a:lstStyle/>
+          <a:p>
+            <a:pPr indent="0" lvl="0" marL="0" marR="0" rtl="0" algn="l">
+              <a:lnSpc>
+                <a:spcPct val="100000"/>
+              </a:lnSpc>
+              <a:spcBef>
+                <a:spcPts val="0"/>
+              </a:spcBef>
+              <a:spcAft>
+                <a:spcPts val="0"/>
+              </a:spcAft>
+              <a:buClr>
+                <a:schemeClr val="dk1"/>
+              </a:buClr>
+              <a:buSzPts val="2800"/>
+              <a:buFont typeface="Arial"/>
+              <a:buNone/>
+            </a:pPr>
+            <a:r>
+              <a:rPr b="0" i="0" lang="fr-FR" sz="5200" u="none" cap="none" strike="noStrike">
+                <a:solidFill>
+                  <a:srgbClr val="0E3449"/>
+                </a:solidFill>
+                <a:latin typeface="Inter SemiBold"/>
+                <a:ea typeface="Inter SemiBold"/>
+                <a:cs typeface="Inter SemiBold"/>
+                <a:sym typeface="Inter SemiBold"/>
+              </a:rPr>
+              <a:t>Des questions ?</a:t>
+            </a:r>
+            <a:endParaRPr b="0" i="0" sz="5200" u="none" cap="none" strike="noStrike">
+              <a:solidFill>
+                <a:srgbClr val="0E3449"/>
+              </a:solidFill>
+              <a:latin typeface="Inter SemiBold"/>
+              <a:ea typeface="Inter SemiBold"/>
+              <a:cs typeface="Inter SemiBold"/>
+              <a:sym typeface="Inter SemiBold"/>
+            </a:endParaRPr>
+          </a:p>
+        </p:txBody>
+      </p:sp>
+      <p:pic>
+        <p:nvPicPr>
+          <p:cNvPr id="215" name="Google Shape;215;p14"/>
+          <p:cNvPicPr preferRelativeResize="0"/>
+          <p:nvPr/>
+        </p:nvPicPr>
+        <p:blipFill rotWithShape="1">
+          <a:blip r:embed="rId3">
+            <a:alphaModFix/>
+          </a:blip>
+          <a:srcRect b="0" l="0" r="0" t="0"/>
+          <a:stretch/>
+        </p:blipFill>
+        <p:spPr>
+          <a:xfrm>
+            <a:off x="3918625" y="3006625"/>
+            <a:ext cx="4599299" cy="2136876"/>
+          </a:xfrm>
+          <a:prstGeom prst="rect">
+            <a:avLst/>
+          </a:prstGeom>
+          <a:noFill/>
+          <a:ln>
+            <a:noFill/>
+          </a:ln>
+        </p:spPr>
+      </p:pic>
+      <p:pic>
+        <p:nvPicPr>
+          <p:cNvPr id="216" name="Google Shape;216;p14"/>
+          <p:cNvPicPr preferRelativeResize="0"/>
+          <p:nvPr/>
+        </p:nvPicPr>
+        <p:blipFill rotWithShape="1">
+          <a:blip r:embed="rId4">
+            <a:alphaModFix/>
+          </a:blip>
+          <a:srcRect b="0" l="0" r="0" t="0"/>
+          <a:stretch/>
+        </p:blipFill>
+        <p:spPr>
+          <a:xfrm>
+            <a:off x="1232375" y="915775"/>
+            <a:ext cx="797425" cy="839825"/>
+          </a:xfrm>
+          <a:prstGeom prst="rect">
+            <a:avLst/>
+          </a:prstGeom>
+          <a:noFill/>
+          <a:ln>
+            <a:noFill/>
+          </a:ln>
+        </p:spPr>
+      </p:pic>
     </p:spTree>
   </p:cSld>
   <p:clrMapOvr>
@@ -18289,7 +18135,7 @@
               <a:buNone/>
             </a:pPr>
             <a:r>
-              <a:rPr lang="fr-FR" sz="2500">
+              <a:rPr b="0" i="0" lang="fr-FR" sz="2500" u="none" cap="none" strike="noStrike">
                 <a:solidFill>
                   <a:srgbClr val="0E3449"/>
                 </a:solidFill>
@@ -18440,11 +18286,15 @@
             </a:pPr>
             <a:r>
               <a:rPr b="1" lang="fr-FR" sz="2000"/>
-              <a:t>Get Around </a:t>
+              <a:t>Stripe</a:t>
+            </a:r>
+            <a:r>
+              <a:rPr b="1" lang="fr-FR" sz="2000"/>
+              <a:t> </a:t>
             </a:r>
             <a:r>
               <a:rPr lang="fr-FR" sz="2000"/>
-              <a:t>est une application permettant à des particuliers de louer leur véhicule à d’autres particuliers.</a:t>
+              <a:t>est une application de gestion de paiements et opérations financières pour des business de toutes tailles.</a:t>
             </a:r>
             <a:endParaRPr/>
           </a:p>
@@ -18583,7 +18433,7 @@
             </a:pPr>
             <a:r>
               <a:rPr b="1" lang="fr-FR" sz="1200"/>
-              <a:t>Réduire </a:t>
+              <a:t>Assurer </a:t>
             </a:r>
             <a:r>
               <a:rPr b="0" i="0" lang="fr-FR" sz="1200" u="none" cap="none" strike="noStrike">
@@ -18599,7 +18449,15 @@
             </a:r>
             <a:r>
               <a:rPr lang="fr-FR" sz="1200"/>
-              <a:t>es inconvéniences dûes aux retards des locations précédentes en instaurant un tampon temporel durant lequel une voiture ne peux pas être relouée. </a:t>
+              <a:t>’intégration efficace des données à travers la chaîne de </a:t>
+            </a:r>
+            <a:r>
+              <a:rPr lang="fr-FR" sz="1200"/>
+              <a:t>traitement</a:t>
+            </a:r>
+            <a:r>
+              <a:rPr lang="fr-FR" sz="1200"/>
+              <a:t> sous différents formats pour permettre le stockage et l’utilisation efficaces des données.</a:t>
             </a:r>
             <a:r>
               <a:rPr b="0" i="0" lang="fr-FR" sz="1200" u="none" cap="none" strike="noStrike">
@@ -18611,9 +18469,17 @@
                 <a:cs typeface="Arial"/>
                 <a:sym typeface="Arial"/>
               </a:rPr>
-              <a:t> </a:t>
+              <a:t>  </a:t>
             </a:r>
-            <a:endParaRPr/>
+            <a:endParaRPr b="0" i="0" sz="1400" u="none" cap="none" strike="noStrike">
+              <a:solidFill>
+                <a:srgbClr val="000000"/>
+              </a:solidFill>
+              <a:latin typeface="Arial"/>
+              <a:ea typeface="Arial"/>
+              <a:cs typeface="Arial"/>
+              <a:sym typeface="Arial"/>
+            </a:endParaRPr>
           </a:p>
           <a:p>
             <a:pPr indent="-171450" lvl="0" marL="171450" marR="0" rtl="0" algn="l">
@@ -18635,25 +18501,33 @@
             </a:pPr>
             <a:r>
               <a:rPr b="1" lang="fr-FR" sz="1200"/>
-              <a:t>Prédire </a:t>
+              <a:t>Garantir </a:t>
+            </a:r>
+            <a:r>
+              <a:rPr b="0" i="0" lang="fr-FR" sz="1200" u="none" cap="none" strike="noStrike">
+                <a:solidFill>
+                  <a:srgbClr val="000000"/>
+                </a:solidFill>
+                <a:latin typeface="Arial"/>
+                <a:ea typeface="Arial"/>
+                <a:cs typeface="Arial"/>
+                <a:sym typeface="Arial"/>
+              </a:rPr>
+              <a:t>une sécurisation des données tout en offran</a:t>
             </a:r>
             <a:r>
               <a:rPr lang="fr-FR" sz="1200"/>
-              <a:t>un prix optimal pour une voiture afin d’aider les propriétaires à louer leurs véhicules au juste prix. </a:t>
+              <a:t>t une grande vitesse de transferts des informations.. </a:t>
             </a:r>
-            <a:r>
-              <a:rPr b="0" i="0" lang="fr-FR" sz="1200" u="none" cap="none" strike="noStrike">
-                <a:solidFill>
-                  <a:srgbClr val="000000"/>
-                </a:solidFill>
-                <a:latin typeface="Arial"/>
-                <a:ea typeface="Arial"/>
-                <a:cs typeface="Arial"/>
-                <a:sym typeface="Arial"/>
-              </a:rPr>
-              <a:t> </a:t>
-            </a:r>
-            <a:endParaRPr/>
+            <a:endParaRPr b="0" i="0" sz="1400" u="none" cap="none" strike="noStrike">
+              <a:solidFill>
+                <a:srgbClr val="000000"/>
+              </a:solidFill>
+              <a:latin typeface="Arial"/>
+              <a:ea typeface="Arial"/>
+              <a:cs typeface="Arial"/>
+              <a:sym typeface="Arial"/>
+            </a:endParaRPr>
           </a:p>
         </p:txBody>
       </p:sp>
@@ -18762,13 +18636,26 @@
               <a:spcAft>
                 <a:spcPts val="0"/>
               </a:spcAft>
+              <a:buClr>
+                <a:srgbClr val="000000"/>
+              </a:buClr>
+              <a:buSzPts val="1200"/>
+              <a:buFont typeface="Arial"/>
               <a:buNone/>
             </a:pPr>
             <a:r>
               <a:rPr lang="fr-FR" sz="1200"/>
-              <a:t>Amélioration de la qualité générale du service via des outils de décisions simples et visuels (Dashboard streamlit et API).</a:t>
+              <a:t>Une infrastructure robuste, adaptable et capable de répondre à de grands volumes de demandes simultanées, tout en assurant la sécurité des données.</a:t>
             </a:r>
-            <a:endParaRPr/>
+            <a:endParaRPr b="0" i="0" sz="1400" u="none" cap="none" strike="noStrike">
+              <a:solidFill>
+                <a:srgbClr val="000000"/>
+              </a:solidFill>
+              <a:latin typeface="Arial"/>
+              <a:ea typeface="Arial"/>
+              <a:cs typeface="Arial"/>
+              <a:sym typeface="Arial"/>
+            </a:endParaRPr>
           </a:p>
         </p:txBody>
       </p:sp>
@@ -18829,6 +18716,11 @@
                 <a:spcAft>
                   <a:spcPts val="0"/>
                 </a:spcAft>
+                <a:buClr>
+                  <a:srgbClr val="000000"/>
+                </a:buClr>
+                <a:buSzPts val="1200"/>
+                <a:buFont typeface="Arial"/>
                 <a:buNone/>
               </a:pPr>
               <a:r>
@@ -18917,6 +18809,11 @@
               <a:spcAft>
                 <a:spcPts val="0"/>
               </a:spcAft>
+              <a:buClr>
+                <a:srgbClr val="000000"/>
+              </a:buClr>
+              <a:buSzPts val="2000"/>
+              <a:buFont typeface="Arial"/>
               <a:buNone/>
             </a:pPr>
             <a:r>
@@ -18931,7 +18828,15 @@
               </a:rPr>
               <a:t>?</a:t>
             </a:r>
-            <a:endParaRPr/>
+            <a:endParaRPr b="0" i="0" sz="1400" u="none" cap="none" strike="noStrike">
+              <a:solidFill>
+                <a:srgbClr val="000000"/>
+              </a:solidFill>
+              <a:latin typeface="Arial"/>
+              <a:ea typeface="Arial"/>
+              <a:cs typeface="Arial"/>
+              <a:sym typeface="Arial"/>
+            </a:endParaRPr>
           </a:p>
         </p:txBody>
       </p:sp>
@@ -18943,8 +18848,8 @@
         </p:nvSpPr>
         <p:spPr>
           <a:xfrm>
-            <a:off x="1872975" y="1797783"/>
-            <a:ext cx="6959400" cy="660300"/>
+            <a:off x="1872975" y="1797775"/>
+            <a:ext cx="7271100" cy="660300"/>
           </a:xfrm>
           <a:prstGeom prst="roundRect">
             <a:avLst>
@@ -18987,9 +18892,17 @@
             </a:pPr>
             <a:r>
               <a:rPr lang="fr-FR" sz="1600"/>
-              <a:t>Les retards de certaines locations impactent les locations suivantes.</a:t>
+              <a:t>Stripe doit gérer de grands volumes de données de formats différents</a:t>
             </a:r>
-            <a:endParaRPr sz="1600"/>
+            <a:endParaRPr b="0" i="0" sz="1600" u="none" cap="none" strike="noStrike">
+              <a:solidFill>
+                <a:srgbClr val="000000"/>
+              </a:solidFill>
+              <a:latin typeface="Arial"/>
+              <a:ea typeface="Arial"/>
+              <a:cs typeface="Arial"/>
+              <a:sym typeface="Arial"/>
+            </a:endParaRPr>
           </a:p>
           <a:p>
             <a:pPr indent="-330200" lvl="0" marL="457200" marR="0" rtl="0" algn="l">
@@ -19002,14 +18915,26 @@
               <a:spcAft>
                 <a:spcPts val="0"/>
               </a:spcAft>
+              <a:buClr>
+                <a:srgbClr val="000000"/>
+              </a:buClr>
               <a:buSzPts val="1600"/>
+              <a:buFont typeface="Arial"/>
               <a:buChar char="●"/>
             </a:pPr>
             <a:r>
               <a:rPr lang="fr-FR" sz="1600"/>
-              <a:t>Les propriétaires n’ont pas de référence pour fixer leurs prix.</a:t>
+              <a:t>Les données gérées sont sensibles et les latences doivent être faibles</a:t>
             </a:r>
-            <a:endParaRPr sz="1600"/>
+            <a:endParaRPr b="0" i="0" sz="1600" u="none" cap="none" strike="noStrike">
+              <a:solidFill>
+                <a:srgbClr val="000000"/>
+              </a:solidFill>
+              <a:latin typeface="Arial"/>
+              <a:ea typeface="Arial"/>
+              <a:cs typeface="Arial"/>
+              <a:sym typeface="Arial"/>
+            </a:endParaRPr>
           </a:p>
         </p:txBody>
       </p:sp>
@@ -19053,6 +18978,11 @@
               <a:spcAft>
                 <a:spcPts val="0"/>
               </a:spcAft>
+              <a:buClr>
+                <a:srgbClr val="000000"/>
+              </a:buClr>
+              <a:buSzPts val="1800"/>
+              <a:buFont typeface="Arial"/>
               <a:buNone/>
             </a:pPr>
             <a:r>
@@ -19067,7 +18997,15 @@
               </a:rPr>
               <a:t>Constats</a:t>
             </a:r>
-            <a:endParaRPr/>
+            <a:endParaRPr b="0" i="0" sz="1400" u="none" cap="none" strike="noStrike">
+              <a:solidFill>
+                <a:srgbClr val="000000"/>
+              </a:solidFill>
+              <a:latin typeface="Arial"/>
+              <a:ea typeface="Arial"/>
+              <a:cs typeface="Arial"/>
+              <a:sym typeface="Arial"/>
+            </a:endParaRPr>
           </a:p>
         </p:txBody>
       </p:sp>
@@ -19158,6 +19096,11 @@
               <a:spcAft>
                 <a:spcPts val="0"/>
               </a:spcAft>
+              <a:buClr>
+                <a:srgbClr val="000000"/>
+              </a:buClr>
+              <a:buSzPts val="1400"/>
+              <a:buFont typeface="Arial"/>
               <a:buNone/>
             </a:pPr>
             <a:r>
@@ -19210,13 +19153,22 @@
               <a:spcAft>
                 <a:spcPts val="0"/>
               </a:spcAft>
+              <a:buClr>
+                <a:srgbClr val="000000"/>
+              </a:buClr>
+              <a:buSzPts val="1000"/>
+              <a:buFont typeface="Arial"/>
               <a:buNone/>
             </a:pPr>
             <a:r>
-              <a:rPr lang="fr-FR" sz="1000" u="sng">
+              <a:rPr b="0" i="0" lang="fr-FR" sz="1000" u="sng" cap="none" strike="noStrike">
                 <a:solidFill>
                   <a:schemeClr val="hlink"/>
                 </a:solidFill>
+                <a:latin typeface="Arial"/>
+                <a:ea typeface="Arial"/>
+                <a:cs typeface="Arial"/>
+                <a:sym typeface="Arial"/>
                 <a:hlinkClick r:id="rId5"/>
               </a:rPr>
               <a:t>Lien Github</a:t>
@@ -19286,387 +19238,7 @@
       </p:grpSpPr>
       <p:sp>
         <p:nvSpPr>
-          <p:cNvPr id="130" name="Google Shape;130;p6"/>
-          <p:cNvSpPr/>
-          <p:nvPr/>
-        </p:nvSpPr>
-        <p:spPr>
-          <a:xfrm>
-            <a:off x="6374912" y="936409"/>
-            <a:ext cx="2310321" cy="348427"/>
-          </a:xfrm>
-          <a:custGeom>
-            <a:rect b="b" l="l" r="r" t="t"/>
-            <a:pathLst>
-              <a:path extrusionOk="0" h="533101" w="1839339">
-                <a:moveTo>
-                  <a:pt x="0" y="0"/>
-                </a:moveTo>
-                <a:lnTo>
-                  <a:pt x="1572789" y="0"/>
-                </a:lnTo>
-                <a:lnTo>
-                  <a:pt x="1839339" y="266551"/>
-                </a:lnTo>
-                <a:lnTo>
-                  <a:pt x="1572789" y="533101"/>
-                </a:lnTo>
-                <a:lnTo>
-                  <a:pt x="0" y="533101"/>
-                </a:lnTo>
-                <a:lnTo>
-                  <a:pt x="266551" y="266551"/>
-                </a:lnTo>
-                <a:lnTo>
-                  <a:pt x="0" y="0"/>
-                </a:lnTo>
-                <a:close/>
-              </a:path>
-            </a:pathLst>
-          </a:custGeom>
-          <a:solidFill>
-            <a:srgbClr val="6C828C"/>
-          </a:solidFill>
-          <a:ln cap="flat" cmpd="sng" w="25400">
-            <a:solidFill>
-              <a:schemeClr val="lt1"/>
-            </a:solidFill>
-            <a:prstDash val="solid"/>
-            <a:round/>
-            <a:headEnd len="sm" w="sm" type="none"/>
-            <a:tailEnd len="sm" w="sm" type="none"/>
-          </a:ln>
-        </p:spPr>
-        <p:txBody>
-          <a:bodyPr anchorCtr="0" anchor="ctr" bIns="14650" lIns="310550" spcFirstLastPara="1" rIns="281200" wrap="square" tIns="14650">
-            <a:noAutofit/>
-          </a:bodyPr>
-          <a:lstStyle/>
-          <a:p>
-            <a:pPr indent="0" lvl="0" marL="158750" marR="0" rtl="0" algn="ctr">
-              <a:lnSpc>
-                <a:spcPct val="100000"/>
-              </a:lnSpc>
-              <a:spcBef>
-                <a:spcPts val="0"/>
-              </a:spcBef>
-              <a:spcAft>
-                <a:spcPts val="0"/>
-              </a:spcAft>
-              <a:buClr>
-                <a:srgbClr val="000000"/>
-              </a:buClr>
-              <a:buSzPts val="800"/>
-              <a:buFont typeface="Arial"/>
-              <a:buNone/>
-            </a:pPr>
-            <a:r>
-              <a:rPr b="1" i="0" lang="fr-FR" sz="800" u="none" cap="none" strike="noStrike">
-                <a:solidFill>
-                  <a:schemeClr val="lt1"/>
-                </a:solidFill>
-                <a:latin typeface="Arial"/>
-                <a:ea typeface="Arial"/>
-                <a:cs typeface="Arial"/>
-                <a:sym typeface="Arial"/>
-              </a:rPr>
-              <a:t>API et</a:t>
-            </a:r>
-            <a:endParaRPr/>
-          </a:p>
-          <a:p>
-            <a:pPr indent="0" lvl="0" marL="158750" marR="0" rtl="0" algn="ctr">
-              <a:lnSpc>
-                <a:spcPct val="100000"/>
-              </a:lnSpc>
-              <a:spcBef>
-                <a:spcPts val="0"/>
-              </a:spcBef>
-              <a:spcAft>
-                <a:spcPts val="0"/>
-              </a:spcAft>
-              <a:buClr>
-                <a:srgbClr val="000000"/>
-              </a:buClr>
-              <a:buSzPts val="800"/>
-              <a:buFont typeface="Arial"/>
-              <a:buNone/>
-            </a:pPr>
-            <a:r>
-              <a:rPr b="1" i="0" lang="fr-FR" sz="800" u="none" cap="none" strike="noStrike">
-                <a:solidFill>
-                  <a:schemeClr val="lt1"/>
-                </a:solidFill>
-                <a:latin typeface="Arial"/>
-                <a:ea typeface="Arial"/>
-                <a:cs typeface="Arial"/>
-                <a:sym typeface="Arial"/>
-              </a:rPr>
-              <a:t>Application</a:t>
-            </a:r>
-            <a:endParaRPr/>
-          </a:p>
-        </p:txBody>
-      </p:sp>
-      <p:sp>
-        <p:nvSpPr>
-          <p:cNvPr id="131" name="Google Shape;131;p6"/>
-          <p:cNvSpPr/>
-          <p:nvPr/>
-        </p:nvSpPr>
-        <p:spPr>
-          <a:xfrm>
-            <a:off x="4346332" y="936409"/>
-            <a:ext cx="2310321" cy="348427"/>
-          </a:xfrm>
-          <a:custGeom>
-            <a:rect b="b" l="l" r="r" t="t"/>
-            <a:pathLst>
-              <a:path extrusionOk="0" h="533101" w="1839339">
-                <a:moveTo>
-                  <a:pt x="0" y="0"/>
-                </a:moveTo>
-                <a:lnTo>
-                  <a:pt x="1572789" y="0"/>
-                </a:lnTo>
-                <a:lnTo>
-                  <a:pt x="1839339" y="266551"/>
-                </a:lnTo>
-                <a:lnTo>
-                  <a:pt x="1572789" y="533101"/>
-                </a:lnTo>
-                <a:lnTo>
-                  <a:pt x="0" y="533101"/>
-                </a:lnTo>
-                <a:lnTo>
-                  <a:pt x="266551" y="266551"/>
-                </a:lnTo>
-                <a:lnTo>
-                  <a:pt x="0" y="0"/>
-                </a:lnTo>
-                <a:close/>
-              </a:path>
-            </a:pathLst>
-          </a:custGeom>
-          <a:solidFill>
-            <a:srgbClr val="6C828C"/>
-          </a:solidFill>
-          <a:ln cap="flat" cmpd="sng" w="25400">
-            <a:solidFill>
-              <a:schemeClr val="lt1"/>
-            </a:solidFill>
-            <a:prstDash val="solid"/>
-            <a:round/>
-            <a:headEnd len="sm" w="sm" type="none"/>
-            <a:tailEnd len="sm" w="sm" type="none"/>
-          </a:ln>
-        </p:spPr>
-        <p:txBody>
-          <a:bodyPr anchorCtr="0" anchor="ctr" bIns="14650" lIns="310550" spcFirstLastPara="1" rIns="281200" wrap="square" tIns="14650">
-            <a:noAutofit/>
-          </a:bodyPr>
-          <a:lstStyle/>
-          <a:p>
-            <a:pPr indent="0" lvl="0" marL="0" marR="0" rtl="0" algn="ctr">
-              <a:lnSpc>
-                <a:spcPct val="90000"/>
-              </a:lnSpc>
-              <a:spcBef>
-                <a:spcPts val="0"/>
-              </a:spcBef>
-              <a:spcAft>
-                <a:spcPts val="0"/>
-              </a:spcAft>
-              <a:buClr>
-                <a:srgbClr val="000000"/>
-              </a:buClr>
-              <a:buSzPts val="800"/>
-              <a:buFont typeface="Arial"/>
-              <a:buNone/>
-            </a:pPr>
-            <a:r>
-              <a:rPr b="1" i="0" lang="fr-FR" sz="800" u="none" cap="none" strike="noStrike">
-                <a:solidFill>
-                  <a:schemeClr val="lt1"/>
-                </a:solidFill>
-                <a:latin typeface="Arial"/>
-                <a:ea typeface="Arial"/>
-                <a:cs typeface="Arial"/>
-                <a:sym typeface="Arial"/>
-              </a:rPr>
-              <a:t>Entraînement et </a:t>
-            </a:r>
-            <a:endParaRPr/>
-          </a:p>
-          <a:p>
-            <a:pPr indent="0" lvl="0" marL="0" marR="0" rtl="0" algn="ctr">
-              <a:lnSpc>
-                <a:spcPct val="90000"/>
-              </a:lnSpc>
-              <a:spcBef>
-                <a:spcPts val="280"/>
-              </a:spcBef>
-              <a:spcAft>
-                <a:spcPts val="0"/>
-              </a:spcAft>
-              <a:buClr>
-                <a:srgbClr val="000000"/>
-              </a:buClr>
-              <a:buSzPts val="800"/>
-              <a:buFont typeface="Arial"/>
-              <a:buNone/>
-            </a:pPr>
-            <a:r>
-              <a:rPr b="1" i="0" lang="fr-FR" sz="800" u="none" cap="none" strike="noStrike">
-                <a:solidFill>
-                  <a:schemeClr val="lt1"/>
-                </a:solidFill>
-                <a:latin typeface="Arial"/>
-                <a:ea typeface="Arial"/>
-                <a:cs typeface="Arial"/>
-                <a:sym typeface="Arial"/>
-              </a:rPr>
-              <a:t>suivi du modèle</a:t>
-            </a:r>
-            <a:endParaRPr b="0" i="0" sz="800" u="none" cap="none" strike="noStrike">
-              <a:solidFill>
-                <a:schemeClr val="lt1"/>
-              </a:solidFill>
-              <a:latin typeface="Arial"/>
-              <a:ea typeface="Arial"/>
-              <a:cs typeface="Arial"/>
-              <a:sym typeface="Arial"/>
-            </a:endParaRPr>
-          </a:p>
-        </p:txBody>
-      </p:sp>
-      <p:sp>
-        <p:nvSpPr>
-          <p:cNvPr id="132" name="Google Shape;132;p6"/>
-          <p:cNvSpPr/>
-          <p:nvPr/>
-        </p:nvSpPr>
-        <p:spPr>
-          <a:xfrm>
-            <a:off x="2293137" y="936409"/>
-            <a:ext cx="2310321" cy="348427"/>
-          </a:xfrm>
-          <a:custGeom>
-            <a:rect b="b" l="l" r="r" t="t"/>
-            <a:pathLst>
-              <a:path extrusionOk="0" h="533101" w="1839339">
-                <a:moveTo>
-                  <a:pt x="0" y="0"/>
-                </a:moveTo>
-                <a:lnTo>
-                  <a:pt x="1572789" y="0"/>
-                </a:lnTo>
-                <a:lnTo>
-                  <a:pt x="1839339" y="266551"/>
-                </a:lnTo>
-                <a:lnTo>
-                  <a:pt x="1572789" y="533101"/>
-                </a:lnTo>
-                <a:lnTo>
-                  <a:pt x="0" y="533101"/>
-                </a:lnTo>
-                <a:lnTo>
-                  <a:pt x="266551" y="266551"/>
-                </a:lnTo>
-                <a:lnTo>
-                  <a:pt x="0" y="0"/>
-                </a:lnTo>
-                <a:close/>
-              </a:path>
-            </a:pathLst>
-          </a:custGeom>
-          <a:solidFill>
-            <a:srgbClr val="6C828C"/>
-          </a:solidFill>
-          <a:ln cap="flat" cmpd="sng" w="25400">
-            <a:solidFill>
-              <a:schemeClr val="lt1"/>
-            </a:solidFill>
-            <a:prstDash val="solid"/>
-            <a:round/>
-            <a:headEnd len="sm" w="sm" type="none"/>
-            <a:tailEnd len="sm" w="sm" type="none"/>
-          </a:ln>
-        </p:spPr>
-        <p:txBody>
-          <a:bodyPr anchorCtr="0" anchor="ctr" bIns="14650" lIns="310550" spcFirstLastPara="1" rIns="281200" wrap="square" tIns="14650">
-            <a:noAutofit/>
-          </a:bodyPr>
-          <a:lstStyle/>
-          <a:p>
-            <a:pPr indent="0" lvl="0" marL="158750" marR="0" rtl="0" algn="ctr">
-              <a:lnSpc>
-                <a:spcPct val="100000"/>
-              </a:lnSpc>
-              <a:spcBef>
-                <a:spcPts val="0"/>
-              </a:spcBef>
-              <a:spcAft>
-                <a:spcPts val="0"/>
-              </a:spcAft>
-              <a:buClr>
-                <a:srgbClr val="000000"/>
-              </a:buClr>
-              <a:buSzPts val="800"/>
-              <a:buFont typeface="Arial"/>
-              <a:buNone/>
-            </a:pPr>
-            <a:r>
-              <a:rPr b="1" i="0" lang="fr-FR" sz="800" u="none" cap="none" strike="noStrike">
-                <a:solidFill>
-                  <a:schemeClr val="lt1"/>
-                </a:solidFill>
-                <a:latin typeface="Arial"/>
-                <a:ea typeface="Arial"/>
-                <a:cs typeface="Arial"/>
-                <a:sym typeface="Arial"/>
-              </a:rPr>
-              <a:t>Préparation et </a:t>
-            </a:r>
-            <a:endParaRPr/>
-          </a:p>
-          <a:p>
-            <a:pPr indent="0" lvl="0" marL="158750" marR="0" rtl="0" algn="ctr">
-              <a:lnSpc>
-                <a:spcPct val="100000"/>
-              </a:lnSpc>
-              <a:spcBef>
-                <a:spcPts val="0"/>
-              </a:spcBef>
-              <a:spcAft>
-                <a:spcPts val="0"/>
-              </a:spcAft>
-              <a:buClr>
-                <a:srgbClr val="000000"/>
-              </a:buClr>
-              <a:buSzPts val="800"/>
-              <a:buFont typeface="Arial"/>
-              <a:buNone/>
-            </a:pPr>
-            <a:r>
-              <a:rPr b="1" i="0" lang="fr-FR" sz="800" u="none" cap="none" strike="noStrike">
-                <a:solidFill>
-                  <a:schemeClr val="lt1"/>
-                </a:solidFill>
-                <a:latin typeface="Arial"/>
-                <a:ea typeface="Arial"/>
-                <a:cs typeface="Arial"/>
-                <a:sym typeface="Arial"/>
-              </a:rPr>
-              <a:t>nettoyage</a:t>
-            </a:r>
-            <a:endParaRPr/>
-          </a:p>
-        </p:txBody>
-      </p:sp>
-      <p:sp>
-        <p:nvSpPr>
-          <p:cNvPr id="133" name="Google Shape;133;p6"/>
+          <p:cNvPr id="130" name="Google Shape;130;p11"/>
           <p:cNvSpPr txBox="1"/>
           <p:nvPr>
             <p:ph idx="4294967295" type="ctrTitle"/>
@@ -19709,7 +19281,7 @@
               <a:buNone/>
             </a:pPr>
             <a:r>
-              <a:rPr b="0" i="0" lang="fr-FR" sz="2500" u="none" cap="none" strike="noStrike">
+              <a:rPr lang="fr-FR" sz="2500">
                 <a:solidFill>
                   <a:srgbClr val="0E3449"/>
                 </a:solidFill>
@@ -19718,15 +19290,23 @@
                 <a:cs typeface="Inter SemiBold"/>
                 <a:sym typeface="Inter SemiBold"/>
               </a:rPr>
-              <a:t>Processues et pipeline data</a:t>
+              <a:t>Data pipeline &amp; architecture</a:t>
             </a:r>
-            <a:endParaRPr/>
+            <a:endParaRPr b="0" i="0" sz="2500" u="none" cap="none" strike="noStrike">
+              <a:solidFill>
+                <a:srgbClr val="0E3449"/>
+              </a:solidFill>
+              <a:latin typeface="Inter SemiBold"/>
+              <a:ea typeface="Inter SemiBold"/>
+              <a:cs typeface="Inter SemiBold"/>
+              <a:sym typeface="Inter SemiBold"/>
+            </a:endParaRPr>
           </a:p>
         </p:txBody>
       </p:sp>
       <p:pic>
         <p:nvPicPr>
-          <p:cNvPr id="134" name="Google Shape;134;p6"/>
+          <p:cNvPr id="131" name="Google Shape;131;p11"/>
           <p:cNvPicPr preferRelativeResize="0"/>
           <p:nvPr/>
         </p:nvPicPr>
@@ -19753,113 +19333,13 @@
       </p:pic>
       <p:sp>
         <p:nvSpPr>
-          <p:cNvPr id="135" name="Google Shape;135;p6"/>
+          <p:cNvPr id="132" name="Google Shape;132;p11"/>
           <p:cNvSpPr/>
           <p:nvPr/>
         </p:nvSpPr>
         <p:spPr>
           <a:xfrm>
-            <a:off x="252179" y="936409"/>
-            <a:ext cx="2310321" cy="348427"/>
-          </a:xfrm>
-          <a:custGeom>
-            <a:rect b="b" l="l" r="r" t="t"/>
-            <a:pathLst>
-              <a:path extrusionOk="0" h="533101" w="1839339">
-                <a:moveTo>
-                  <a:pt x="0" y="0"/>
-                </a:moveTo>
-                <a:lnTo>
-                  <a:pt x="1572789" y="0"/>
-                </a:lnTo>
-                <a:lnTo>
-                  <a:pt x="1839339" y="266551"/>
-                </a:lnTo>
-                <a:lnTo>
-                  <a:pt x="1572789" y="533101"/>
-                </a:lnTo>
-                <a:lnTo>
-                  <a:pt x="0" y="533101"/>
-                </a:lnTo>
-                <a:lnTo>
-                  <a:pt x="266551" y="266551"/>
-                </a:lnTo>
-                <a:lnTo>
-                  <a:pt x="0" y="0"/>
-                </a:lnTo>
-                <a:close/>
-              </a:path>
-            </a:pathLst>
-          </a:custGeom>
-          <a:solidFill>
-            <a:srgbClr val="6C828C"/>
-          </a:solidFill>
-          <a:ln cap="flat" cmpd="sng" w="25400">
-            <a:solidFill>
-              <a:schemeClr val="lt1"/>
-            </a:solidFill>
-            <a:prstDash val="solid"/>
-            <a:round/>
-            <a:headEnd len="sm" w="sm" type="none"/>
-            <a:tailEnd len="sm" w="sm" type="none"/>
-          </a:ln>
-        </p:spPr>
-        <p:txBody>
-          <a:bodyPr anchorCtr="0" anchor="ctr" bIns="14650" lIns="310550" spcFirstLastPara="1" rIns="281200" wrap="square" tIns="14650">
-            <a:noAutofit/>
-          </a:bodyPr>
-          <a:lstStyle/>
-          <a:p>
-            <a:pPr indent="0" lvl="0" marL="0" marR="0" rtl="0" algn="ctr">
-              <a:lnSpc>
-                <a:spcPct val="90000"/>
-              </a:lnSpc>
-              <a:spcBef>
-                <a:spcPts val="0"/>
-              </a:spcBef>
-              <a:spcAft>
-                <a:spcPts val="0"/>
-              </a:spcAft>
-              <a:buClr>
-                <a:srgbClr val="000000"/>
-              </a:buClr>
-              <a:buSzPts val="800"/>
-              <a:buFont typeface="Arial"/>
-              <a:buNone/>
-            </a:pPr>
-            <a:r>
-              <a:rPr b="1" i="0" lang="fr-FR" sz="800" u="none" cap="none" strike="noStrike">
-                <a:solidFill>
-                  <a:schemeClr val="lt1"/>
-                </a:solidFill>
-                <a:latin typeface="Arial"/>
-                <a:ea typeface="Arial"/>
-                <a:cs typeface="Arial"/>
-                <a:sym typeface="Arial"/>
-              </a:rPr>
-              <a:t>Collecte des données</a:t>
-            </a:r>
-            <a:endParaRPr b="0" i="0" sz="800" u="none" cap="none" strike="noStrike">
-              <a:solidFill>
-                <a:schemeClr val="lt1"/>
-              </a:solidFill>
-              <a:latin typeface="Arial"/>
-              <a:ea typeface="Arial"/>
-              <a:cs typeface="Arial"/>
-              <a:sym typeface="Arial"/>
-            </a:endParaRPr>
-          </a:p>
-        </p:txBody>
-      </p:sp>
-      <p:sp>
-        <p:nvSpPr>
-          <p:cNvPr id="136" name="Google Shape;136;p6"/>
-          <p:cNvSpPr/>
-          <p:nvPr/>
-        </p:nvSpPr>
-        <p:spPr>
-          <a:xfrm>
-            <a:off x="5512" y="4892025"/>
+            <a:off x="10225" y="4892025"/>
             <a:ext cx="9144000" cy="251400"/>
           </a:xfrm>
           <a:prstGeom prst="rect">
@@ -19912,7 +19392,73 @@
       </p:sp>
       <p:sp>
         <p:nvSpPr>
-          <p:cNvPr id="137" name="Google Shape;137;p6"/>
+          <p:cNvPr id="133" name="Google Shape;133;p11"/>
+          <p:cNvSpPr txBox="1"/>
+          <p:nvPr/>
+        </p:nvSpPr>
+        <p:spPr>
+          <a:xfrm>
+            <a:off x="1192664" y="779179"/>
+            <a:ext cx="5315100" cy="375870"/>
+          </a:xfrm>
+          <a:prstGeom prst="rect">
+            <a:avLst/>
+          </a:prstGeom>
+          <a:noFill/>
+          <a:ln>
+            <a:noFill/>
+          </a:ln>
+        </p:spPr>
+        <p:txBody>
+          <a:bodyPr anchorCtr="0" anchor="t" bIns="91425" lIns="91425" spcFirstLastPara="1" rIns="91425" wrap="square" tIns="91425">
+            <a:noAutofit/>
+          </a:bodyPr>
+          <a:lstStyle/>
+          <a:p>
+            <a:pPr indent="0" lvl="0" marL="0" marR="0" rtl="0" algn="l">
+              <a:lnSpc>
+                <a:spcPct val="100000"/>
+              </a:lnSpc>
+              <a:spcBef>
+                <a:spcPts val="0"/>
+              </a:spcBef>
+              <a:spcAft>
+                <a:spcPts val="0"/>
+              </a:spcAft>
+              <a:buClr>
+                <a:schemeClr val="dk1"/>
+              </a:buClr>
+              <a:buSzPts val="2800"/>
+              <a:buFont typeface="Arial"/>
+              <a:buNone/>
+            </a:pPr>
+            <a:r>
+              <a:rPr b="1" i="0" lang="fr-FR" sz="1400" u="none" cap="none" strike="noStrike">
+                <a:solidFill>
+                  <a:srgbClr val="0E3449"/>
+                </a:solidFill>
+                <a:latin typeface="Inter SemiBold"/>
+                <a:ea typeface="Inter SemiBold"/>
+                <a:cs typeface="Inter SemiBold"/>
+                <a:sym typeface="Inter SemiBold"/>
+              </a:rPr>
+              <a:t>Intervalle de relocation de voiture</a:t>
+            </a:r>
+            <a:endParaRPr b="1" i="0" sz="1400" u="none" cap="none" strike="noStrike">
+              <a:solidFill>
+                <a:srgbClr val="0E3449"/>
+              </a:solidFill>
+              <a:latin typeface="Inter SemiBold"/>
+              <a:ea typeface="Inter SemiBold"/>
+              <a:cs typeface="Inter SemiBold"/>
+              <a:sym typeface="Inter SemiBold"/>
+            </a:endParaRPr>
+          </a:p>
+        </p:txBody>
+      </p:sp>
+      <p:sp>
+        <p:nvSpPr>
+          <p:cNvPr id="134" name="Google Shape;134;p11"/>
           <p:cNvSpPr txBox="1"/>
           <p:nvPr>
             <p:ph idx="12" type="sldNum"/>
@@ -19960,7 +19506,7 @@
       </p:sp>
       <p:pic>
         <p:nvPicPr>
-          <p:cNvPr id="138" name="Google Shape;138;p6"/>
+          <p:cNvPr id="135" name="Google Shape;135;p11"/>
           <p:cNvPicPr preferRelativeResize="0"/>
           <p:nvPr/>
         </p:nvPicPr>
@@ -19974,8 +19520,8 @@
         </p:blipFill>
         <p:spPr>
           <a:xfrm>
-            <a:off x="1263600" y="1284825"/>
-            <a:ext cx="6681716" cy="3607200"/>
+            <a:off x="135406" y="1307449"/>
+            <a:ext cx="5668153" cy="3432177"/>
           </a:xfrm>
           <a:prstGeom prst="rect">
             <a:avLst/>
@@ -19986,6 +19532,323 @@
           </a:ln>
         </p:spPr>
       </p:pic>
+      <p:sp>
+        <p:nvSpPr>
+          <p:cNvPr id="136" name="Google Shape;136;p11"/>
+          <p:cNvSpPr/>
+          <p:nvPr/>
+        </p:nvSpPr>
+        <p:spPr>
+          <a:xfrm>
+            <a:off x="5900000" y="936400"/>
+            <a:ext cx="3007800" cy="3955500"/>
+          </a:xfrm>
+          <a:prstGeom prst="rect">
+            <a:avLst/>
+          </a:prstGeom>
+          <a:solidFill>
+            <a:srgbClr val="FFFFFF"/>
+          </a:solidFill>
+          <a:ln>
+            <a:noFill/>
+          </a:ln>
+        </p:spPr>
+        <p:txBody>
+          <a:bodyPr anchorCtr="0" anchor="t" bIns="45700" lIns="91425" spcFirstLastPara="1" rIns="91425" wrap="square" tIns="45700">
+            <a:noAutofit/>
+          </a:bodyPr>
+          <a:lstStyle/>
+          <a:p>
+            <a:pPr indent="-95250" lvl="0" marL="171450" marR="0" rtl="0" algn="l">
+              <a:lnSpc>
+                <a:spcPct val="100000"/>
+              </a:lnSpc>
+              <a:spcBef>
+                <a:spcPts val="0"/>
+              </a:spcBef>
+              <a:spcAft>
+                <a:spcPts val="0"/>
+              </a:spcAft>
+              <a:buClr>
+                <a:srgbClr val="000000"/>
+              </a:buClr>
+              <a:buSzPts val="1200"/>
+              <a:buFont typeface="Arial"/>
+              <a:buNone/>
+            </a:pPr>
+            <a:r>
+              <a:t/>
+            </a:r>
+            <a:endParaRPr b="0" i="0" sz="1200" u="none" cap="none" strike="noStrike">
+              <a:solidFill>
+                <a:srgbClr val="000000"/>
+              </a:solidFill>
+              <a:latin typeface="Calibri"/>
+              <a:ea typeface="Calibri"/>
+              <a:cs typeface="Calibri"/>
+              <a:sym typeface="Calibri"/>
+            </a:endParaRPr>
+          </a:p>
+          <a:p>
+            <a:pPr indent="-171450" lvl="0" marL="171450" marR="0" rtl="0" algn="l">
+              <a:lnSpc>
+                <a:spcPct val="100000"/>
+              </a:lnSpc>
+              <a:spcBef>
+                <a:spcPts val="1200"/>
+              </a:spcBef>
+              <a:spcAft>
+                <a:spcPts val="0"/>
+              </a:spcAft>
+              <a:buClr>
+                <a:srgbClr val="000000"/>
+              </a:buClr>
+              <a:buSzPts val="1200"/>
+              <a:buFont typeface="Arial"/>
+              <a:buChar char="•"/>
+            </a:pPr>
+            <a:r>
+              <a:rPr b="1" lang="fr-FR" sz="1200"/>
+              <a:t>Cryptage</a:t>
+            </a:r>
+            <a:r>
+              <a:rPr b="1" i="0" lang="fr-FR" sz="1200" u="none" cap="none" strike="noStrike">
+                <a:solidFill>
+                  <a:srgbClr val="000000"/>
+                </a:solidFill>
+                <a:latin typeface="Arial"/>
+                <a:ea typeface="Arial"/>
+                <a:cs typeface="Arial"/>
+                <a:sym typeface="Arial"/>
+              </a:rPr>
+              <a:t>: </a:t>
+            </a:r>
+            <a:r>
+              <a:rPr i="0" lang="fr-FR" sz="1200" u="none" cap="none" strike="noStrike">
+                <a:solidFill>
+                  <a:srgbClr val="000000"/>
+                </a:solidFill>
+              </a:rPr>
+              <a:t>Fi</a:t>
+            </a:r>
+            <a:r>
+              <a:rPr lang="fr-FR" sz="1200"/>
+              <a:t>eld-Level Encryption (for PII and PAN), at rest (all data), in transit (all data)</a:t>
+            </a:r>
+            <a:endParaRPr sz="1200"/>
+          </a:p>
+          <a:p>
+            <a:pPr indent="-171450" lvl="0" marL="171450" marR="0" rtl="0" algn="l">
+              <a:lnSpc>
+                <a:spcPct val="100000"/>
+              </a:lnSpc>
+              <a:spcBef>
+                <a:spcPts val="1200"/>
+              </a:spcBef>
+              <a:spcAft>
+                <a:spcPts val="0"/>
+              </a:spcAft>
+              <a:buSzPts val="1200"/>
+              <a:buChar char="•"/>
+            </a:pPr>
+            <a:r>
+              <a:rPr b="1" lang="fr-FR" sz="1200"/>
+              <a:t>Access control:</a:t>
+            </a:r>
+            <a:r>
+              <a:rPr lang="fr-FR" sz="1200"/>
+              <a:t> Service account get 1hr TTL token issued on demand, humans require MFA and limited access.</a:t>
+            </a:r>
+            <a:endParaRPr sz="1200"/>
+          </a:p>
+          <a:p>
+            <a:pPr indent="-171450" lvl="0" marL="171450" marR="0" rtl="0" algn="l">
+              <a:lnSpc>
+                <a:spcPct val="100000"/>
+              </a:lnSpc>
+              <a:spcBef>
+                <a:spcPts val="1200"/>
+              </a:spcBef>
+              <a:spcAft>
+                <a:spcPts val="0"/>
+              </a:spcAft>
+              <a:buClr>
+                <a:srgbClr val="000000"/>
+              </a:buClr>
+              <a:buSzPts val="1200"/>
+              <a:buFont typeface="Arial"/>
+              <a:buChar char="•"/>
+            </a:pPr>
+            <a:r>
+              <a:rPr b="1" lang="fr-FR" sz="1200"/>
+              <a:t>Audit logs:</a:t>
+            </a:r>
+            <a:r>
+              <a:rPr lang="fr-FR" sz="1200"/>
+              <a:t> written in MongoDB for 90 days, then archived to S3 in Compliance mode</a:t>
+            </a:r>
+            <a:endParaRPr sz="1200"/>
+          </a:p>
+          <a:p>
+            <a:pPr indent="-171450" lvl="0" marL="171450" marR="0" rtl="0" algn="l">
+              <a:lnSpc>
+                <a:spcPct val="100000"/>
+              </a:lnSpc>
+              <a:spcBef>
+                <a:spcPts val="1200"/>
+              </a:spcBef>
+              <a:spcAft>
+                <a:spcPts val="0"/>
+              </a:spcAft>
+              <a:buClr>
+                <a:srgbClr val="000000"/>
+              </a:buClr>
+              <a:buSzPts val="1200"/>
+              <a:buFont typeface="Arial"/>
+              <a:buChar char="•"/>
+            </a:pPr>
+            <a:r>
+              <a:rPr b="1" lang="fr-FR" sz="1200"/>
+              <a:t>Compliance </a:t>
+            </a:r>
+            <a:r>
+              <a:rPr lang="fr-FR" sz="1200"/>
+              <a:t>proof are uploaded on s3 regularly through DAGs. Erasure is handled through an automated action.</a:t>
+            </a:r>
+            <a:endParaRPr b="0" i="0" sz="1400" u="none" cap="none" strike="noStrike">
+              <a:solidFill>
+                <a:srgbClr val="000000"/>
+              </a:solidFill>
+              <a:latin typeface="Arial"/>
+              <a:ea typeface="Arial"/>
+              <a:cs typeface="Arial"/>
+              <a:sym typeface="Arial"/>
+            </a:endParaRPr>
+          </a:p>
+          <a:p>
+            <a:pPr indent="-171450" lvl="0" marL="171450" marR="0" rtl="0" algn="l">
+              <a:lnSpc>
+                <a:spcPct val="100000"/>
+              </a:lnSpc>
+              <a:spcBef>
+                <a:spcPts val="1200"/>
+              </a:spcBef>
+              <a:spcAft>
+                <a:spcPts val="0"/>
+              </a:spcAft>
+              <a:buClr>
+                <a:srgbClr val="000000"/>
+              </a:buClr>
+              <a:buSzPts val="1200"/>
+              <a:buFont typeface="Arial"/>
+              <a:buChar char="•"/>
+            </a:pPr>
+            <a:r>
+              <a:rPr b="1" lang="fr-FR" sz="1200"/>
+              <a:t>Monitoring</a:t>
+            </a:r>
+            <a:r>
+              <a:rPr b="1" i="0" lang="fr-FR" sz="1200" u="none" cap="none" strike="noStrike">
+                <a:solidFill>
+                  <a:srgbClr val="000000"/>
+                </a:solidFill>
+                <a:latin typeface="Arial"/>
+                <a:ea typeface="Arial"/>
+                <a:cs typeface="Arial"/>
+                <a:sym typeface="Arial"/>
+              </a:rPr>
+              <a:t>:</a:t>
+            </a:r>
+            <a:r>
+              <a:rPr b="0" i="0" lang="fr-FR" sz="1200" u="none" cap="none" strike="noStrike">
+                <a:solidFill>
+                  <a:srgbClr val="000000"/>
+                </a:solidFill>
+                <a:latin typeface="Arial"/>
+                <a:ea typeface="Arial"/>
+                <a:cs typeface="Arial"/>
+                <a:sym typeface="Arial"/>
+              </a:rPr>
+              <a:t> </a:t>
+            </a:r>
+            <a:r>
+              <a:rPr lang="fr-FR" sz="1200"/>
+              <a:t>Threat detection is fed to an SIEM.</a:t>
+            </a:r>
+            <a:endParaRPr b="0" i="0" sz="1400" u="none" cap="none" strike="noStrike">
+              <a:solidFill>
+                <a:srgbClr val="000000"/>
+              </a:solidFill>
+              <a:latin typeface="Arial"/>
+              <a:ea typeface="Arial"/>
+              <a:cs typeface="Arial"/>
+              <a:sym typeface="Arial"/>
+            </a:endParaRPr>
+          </a:p>
+          <a:p>
+            <a:pPr indent="0" lvl="0" marL="457200" marR="0" rtl="0" algn="l">
+              <a:lnSpc>
+                <a:spcPct val="100000"/>
+              </a:lnSpc>
+              <a:spcBef>
+                <a:spcPts val="1200"/>
+              </a:spcBef>
+              <a:spcAft>
+                <a:spcPts val="0"/>
+              </a:spcAft>
+              <a:buClr>
+                <a:srgbClr val="000000"/>
+              </a:buClr>
+              <a:buSzPts val="1200"/>
+              <a:buFont typeface="Arial"/>
+              <a:buNone/>
+            </a:pPr>
+            <a:r>
+              <a:t/>
+            </a:r>
+            <a:endParaRPr b="0" i="0" sz="1200" u="none" cap="none" strike="noStrike">
+              <a:solidFill>
+                <a:srgbClr val="000000"/>
+              </a:solidFill>
+              <a:latin typeface="Arial"/>
+              <a:ea typeface="Arial"/>
+              <a:cs typeface="Arial"/>
+              <a:sym typeface="Arial"/>
+            </a:endParaRPr>
+          </a:p>
+          <a:p>
+            <a:pPr indent="-209550" lvl="0" marL="285750" marR="0" rtl="0" algn="l">
+              <a:lnSpc>
+                <a:spcPct val="100000"/>
+              </a:lnSpc>
+              <a:spcBef>
+                <a:spcPts val="300"/>
+              </a:spcBef>
+              <a:spcAft>
+                <a:spcPts val="0"/>
+              </a:spcAft>
+              <a:buClr>
+                <a:srgbClr val="000000"/>
+              </a:buClr>
+              <a:buSzPts val="1200"/>
+              <a:buFont typeface="Arial"/>
+              <a:buNone/>
+            </a:pPr>
+            <a:r>
+              <a:t/>
+            </a:r>
+            <a:endParaRPr b="0" i="0" sz="1200" u="none" cap="none" strike="noStrike">
+              <a:solidFill>
+                <a:srgbClr val="000000"/>
+              </a:solidFill>
+              <a:latin typeface="Calibri"/>
+              <a:ea typeface="Calibri"/>
+              <a:cs typeface="Calibri"/>
+              <a:sym typeface="Calibri"/>
+            </a:endParaRPr>
+          </a:p>
+        </p:txBody>
+      </p:sp>
     </p:spTree>
   </p:cSld>
   <p:clrMapOvr>
@@ -19999,7 +19862,7 @@
   <p:cSld>
     <p:spTree>
       <p:nvGrpSpPr>
-        <p:cNvPr id="142" name="Shape 142"/>
+        <p:cNvPr id="140" name="Shape 140"/>
         <p:cNvGrpSpPr/>
         <p:nvPr/>
       </p:nvGrpSpPr>
@@ -20013,7 +19876,7 @@
       </p:grpSpPr>
       <p:sp>
         <p:nvSpPr>
-          <p:cNvPr id="143" name="Google Shape;143;p3"/>
+          <p:cNvPr id="141" name="Google Shape;141;g3e3a03c189e_0_0"/>
           <p:cNvSpPr txBox="1"/>
           <p:nvPr>
             <p:ph idx="4294967295" type="ctrTitle"/>
@@ -20021,8 +19884,8 @@
         </p:nvSpPr>
         <p:spPr>
           <a:xfrm>
-            <a:off x="1192663" y="403309"/>
-            <a:ext cx="6961985" cy="533100"/>
+            <a:off x="1192664" y="403309"/>
+            <a:ext cx="5315100" cy="533100"/>
           </a:xfrm>
           <a:prstGeom prst="rect">
             <a:avLst/>
@@ -20065,7 +19928,7 @@
                 <a:cs typeface="Inter SemiBold"/>
                 <a:sym typeface="Inter SemiBold"/>
               </a:rPr>
-              <a:t>Liens utiles</a:t>
+              <a:t>OLTP</a:t>
             </a:r>
             <a:endParaRPr b="0" i="0" sz="2500" u="none" cap="none" strike="noStrike">
               <a:solidFill>
@@ -20079,68 +19942,9 @@
           </a:p>
         </p:txBody>
       </p:sp>
-      <p:sp>
-        <p:nvSpPr>
-          <p:cNvPr id="144" name="Google Shape;144;p3"/>
-          <p:cNvSpPr/>
-          <p:nvPr/>
-        </p:nvSpPr>
-        <p:spPr>
-          <a:xfrm>
-            <a:off x="10225" y="4892025"/>
-            <a:ext cx="9144000" cy="251400"/>
-          </a:xfrm>
-          <a:prstGeom prst="rect">
-            <a:avLst/>
-          </a:prstGeom>
-          <a:solidFill>
-            <a:srgbClr val="C3FFFC"/>
-          </a:solidFill>
-          <a:ln>
-            <a:noFill/>
-          </a:ln>
-        </p:spPr>
-        <p:txBody>
-          <a:bodyPr anchorCtr="0" anchor="ctr" bIns="91425" lIns="91425" spcFirstLastPara="1" rIns="91425" wrap="square" tIns="91425">
-            <a:noAutofit/>
-          </a:bodyPr>
-          <a:lstStyle/>
-          <a:p>
-            <a:pPr indent="0" lvl="0" marL="0" marR="0" rtl="0" algn="l">
-              <a:lnSpc>
-                <a:spcPct val="100000"/>
-              </a:lnSpc>
-              <a:spcBef>
-                <a:spcPts val="0"/>
-              </a:spcBef>
-              <a:spcAft>
-                <a:spcPts val="0"/>
-              </a:spcAft>
-              <a:buClr>
-                <a:srgbClr val="000000"/>
-              </a:buClr>
-              <a:buSzPts val="1400"/>
-              <a:buFont typeface="Arial"/>
-              <a:buNone/>
-            </a:pPr>
-            <a:r>
-              <a:t/>
-            </a:r>
-            <a:endParaRPr b="0" i="0" sz="1400" u="none" cap="none" strike="noStrike">
-              <a:solidFill>
-                <a:srgbClr val="000000"/>
-              </a:solidFill>
-              <a:latin typeface="Arial"/>
-              <a:ea typeface="Arial"/>
-              <a:cs typeface="Arial"/>
-              <a:sym typeface="Arial"/>
-            </a:endParaRPr>
-          </a:p>
-        </p:txBody>
-      </p:sp>
       <p:pic>
         <p:nvPicPr>
-          <p:cNvPr id="145" name="Google Shape;145;p3"/>
+          <p:cNvPr id="142" name="Google Shape;142;g3e3a03c189e_0_0"/>
           <p:cNvPicPr preferRelativeResize="0"/>
           <p:nvPr/>
         </p:nvPicPr>
@@ -20167,16 +19971,73 @@
       </p:pic>
       <p:sp>
         <p:nvSpPr>
-          <p:cNvPr id="146" name="Google Shape;146;p3"/>
-          <p:cNvSpPr txBox="1"/>
-          <p:nvPr>
-            <p:ph idx="1" type="body"/>
-          </p:nvPr>
+          <p:cNvPr id="143" name="Google Shape;143;g3e3a03c189e_0_0"/>
+          <p:cNvSpPr/>
+          <p:nvPr/>
         </p:nvSpPr>
         <p:spPr>
           <a:xfrm>
-            <a:off x="362475" y="1071427"/>
-            <a:ext cx="7792200" cy="2010000"/>
+            <a:off x="10225" y="4892025"/>
+            <a:ext cx="9144000" cy="251400"/>
+          </a:xfrm>
+          <a:prstGeom prst="rect">
+            <a:avLst/>
+          </a:prstGeom>
+          <a:solidFill>
+            <a:srgbClr val="C3FFFC"/>
+          </a:solidFill>
+          <a:ln>
+            <a:noFill/>
+          </a:ln>
+        </p:spPr>
+        <p:txBody>
+          <a:bodyPr anchorCtr="0" anchor="ctr" bIns="91425" lIns="91425" spcFirstLastPara="1" rIns="91425" wrap="square" tIns="91425">
+            <a:noAutofit/>
+          </a:bodyPr>
+          <a:lstStyle/>
+          <a:p>
+            <a:pPr indent="0" lvl="0" marL="0" marR="0" rtl="0" algn="l">
+              <a:lnSpc>
+                <a:spcPct val="100000"/>
+              </a:lnSpc>
+              <a:spcBef>
+                <a:spcPts val="0"/>
+              </a:spcBef>
+              <a:spcAft>
+                <a:spcPts val="0"/>
+              </a:spcAft>
+              <a:buClr>
+                <a:srgbClr val="000000"/>
+              </a:buClr>
+              <a:buSzPts val="1400"/>
+              <a:buFont typeface="Arial"/>
+              <a:buNone/>
+            </a:pPr>
+            <a:r>
+              <a:t/>
+            </a:r>
+            <a:endParaRPr b="0" i="0" sz="1400" u="none" cap="none" strike="noStrike">
+              <a:solidFill>
+                <a:srgbClr val="000000"/>
+              </a:solidFill>
+              <a:latin typeface="Arial"/>
+              <a:ea typeface="Arial"/>
+              <a:cs typeface="Arial"/>
+              <a:sym typeface="Arial"/>
+            </a:endParaRPr>
+          </a:p>
+        </p:txBody>
+      </p:sp>
+      <p:sp>
+        <p:nvSpPr>
+          <p:cNvPr id="144" name="Google Shape;144;g3e3a03c189e_0_0"/>
+          <p:cNvSpPr txBox="1"/>
+          <p:nvPr/>
+        </p:nvSpPr>
+        <p:spPr>
+          <a:xfrm>
+            <a:off x="1192664" y="779179"/>
+            <a:ext cx="5315100" cy="375900"/>
           </a:xfrm>
           <a:prstGeom prst="rect">
             <a:avLst/>
@@ -20192,237 +20053,50 @@
           </a:bodyPr>
           <a:lstStyle/>
           <a:p>
-            <a:pPr indent="0" lvl="0" marL="114300" rtl="0" algn="l">
-              <a:lnSpc>
-                <a:spcPct val="115000"/>
-              </a:lnSpc>
-              <a:spcBef>
-                <a:spcPts val="0"/>
-              </a:spcBef>
-              <a:spcAft>
-                <a:spcPts val="0"/>
-              </a:spcAft>
-              <a:buSzPts val="1800"/>
+            <a:pPr indent="0" lvl="0" marL="0" marR="0" rtl="0" algn="l">
+              <a:lnSpc>
+                <a:spcPct val="100000"/>
+              </a:lnSpc>
+              <a:spcBef>
+                <a:spcPts val="0"/>
+              </a:spcBef>
+              <a:spcAft>
+                <a:spcPts val="0"/>
+              </a:spcAft>
+              <a:buClr>
+                <a:schemeClr val="dk1"/>
+              </a:buClr>
+              <a:buSzPts val="2800"/>
+              <a:buFont typeface="Arial"/>
               <a:buNone/>
             </a:pPr>
             <a:r>
-              <a:rPr b="1" lang="fr-FR" sz="1600"/>
-              <a:t>Dossier github</a:t>
+              <a:rPr b="1" lang="fr-FR">
+                <a:solidFill>
+                  <a:srgbClr val="0E3449"/>
+                </a:solidFill>
+                <a:latin typeface="Inter SemiBold"/>
+                <a:ea typeface="Inter SemiBold"/>
+                <a:cs typeface="Inter SemiBold"/>
+                <a:sym typeface="Inter SemiBold"/>
+              </a:rPr>
+              <a:t>Transaction information and outbox-events</a:t>
             </a:r>
-            <a:r>
-              <a:rPr lang="fr-FR" sz="1600"/>
-              <a:t>: </a:t>
-            </a:r>
-            <a:r>
-              <a:rPr lang="fr-FR" sz="1600" u="sng">
-                <a:solidFill>
-                  <a:schemeClr val="hlink"/>
-                </a:solidFill>
-                <a:hlinkClick r:id="rId4"/>
-              </a:rPr>
-              <a:t>https://github.com/Sheikoh/Project_Getaround.git</a:t>
-            </a:r>
-            <a:endParaRPr sz="1600"/>
-          </a:p>
-          <a:p>
-            <a:pPr indent="0" lvl="0" marL="114300" rtl="0" algn="l">
-              <a:lnSpc>
-                <a:spcPct val="115000"/>
-              </a:lnSpc>
-              <a:spcBef>
-                <a:spcPts val="0"/>
-              </a:spcBef>
-              <a:spcAft>
-                <a:spcPts val="0"/>
-              </a:spcAft>
-              <a:buSzPts val="1800"/>
-              <a:buNone/>
-            </a:pPr>
-            <a:r>
-              <a:t/>
-            </a:r>
-            <a:endParaRPr sz="1600"/>
-          </a:p>
-          <a:p>
-            <a:pPr indent="0" lvl="0" marL="114300" rtl="0" algn="l">
-              <a:lnSpc>
-                <a:spcPct val="115000"/>
-              </a:lnSpc>
-              <a:spcBef>
-                <a:spcPts val="0"/>
-              </a:spcBef>
-              <a:spcAft>
-                <a:spcPts val="0"/>
-              </a:spcAft>
-              <a:buSzPts val="1800"/>
-              <a:buNone/>
-            </a:pPr>
-            <a:r>
-              <a:rPr b="1" lang="fr-FR" sz="1600"/>
-              <a:t>Dashboard</a:t>
-            </a:r>
-            <a:r>
-              <a:rPr lang="fr-FR" sz="1600"/>
-              <a:t>: </a:t>
-            </a:r>
-            <a:r>
-              <a:rPr lang="fr-FR" sz="1600" u="sng">
-                <a:solidFill>
-                  <a:schemeClr val="hlink"/>
-                </a:solidFill>
-                <a:hlinkClick r:id="rId5"/>
-              </a:rPr>
-              <a:t>https://huggingface.co/spaces/Sheyko/Dashboard_getaround</a:t>
-            </a:r>
-            <a:endParaRPr sz="1600"/>
-          </a:p>
-          <a:p>
-            <a:pPr indent="0" lvl="0" marL="0" rtl="0" algn="l">
-              <a:lnSpc>
-                <a:spcPct val="115000"/>
-              </a:lnSpc>
-              <a:spcBef>
-                <a:spcPts val="0"/>
-              </a:spcBef>
-              <a:spcAft>
-                <a:spcPts val="0"/>
-              </a:spcAft>
-              <a:buSzPts val="1800"/>
-              <a:buNone/>
-            </a:pPr>
-            <a:r>
-              <a:t/>
-            </a:r>
-            <a:endParaRPr sz="1600"/>
-          </a:p>
-          <a:p>
-            <a:pPr indent="0" lvl="0" marL="114300" rtl="0" algn="l">
-              <a:lnSpc>
-                <a:spcPct val="115000"/>
-              </a:lnSpc>
-              <a:spcBef>
-                <a:spcPts val="0"/>
-              </a:spcBef>
-              <a:spcAft>
-                <a:spcPts val="0"/>
-              </a:spcAft>
-              <a:buSzPts val="1800"/>
-              <a:buNone/>
-            </a:pPr>
-            <a:r>
-              <a:rPr b="1" lang="fr-FR" sz="1600"/>
-              <a:t>API</a:t>
-            </a:r>
-            <a:r>
-              <a:rPr lang="fr-FR" sz="1600"/>
-              <a:t>: </a:t>
-            </a:r>
-            <a:r>
-              <a:rPr lang="fr-FR" sz="1600" u="sng">
-                <a:solidFill>
-                  <a:schemeClr val="hlink"/>
-                </a:solidFill>
-                <a:hlinkClick r:id="rId6"/>
-              </a:rPr>
-              <a:t>https://sheyko-getaround-api.hf.space/docs</a:t>
-            </a:r>
-            <a:endParaRPr sz="1600"/>
-          </a:p>
-          <a:p>
-            <a:pPr indent="0" lvl="0" marL="0" rtl="0" algn="l">
-              <a:lnSpc>
-                <a:spcPct val="115000"/>
-              </a:lnSpc>
-              <a:spcBef>
-                <a:spcPts val="0"/>
-              </a:spcBef>
-              <a:spcAft>
-                <a:spcPts val="0"/>
-              </a:spcAft>
-              <a:buSzPts val="1800"/>
-              <a:buNone/>
-            </a:pPr>
-            <a:r>
-              <a:t/>
-            </a:r>
-            <a:endParaRPr sz="1600"/>
-          </a:p>
-          <a:p>
-            <a:pPr indent="0" lvl="0" marL="114300" rtl="0" algn="l">
-              <a:lnSpc>
-                <a:spcPct val="115000"/>
-              </a:lnSpc>
-              <a:spcBef>
-                <a:spcPts val="0"/>
-              </a:spcBef>
-              <a:spcAft>
-                <a:spcPts val="0"/>
-              </a:spcAft>
-              <a:buSzPts val="1800"/>
-              <a:buNone/>
-            </a:pPr>
-            <a:r>
-              <a:rPr b="1" lang="fr-FR" sz="1600"/>
-              <a:t>Mlflow</a:t>
-            </a:r>
-            <a:r>
-              <a:rPr lang="fr-FR" sz="1600"/>
-              <a:t>: </a:t>
-            </a:r>
-            <a:r>
-              <a:rPr lang="fr-FR" sz="1600" u="sng">
-                <a:solidFill>
-                  <a:schemeClr val="hlink"/>
-                </a:solidFill>
-                <a:hlinkClick r:id="rId7"/>
-              </a:rPr>
-              <a:t>https://sheyko-mlflow-server-ft34.hf.space/#/experiments/2/runs</a:t>
-            </a:r>
-            <a:endParaRPr sz="1600"/>
-          </a:p>
-          <a:p>
-            <a:pPr indent="0" lvl="0" marL="114300" rtl="0" algn="l">
-              <a:lnSpc>
-                <a:spcPct val="115000"/>
-              </a:lnSpc>
-              <a:spcBef>
-                <a:spcPts val="0"/>
-              </a:spcBef>
-              <a:spcAft>
-                <a:spcPts val="0"/>
-              </a:spcAft>
-              <a:buSzPts val="1800"/>
-              <a:buNone/>
-            </a:pPr>
-            <a:r>
-              <a:t/>
-            </a:r>
-            <a:endParaRPr sz="1400"/>
-          </a:p>
-          <a:p>
-            <a:pPr indent="0" lvl="0" marL="114300" rtl="0" algn="l">
-              <a:lnSpc>
-                <a:spcPct val="115000"/>
-              </a:lnSpc>
-              <a:spcBef>
-                <a:spcPts val="0"/>
-              </a:spcBef>
-              <a:spcAft>
-                <a:spcPts val="0"/>
-              </a:spcAft>
-              <a:buSzPts val="1800"/>
-              <a:buNone/>
-            </a:pPr>
-            <a:r>
-              <a:t/>
-            </a:r>
-            <a:endParaRPr sz="1400"/>
+            <a:endParaRPr b="1" i="0" sz="1400" u="none" cap="none" strike="noStrike">
+              <a:solidFill>
+                <a:srgbClr val="0E3449"/>
+              </a:solidFill>
+              <a:latin typeface="Inter SemiBold"/>
+              <a:ea typeface="Inter SemiBold"/>
+              <a:cs typeface="Inter SemiBold"/>
+              <a:sym typeface="Inter SemiBold"/>
+            </a:endParaRPr>
           </a:p>
         </p:txBody>
       </p:sp>
       <p:sp>
         <p:nvSpPr>
-          <p:cNvPr id="147" name="Google Shape;147;p3"/>
+          <p:cNvPr id="145" name="Google Shape;145;g3e3a03c189e_0_0"/>
           <p:cNvSpPr txBox="1"/>
           <p:nvPr>
             <p:ph idx="12" type="sldNum"/>
@@ -20431,7 +20105,7 @@
         <p:spPr>
           <a:xfrm>
             <a:off x="8472458" y="4939381"/>
-            <a:ext cx="548700" cy="153888"/>
+            <a:ext cx="548700" cy="153900"/>
           </a:xfrm>
           <a:prstGeom prst="rect">
             <a:avLst/>
@@ -20465,6 +20139,231 @@
               <a:t>‹#›</a:t>
             </a:fld>
             <a:endParaRPr/>
+          </a:p>
+        </p:txBody>
+      </p:sp>
+      <p:pic>
+        <p:nvPicPr>
+          <p:cNvPr id="146" name="Google Shape;146;g3e3a03c189e_0_0"/>
+          <p:cNvPicPr preferRelativeResize="0"/>
+          <p:nvPr/>
+        </p:nvPicPr>
+        <p:blipFill>
+          <a:blip r:embed="rId4">
+            <a:alphaModFix/>
+          </a:blip>
+          <a:stretch>
+            <a:fillRect/>
+          </a:stretch>
+        </p:blipFill>
+        <p:spPr>
+          <a:xfrm>
+            <a:off x="271525" y="1307479"/>
+            <a:ext cx="4778212" cy="3432147"/>
+          </a:xfrm>
+          <a:prstGeom prst="rect">
+            <a:avLst/>
+          </a:prstGeom>
+          <a:noFill/>
+          <a:ln>
+            <a:noFill/>
+          </a:ln>
+        </p:spPr>
+      </p:pic>
+      <p:sp>
+        <p:nvSpPr>
+          <p:cNvPr id="147" name="Google Shape;147;g3e3a03c189e_0_0"/>
+          <p:cNvSpPr/>
+          <p:nvPr/>
+        </p:nvSpPr>
+        <p:spPr>
+          <a:xfrm>
+            <a:off x="5900000" y="936400"/>
+            <a:ext cx="3007800" cy="3955500"/>
+          </a:xfrm>
+          <a:prstGeom prst="rect">
+            <a:avLst/>
+          </a:prstGeom>
+          <a:solidFill>
+            <a:srgbClr val="FFFFFF"/>
+          </a:solidFill>
+          <a:ln>
+            <a:noFill/>
+          </a:ln>
+        </p:spPr>
+        <p:txBody>
+          <a:bodyPr anchorCtr="0" anchor="t" bIns="45700" lIns="91425" spcFirstLastPara="1" rIns="91425" wrap="square" tIns="45700">
+            <a:noAutofit/>
+          </a:bodyPr>
+          <a:lstStyle/>
+          <a:p>
+            <a:pPr indent="-95250" lvl="0" marL="171450" marR="0" rtl="0" algn="l">
+              <a:lnSpc>
+                <a:spcPct val="100000"/>
+              </a:lnSpc>
+              <a:spcBef>
+                <a:spcPts val="0"/>
+              </a:spcBef>
+              <a:spcAft>
+                <a:spcPts val="0"/>
+              </a:spcAft>
+              <a:buClr>
+                <a:srgbClr val="000000"/>
+              </a:buClr>
+              <a:buSzPts val="1200"/>
+              <a:buFont typeface="Arial"/>
+              <a:buNone/>
+            </a:pPr>
+            <a:r>
+              <a:t/>
+            </a:r>
+            <a:endParaRPr b="0" i="0" sz="1200" u="none" cap="none" strike="noStrike">
+              <a:solidFill>
+                <a:srgbClr val="000000"/>
+              </a:solidFill>
+              <a:latin typeface="Calibri"/>
+              <a:ea typeface="Calibri"/>
+              <a:cs typeface="Calibri"/>
+              <a:sym typeface="Calibri"/>
+            </a:endParaRPr>
+          </a:p>
+          <a:p>
+            <a:pPr indent="-171450" lvl="0" marL="171450" marR="0" rtl="0" algn="l">
+              <a:lnSpc>
+                <a:spcPct val="100000"/>
+              </a:lnSpc>
+              <a:spcBef>
+                <a:spcPts val="1200"/>
+              </a:spcBef>
+              <a:spcAft>
+                <a:spcPts val="0"/>
+              </a:spcAft>
+              <a:buClr>
+                <a:srgbClr val="000000"/>
+              </a:buClr>
+              <a:buSzPts val="1200"/>
+              <a:buFont typeface="Arial"/>
+              <a:buChar char="•"/>
+            </a:pPr>
+            <a:r>
+              <a:rPr b="1" lang="fr-FR" sz="1200"/>
+              <a:t>Stockage exhaustif</a:t>
+            </a:r>
+            <a:r>
+              <a:rPr lang="fr-FR" sz="1200"/>
+              <a:t> des données de transaction, suivant les règles de normalisations.</a:t>
+            </a:r>
+            <a:endParaRPr sz="1200"/>
+          </a:p>
+          <a:p>
+            <a:pPr indent="-171450" lvl="0" marL="171450" marR="0" rtl="0" algn="l">
+              <a:lnSpc>
+                <a:spcPct val="100000"/>
+              </a:lnSpc>
+              <a:spcBef>
+                <a:spcPts val="1200"/>
+              </a:spcBef>
+              <a:spcAft>
+                <a:spcPts val="0"/>
+              </a:spcAft>
+              <a:buClr>
+                <a:srgbClr val="000000"/>
+              </a:buClr>
+              <a:buSzPts val="1200"/>
+              <a:buFont typeface="Arial"/>
+              <a:buChar char="•"/>
+            </a:pPr>
+            <a:r>
+              <a:rPr b="1" lang="fr-FR" sz="1200"/>
+              <a:t>Outbox_events</a:t>
+            </a:r>
+            <a:r>
+              <a:rPr b="1" i="0" lang="fr-FR" sz="1200" u="none" cap="none" strike="noStrike">
+                <a:solidFill>
+                  <a:srgbClr val="000000"/>
+                </a:solidFill>
+                <a:latin typeface="Arial"/>
+                <a:ea typeface="Arial"/>
+                <a:cs typeface="Arial"/>
+                <a:sym typeface="Arial"/>
+              </a:rPr>
+              <a:t>: </a:t>
+            </a:r>
+            <a:r>
+              <a:rPr lang="fr-FR" sz="1200"/>
+              <a:t>Collects event information to feed them to Kafka and ensure ACID transactions to other services.</a:t>
+            </a:r>
+            <a:endParaRPr b="0" i="0" sz="1400" u="none" cap="none" strike="noStrike">
+              <a:solidFill>
+                <a:srgbClr val="000000"/>
+              </a:solidFill>
+              <a:latin typeface="Arial"/>
+              <a:ea typeface="Arial"/>
+              <a:cs typeface="Arial"/>
+              <a:sym typeface="Arial"/>
+            </a:endParaRPr>
+          </a:p>
+          <a:p>
+            <a:pPr indent="0" lvl="0" marL="457200" marR="0" rtl="0" algn="l">
+              <a:lnSpc>
+                <a:spcPct val="100000"/>
+              </a:lnSpc>
+              <a:spcBef>
+                <a:spcPts val="1200"/>
+              </a:spcBef>
+              <a:spcAft>
+                <a:spcPts val="0"/>
+              </a:spcAft>
+              <a:buClr>
+                <a:srgbClr val="000000"/>
+              </a:buClr>
+              <a:buSzPts val="1200"/>
+              <a:buFont typeface="Arial"/>
+              <a:buNone/>
+            </a:pPr>
+            <a:r>
+              <a:t/>
+            </a:r>
+            <a:endParaRPr b="0" i="0" sz="1200" u="none" cap="none" strike="noStrike">
+              <a:solidFill>
+                <a:srgbClr val="000000"/>
+              </a:solidFill>
+              <a:latin typeface="Arial"/>
+              <a:ea typeface="Arial"/>
+              <a:cs typeface="Arial"/>
+              <a:sym typeface="Arial"/>
+            </a:endParaRPr>
+          </a:p>
+          <a:p>
+            <a:pPr indent="-209550" lvl="0" marL="285750" marR="0" rtl="0" algn="l">
+              <a:lnSpc>
+                <a:spcPct val="100000"/>
+              </a:lnSpc>
+              <a:spcBef>
+                <a:spcPts val="300"/>
+              </a:spcBef>
+              <a:spcAft>
+                <a:spcPts val="0"/>
+              </a:spcAft>
+              <a:buClr>
+                <a:srgbClr val="000000"/>
+              </a:buClr>
+              <a:buSzPts val="1200"/>
+              <a:buFont typeface="Arial"/>
+              <a:buNone/>
+            </a:pPr>
+            <a:r>
+              <a:t/>
+            </a:r>
+            <a:endParaRPr b="0" i="0" sz="1200" u="none" cap="none" strike="noStrike">
+              <a:solidFill>
+                <a:srgbClr val="000000"/>
+              </a:solidFill>
+              <a:latin typeface="Calibri"/>
+              <a:ea typeface="Calibri"/>
+              <a:cs typeface="Calibri"/>
+              <a:sym typeface="Calibri"/>
+            </a:endParaRPr>
           </a:p>
         </p:txBody>
       </p:sp>
@@ -20495,7 +20394,7 @@
       </p:grpSpPr>
       <p:sp>
         <p:nvSpPr>
-          <p:cNvPr id="152" name="Google Shape;152;p11"/>
+          <p:cNvPr id="152" name="Google Shape;152;g3e3a03c189e_0_15"/>
           <p:cNvSpPr txBox="1"/>
           <p:nvPr>
             <p:ph idx="4294967295" type="ctrTitle"/>
@@ -20547,7 +20446,7 @@
                 <a:cs typeface="Inter SemiBold"/>
                 <a:sym typeface="Inter SemiBold"/>
               </a:rPr>
-              <a:t>Dashboard d’aide à la décision</a:t>
+              <a:t>OLAP</a:t>
             </a:r>
             <a:endParaRPr b="0" i="0" sz="2500" u="none" cap="none" strike="noStrike">
               <a:solidFill>
@@ -20563,7 +20462,7 @@
       </p:sp>
       <p:pic>
         <p:nvPicPr>
-          <p:cNvPr id="153" name="Google Shape;153;p11"/>
+          <p:cNvPr id="153" name="Google Shape;153;g3e3a03c189e_0_15"/>
           <p:cNvPicPr preferRelativeResize="0"/>
           <p:nvPr/>
         </p:nvPicPr>
@@ -20590,7 +20489,7 @@
       </p:pic>
       <p:sp>
         <p:nvSpPr>
-          <p:cNvPr id="154" name="Google Shape;154;p11"/>
+          <p:cNvPr id="154" name="Google Shape;154;g3e3a03c189e_0_15"/>
           <p:cNvSpPr/>
           <p:nvPr/>
         </p:nvSpPr>
@@ -20649,14 +20548,14 @@
       </p:sp>
       <p:sp>
         <p:nvSpPr>
-          <p:cNvPr id="155" name="Google Shape;155;p11"/>
+          <p:cNvPr id="155" name="Google Shape;155;g3e3a03c189e_0_15"/>
           <p:cNvSpPr txBox="1"/>
           <p:nvPr/>
         </p:nvSpPr>
         <p:spPr>
           <a:xfrm>
             <a:off x="1192664" y="779179"/>
-            <a:ext cx="5315100" cy="375870"/>
+            <a:ext cx="5315100" cy="375900"/>
           </a:xfrm>
           <a:prstGeom prst="rect">
             <a:avLst/>
@@ -20699,7 +20598,7 @@
                 <a:cs typeface="Inter SemiBold"/>
                 <a:sym typeface="Inter SemiBold"/>
               </a:rPr>
-              <a:t>Intervalle de relocation de voiture</a:t>
+              <a:t>Transaction fact + daily_revenue materialized</a:t>
             </a:r>
             <a:endParaRPr b="1" i="0" sz="1400" u="none" cap="none" strike="noStrike">
               <a:solidFill>
@@ -20715,151 +20614,7 @@
       </p:sp>
       <p:sp>
         <p:nvSpPr>
-          <p:cNvPr id="156" name="Google Shape;156;p11"/>
-          <p:cNvSpPr/>
-          <p:nvPr/>
-        </p:nvSpPr>
-        <p:spPr>
-          <a:xfrm>
-            <a:off x="7500992" y="765913"/>
-            <a:ext cx="1098685" cy="333041"/>
-          </a:xfrm>
-          <a:prstGeom prst="roundRect">
-            <a:avLst>
-              <a:gd fmla="val 16667" name="adj"/>
-            </a:avLst>
-          </a:prstGeom>
-          <a:solidFill>
-            <a:srgbClr val="F2F2F2"/>
-          </a:solidFill>
-          <a:ln>
-            <a:noFill/>
-          </a:ln>
-        </p:spPr>
-        <p:txBody>
-          <a:bodyPr anchorCtr="0" anchor="ctr" bIns="45700" lIns="91425" spcFirstLastPara="1" rIns="91425" wrap="square" tIns="45700">
-            <a:noAutofit/>
-          </a:bodyPr>
-          <a:lstStyle/>
-          <a:p>
-            <a:pPr indent="0" lvl="0" marL="0" marR="0" rtl="0" algn="ctr">
-              <a:lnSpc>
-                <a:spcPct val="100000"/>
-              </a:lnSpc>
-              <a:spcBef>
-                <a:spcPts val="0"/>
-              </a:spcBef>
-              <a:spcAft>
-                <a:spcPts val="0"/>
-              </a:spcAft>
-              <a:buNone/>
-            </a:pPr>
-            <a:r>
-              <a:t/>
-            </a:r>
-            <a:endParaRPr b="0" i="0" sz="1400" u="none" cap="none" strike="noStrike">
-              <a:solidFill>
-                <a:schemeClr val="lt1"/>
-              </a:solidFill>
-              <a:latin typeface="Arial"/>
-              <a:ea typeface="Arial"/>
-              <a:cs typeface="Arial"/>
-              <a:sym typeface="Arial"/>
-            </a:endParaRPr>
-          </a:p>
-        </p:txBody>
-      </p:sp>
-      <p:sp>
-        <p:nvSpPr>
-          <p:cNvPr id="157" name="Google Shape;157;p11"/>
-          <p:cNvSpPr txBox="1"/>
-          <p:nvPr/>
-        </p:nvSpPr>
-        <p:spPr>
-          <a:xfrm>
-            <a:off x="7472169" y="809322"/>
-            <a:ext cx="1156330" cy="246221"/>
-          </a:xfrm>
-          <a:prstGeom prst="rect">
-            <a:avLst/>
-          </a:prstGeom>
-          <a:noFill/>
-          <a:ln>
-            <a:noFill/>
-          </a:ln>
-        </p:spPr>
-        <p:txBody>
-          <a:bodyPr anchorCtr="0" anchor="t" bIns="45700" lIns="91425" spcFirstLastPara="1" rIns="91425" wrap="square" tIns="45700">
-            <a:spAutoFit/>
-          </a:bodyPr>
-          <a:lstStyle/>
-          <a:p>
-            <a:pPr indent="0" lvl="0" marL="0" marR="0" rtl="0" algn="ctr">
-              <a:lnSpc>
-                <a:spcPct val="100000"/>
-              </a:lnSpc>
-              <a:spcBef>
-                <a:spcPts val="0"/>
-              </a:spcBef>
-              <a:spcAft>
-                <a:spcPts val="0"/>
-              </a:spcAft>
-              <a:buNone/>
-            </a:pPr>
-            <a:r>
-              <a:rPr b="0" i="0" lang="fr-FR" sz="1000" u="sng" cap="none" strike="noStrike">
-                <a:solidFill>
-                  <a:schemeClr val="hlink"/>
-                </a:solidFill>
-                <a:latin typeface="Arial"/>
-                <a:ea typeface="Arial"/>
-                <a:cs typeface="Arial"/>
-                <a:sym typeface="Arial"/>
-                <a:hlinkClick r:id="rId4"/>
-              </a:rPr>
-              <a:t>Lien Dashboard</a:t>
-            </a:r>
-            <a:endParaRPr b="0" i="0" sz="800" u="none" cap="none" strike="noStrike">
-              <a:solidFill>
-                <a:srgbClr val="000000"/>
-              </a:solidFill>
-              <a:latin typeface="Arial"/>
-              <a:ea typeface="Arial"/>
-              <a:cs typeface="Arial"/>
-              <a:sym typeface="Arial"/>
-            </a:endParaRPr>
-          </a:p>
-        </p:txBody>
-      </p:sp>
-      <p:cxnSp>
-        <p:nvCxnSpPr>
-          <p:cNvPr id="158" name="Google Shape;158;p11"/>
-          <p:cNvCxnSpPr/>
-          <p:nvPr/>
-        </p:nvCxnSpPr>
-        <p:spPr>
-          <a:xfrm>
-            <a:off x="6902308" y="936409"/>
-            <a:ext cx="569861" cy="0"/>
-          </a:xfrm>
-          <a:prstGeom prst="straightConnector1">
-            <a:avLst/>
-          </a:prstGeom>
-          <a:noFill/>
-          <a:ln cap="flat" cmpd="sng" w="76200">
-            <a:solidFill>
-              <a:srgbClr val="FFC000"/>
-            </a:solidFill>
-            <a:prstDash val="solid"/>
-            <a:round/>
-            <a:headEnd len="sm" w="sm" type="none"/>
-            <a:tailEnd len="med" w="med" type="triangle"/>
-          </a:ln>
-        </p:spPr>
-      </p:cxnSp>
-      <p:sp>
-        <p:nvSpPr>
-          <p:cNvPr id="159" name="Google Shape;159;p11"/>
+          <p:cNvPr id="156" name="Google Shape;156;g3e3a03c189e_0_15"/>
           <p:cNvSpPr txBox="1"/>
           <p:nvPr>
             <p:ph idx="12" type="sldNum"/>
@@ -20868,7 +20623,7 @@
         <p:spPr>
           <a:xfrm>
             <a:off x="8472458" y="4939381"/>
-            <a:ext cx="548700" cy="153888"/>
+            <a:ext cx="548700" cy="153900"/>
           </a:xfrm>
           <a:prstGeom prst="rect">
             <a:avLst/>
@@ -20907,12 +20662,12 @@
       </p:sp>
       <p:pic>
         <p:nvPicPr>
-          <p:cNvPr id="160" name="Google Shape;160;p11"/>
+          <p:cNvPr id="157" name="Google Shape;157;g3e3a03c189e_0_15"/>
           <p:cNvPicPr preferRelativeResize="0"/>
           <p:nvPr/>
         </p:nvPicPr>
         <p:blipFill>
-          <a:blip r:embed="rId5">
+          <a:blip r:embed="rId4">
             <a:alphaModFix/>
           </a:blip>
           <a:stretch>
@@ -20921,8 +20676,8 @@
         </p:blipFill>
         <p:spPr>
           <a:xfrm>
-            <a:off x="869214" y="1307449"/>
-            <a:ext cx="2866946" cy="3432177"/>
+            <a:off x="305350" y="1307475"/>
+            <a:ext cx="5594651" cy="3375288"/>
           </a:xfrm>
           <a:prstGeom prst="rect">
             <a:avLst/>
@@ -20933,34 +20688,215 @@
           </a:ln>
         </p:spPr>
       </p:pic>
-      <p:pic>
-        <p:nvPicPr>
-          <p:cNvPr id="161" name="Google Shape;161;p11"/>
-          <p:cNvPicPr preferRelativeResize="0"/>
+      <p:sp>
+        <p:nvSpPr>
+          <p:cNvPr id="158" name="Google Shape;158;g3e3a03c189e_0_15"/>
+          <p:cNvSpPr/>
           <p:nvPr/>
-        </p:nvPicPr>
-        <p:blipFill>
-          <a:blip r:embed="rId6">
-            <a:alphaModFix/>
-          </a:blip>
-          <a:stretch>
-            <a:fillRect/>
-          </a:stretch>
-        </p:blipFill>
+        </p:nvSpPr>
         <p:spPr>
           <a:xfrm>
-            <a:off x="4641671" y="1307449"/>
-            <a:ext cx="2577764" cy="3432175"/>
+            <a:off x="5900000" y="936400"/>
+            <a:ext cx="3007800" cy="3955500"/>
           </a:xfrm>
           <a:prstGeom prst="rect">
             <a:avLst/>
           </a:prstGeom>
-          <a:noFill/>
+          <a:solidFill>
+            <a:srgbClr val="FFFFFF"/>
+          </a:solidFill>
           <a:ln>
             <a:noFill/>
           </a:ln>
         </p:spPr>
-      </p:pic>
+        <p:txBody>
+          <a:bodyPr anchorCtr="0" anchor="t" bIns="45700" lIns="91425" spcFirstLastPara="1" rIns="91425" wrap="square" tIns="45700">
+            <a:noAutofit/>
+          </a:bodyPr>
+          <a:lstStyle/>
+          <a:p>
+            <a:pPr indent="-95250" lvl="0" marL="171450" marR="0" rtl="0" algn="l">
+              <a:lnSpc>
+                <a:spcPct val="100000"/>
+              </a:lnSpc>
+              <a:spcBef>
+                <a:spcPts val="0"/>
+              </a:spcBef>
+              <a:spcAft>
+                <a:spcPts val="0"/>
+              </a:spcAft>
+              <a:buClr>
+                <a:srgbClr val="000000"/>
+              </a:buClr>
+              <a:buSzPts val="1200"/>
+              <a:buFont typeface="Arial"/>
+              <a:buNone/>
+            </a:pPr>
+            <a:r>
+              <a:t/>
+            </a:r>
+            <a:endParaRPr b="0" i="0" sz="1200" u="none" cap="none" strike="noStrike">
+              <a:solidFill>
+                <a:srgbClr val="000000"/>
+              </a:solidFill>
+              <a:latin typeface="Calibri"/>
+              <a:ea typeface="Calibri"/>
+              <a:cs typeface="Calibri"/>
+              <a:sym typeface="Calibri"/>
+            </a:endParaRPr>
+          </a:p>
+          <a:p>
+            <a:pPr indent="-171450" lvl="0" marL="171450" marR="0" rtl="0" algn="l">
+              <a:lnSpc>
+                <a:spcPct val="100000"/>
+              </a:lnSpc>
+              <a:spcBef>
+                <a:spcPts val="1200"/>
+              </a:spcBef>
+              <a:spcAft>
+                <a:spcPts val="0"/>
+              </a:spcAft>
+              <a:buClr>
+                <a:srgbClr val="000000"/>
+              </a:buClr>
+              <a:buSzPts val="1200"/>
+              <a:buFont typeface="Arial"/>
+              <a:buChar char="•"/>
+            </a:pPr>
+            <a:r>
+              <a:rPr b="1" lang="fr-FR" sz="1200"/>
+              <a:t>Schéma en étoile</a:t>
+            </a:r>
+            <a:r>
+              <a:rPr lang="fr-FR" sz="1200"/>
+              <a:t> autour d’une table de fait transaction afin de faciliter et d’alléger les requêtes.</a:t>
+            </a:r>
+            <a:r>
+              <a:rPr b="1" lang="fr-FR"/>
+              <a:t> </a:t>
+            </a:r>
+            <a:endParaRPr sz="1200"/>
+          </a:p>
+          <a:p>
+            <a:pPr indent="-171450" lvl="0" marL="171450" marR="0" rtl="0" algn="l">
+              <a:lnSpc>
+                <a:spcPct val="100000"/>
+              </a:lnSpc>
+              <a:spcBef>
+                <a:spcPts val="1200"/>
+              </a:spcBef>
+              <a:spcAft>
+                <a:spcPts val="0"/>
+              </a:spcAft>
+              <a:buClr>
+                <a:srgbClr val="000000"/>
+              </a:buClr>
+              <a:buSzPts val="1200"/>
+              <a:buFont typeface="Arial"/>
+              <a:buChar char="•"/>
+            </a:pPr>
+            <a:r>
+              <a:rPr b="1" lang="fr-FR" sz="1200"/>
+              <a:t>Vue matérialisée </a:t>
+            </a:r>
+            <a:r>
+              <a:rPr lang="fr-FR" sz="1200"/>
+              <a:t>Daily revenue</a:t>
+            </a:r>
+            <a:r>
+              <a:rPr b="1" i="0" lang="fr-FR" sz="1200" u="none" cap="none" strike="noStrike">
+                <a:solidFill>
+                  <a:srgbClr val="000000"/>
+                </a:solidFill>
+                <a:latin typeface="Arial"/>
+                <a:ea typeface="Arial"/>
+                <a:cs typeface="Arial"/>
+                <a:sym typeface="Arial"/>
+              </a:rPr>
+              <a:t>: </a:t>
+            </a:r>
+            <a:r>
+              <a:rPr lang="fr-FR" sz="1200"/>
+              <a:t>utilisée quotidiennement pour suivre les revenues, et pour construire les suivies de revenus mensuels</a:t>
+            </a:r>
+            <a:r>
+              <a:rPr lang="fr-FR" sz="1200"/>
+              <a:t>.</a:t>
+            </a:r>
+            <a:endParaRPr b="0" i="0" sz="1400" u="none" cap="none" strike="noStrike">
+              <a:solidFill>
+                <a:srgbClr val="000000"/>
+              </a:solidFill>
+              <a:latin typeface="Arial"/>
+              <a:ea typeface="Arial"/>
+              <a:cs typeface="Arial"/>
+              <a:sym typeface="Arial"/>
+            </a:endParaRPr>
+          </a:p>
+          <a:p>
+            <a:pPr indent="0" lvl="0" marL="457200" marR="0" rtl="0" algn="l">
+              <a:lnSpc>
+                <a:spcPct val="100000"/>
+              </a:lnSpc>
+              <a:spcBef>
+                <a:spcPts val="1200"/>
+              </a:spcBef>
+              <a:spcAft>
+                <a:spcPts val="0"/>
+              </a:spcAft>
+              <a:buClr>
+                <a:srgbClr val="000000"/>
+              </a:buClr>
+              <a:buSzPts val="1200"/>
+              <a:buFont typeface="Arial"/>
+              <a:buNone/>
+            </a:pPr>
+            <a:r>
+              <a:t/>
+            </a:r>
+            <a:endParaRPr b="0" i="0" sz="1200" u="none" cap="none" strike="noStrike">
+              <a:solidFill>
+                <a:srgbClr val="000000"/>
+              </a:solidFill>
+              <a:latin typeface="Arial"/>
+              <a:ea typeface="Arial"/>
+              <a:cs typeface="Arial"/>
+              <a:sym typeface="Arial"/>
+            </a:endParaRPr>
+          </a:p>
+          <a:p>
+            <a:pPr indent="-209550" lvl="0" marL="285750" marR="0" rtl="0" algn="l">
+              <a:lnSpc>
+                <a:spcPct val="100000"/>
+              </a:lnSpc>
+              <a:spcBef>
+                <a:spcPts val="300"/>
+              </a:spcBef>
+              <a:spcAft>
+                <a:spcPts val="0"/>
+              </a:spcAft>
+              <a:buClr>
+                <a:srgbClr val="000000"/>
+              </a:buClr>
+              <a:buSzPts val="1200"/>
+              <a:buFont typeface="Arial"/>
+              <a:buNone/>
+            </a:pPr>
+            <a:r>
+              <a:t/>
+            </a:r>
+            <a:endParaRPr b="0" i="0" sz="1200" u="none" cap="none" strike="noStrike">
+              <a:solidFill>
+                <a:srgbClr val="000000"/>
+              </a:solidFill>
+              <a:latin typeface="Calibri"/>
+              <a:ea typeface="Calibri"/>
+              <a:cs typeface="Calibri"/>
+              <a:sym typeface="Calibri"/>
+            </a:endParaRPr>
+          </a:p>
+        </p:txBody>
+      </p:sp>
     </p:spTree>
   </p:cSld>
   <p:clrMapOvr>
@@ -20974,7 +20910,7 @@
   <p:cSld>
     <p:spTree>
       <p:nvGrpSpPr>
-        <p:cNvPr id="165" name="Shape 165"/>
+        <p:cNvPr id="162" name="Shape 162"/>
         <p:cNvGrpSpPr/>
         <p:nvPr/>
       </p:nvGrpSpPr>
@@ -20988,7 +20924,7 @@
       </p:grpSpPr>
       <p:sp>
         <p:nvSpPr>
-          <p:cNvPr id="166" name="Google Shape;166;p7"/>
+          <p:cNvPr id="163" name="Google Shape;163;g3e436c1bcfb_0_2"/>
           <p:cNvSpPr txBox="1"/>
           <p:nvPr>
             <p:ph idx="4294967295" type="ctrTitle"/>
@@ -21040,7 +20976,7 @@
                 <a:cs typeface="Inter SemiBold"/>
                 <a:sym typeface="Inter SemiBold"/>
               </a:rPr>
-              <a:t>Endpoint de prédiction</a:t>
+              <a:t>NoSQL</a:t>
             </a:r>
             <a:endParaRPr b="0" i="0" sz="2500" u="none" cap="none" strike="noStrike">
               <a:solidFill>
@@ -21056,7 +20992,7 @@
       </p:sp>
       <p:pic>
         <p:nvPicPr>
-          <p:cNvPr id="167" name="Google Shape;167;p7"/>
+          <p:cNvPr id="164" name="Google Shape;164;g3e436c1bcfb_0_2"/>
           <p:cNvPicPr preferRelativeResize="0"/>
           <p:nvPr/>
         </p:nvPicPr>
@@ -21083,7 +21019,7 @@
       </p:pic>
       <p:sp>
         <p:nvSpPr>
-          <p:cNvPr id="168" name="Google Shape;168;p7"/>
+          <p:cNvPr id="165" name="Google Shape;165;g3e436c1bcfb_0_2"/>
           <p:cNvSpPr/>
           <p:nvPr/>
         </p:nvSpPr>
@@ -21140,42 +21076,16 @@
           </a:p>
         </p:txBody>
       </p:sp>
-      <p:cxnSp>
-        <p:nvCxnSpPr>
-          <p:cNvPr id="169" name="Google Shape;169;p7"/>
-          <p:cNvCxnSpPr/>
-          <p:nvPr/>
-        </p:nvCxnSpPr>
-        <p:spPr>
-          <a:xfrm>
-            <a:off x="4468243" y="1216963"/>
-            <a:ext cx="0" cy="3602030"/>
-          </a:xfrm>
-          <a:prstGeom prst="straightConnector1">
-            <a:avLst/>
-          </a:prstGeom>
-          <a:noFill/>
-          <a:ln cap="flat" cmpd="sng" w="19050">
-            <a:solidFill>
-              <a:srgbClr val="BFBFBF"/>
-            </a:solidFill>
-            <a:prstDash val="dash"/>
-            <a:round/>
-            <a:headEnd len="sm" w="sm" type="none"/>
-            <a:tailEnd len="sm" w="sm" type="none"/>
-          </a:ln>
-        </p:spPr>
-      </p:cxnSp>
       <p:sp>
         <p:nvSpPr>
-          <p:cNvPr id="170" name="Google Shape;170;p7"/>
+          <p:cNvPr id="166" name="Google Shape;166;g3e436c1bcfb_0_2"/>
           <p:cNvSpPr txBox="1"/>
           <p:nvPr/>
         </p:nvSpPr>
         <p:spPr>
           <a:xfrm>
-            <a:off x="249947" y="992387"/>
-            <a:ext cx="1965356" cy="228648"/>
+            <a:off x="1192664" y="779179"/>
+            <a:ext cx="5315100" cy="375900"/>
           </a:xfrm>
           <a:prstGeom prst="rect">
             <a:avLst/>
@@ -21209,7 +21119,7 @@
               <a:buNone/>
             </a:pPr>
             <a:r>
-              <a:rPr b="1" lang="fr-FR" sz="800">
+              <a:rPr b="1" lang="fr-FR">
                 <a:solidFill>
                   <a:srgbClr val="0E3449"/>
                 </a:solidFill>
@@ -21218,9 +21128,9 @@
                 <a:cs typeface="Inter SemiBold"/>
                 <a:sym typeface="Inter SemiBold"/>
               </a:rPr>
-              <a:t>API/docs</a:t>
+              <a:t>Five collections</a:t>
             </a:r>
-            <a:endParaRPr b="1" i="0" sz="800" u="none" cap="none" strike="noStrike">
+            <a:endParaRPr b="1" i="0" sz="1400" u="none" cap="none" strike="noStrike">
               <a:solidFill>
                 <a:srgbClr val="0E3449"/>
               </a:solidFill>
@@ -21234,205 +21144,7 @@
       </p:sp>
       <p:sp>
         <p:nvSpPr>
-          <p:cNvPr id="171" name="Google Shape;171;p7"/>
-          <p:cNvSpPr txBox="1"/>
-          <p:nvPr/>
-        </p:nvSpPr>
-        <p:spPr>
-          <a:xfrm>
-            <a:off x="4622680" y="992387"/>
-            <a:ext cx="2512251" cy="228648"/>
-          </a:xfrm>
-          <a:prstGeom prst="rect">
-            <a:avLst/>
-          </a:prstGeom>
-          <a:noFill/>
-          <a:ln>
-            <a:noFill/>
-          </a:ln>
-        </p:spPr>
-        <p:txBody>
-          <a:bodyPr anchorCtr="0" anchor="t" bIns="91425" lIns="91425" spcFirstLastPara="1" rIns="91425" wrap="square" tIns="91425">
-            <a:noAutofit/>
-          </a:bodyPr>
-          <a:lstStyle/>
-          <a:p>
-            <a:pPr indent="0" lvl="0" marL="0" marR="0" rtl="0" algn="l">
-              <a:lnSpc>
-                <a:spcPct val="100000"/>
-              </a:lnSpc>
-              <a:spcBef>
-                <a:spcPts val="0"/>
-              </a:spcBef>
-              <a:spcAft>
-                <a:spcPts val="0"/>
-              </a:spcAft>
-              <a:buClr>
-                <a:schemeClr val="dk1"/>
-              </a:buClr>
-              <a:buSzPts val="2800"/>
-              <a:buFont typeface="Arial"/>
-              <a:buNone/>
-            </a:pPr>
-            <a:r>
-              <a:rPr b="1" lang="fr-FR" sz="800">
-                <a:solidFill>
-                  <a:srgbClr val="0E3449"/>
-                </a:solidFill>
-                <a:latin typeface="Inter SemiBold"/>
-                <a:ea typeface="Inter SemiBold"/>
-                <a:cs typeface="Inter SemiBold"/>
-                <a:sym typeface="Inter SemiBold"/>
-              </a:rPr>
-              <a:t>Visualisation sur le dashboard</a:t>
-            </a:r>
-            <a:endParaRPr b="1" i="0" sz="800" u="none" cap="none" strike="noStrike">
-              <a:solidFill>
-                <a:srgbClr val="0E3449"/>
-              </a:solidFill>
-              <a:latin typeface="Inter SemiBold"/>
-              <a:ea typeface="Inter SemiBold"/>
-              <a:cs typeface="Inter SemiBold"/>
-              <a:sym typeface="Inter SemiBold"/>
-            </a:endParaRPr>
-          </a:p>
-        </p:txBody>
-      </p:sp>
-      <p:sp>
-        <p:nvSpPr>
-          <p:cNvPr id="172" name="Google Shape;172;p7"/>
-          <p:cNvSpPr txBox="1"/>
-          <p:nvPr/>
-        </p:nvSpPr>
-        <p:spPr>
-          <a:xfrm>
-            <a:off x="311699" y="4717038"/>
-            <a:ext cx="3233278" cy="125564"/>
-          </a:xfrm>
-          <a:prstGeom prst="rect">
-            <a:avLst/>
-          </a:prstGeom>
-          <a:noFill/>
-          <a:ln>
-            <a:noFill/>
-          </a:ln>
-        </p:spPr>
-        <p:txBody>
-          <a:bodyPr anchorCtr="0" anchor="t" bIns="91425" lIns="91425" spcFirstLastPara="1" rIns="91425" wrap="square" tIns="91425">
-            <a:noAutofit/>
-          </a:bodyPr>
-          <a:lstStyle/>
-          <a:p>
-            <a:pPr indent="0" lvl="0" marL="0" marR="0" rtl="0" algn="ctr">
-              <a:lnSpc>
-                <a:spcPct val="100000"/>
-              </a:lnSpc>
-              <a:spcBef>
-                <a:spcPts val="0"/>
-              </a:spcBef>
-              <a:spcAft>
-                <a:spcPts val="0"/>
-              </a:spcAft>
-              <a:buClr>
-                <a:schemeClr val="dk1"/>
-              </a:buClr>
-              <a:buSzPts val="2800"/>
-              <a:buFont typeface="Arial"/>
-              <a:buNone/>
-            </a:pPr>
-            <a:r>
-              <a:rPr b="0" i="0" lang="fr-FR" sz="500" u="none" cap="none" strike="noStrike">
-                <a:solidFill>
-                  <a:srgbClr val="0E3449"/>
-                </a:solidFill>
-                <a:latin typeface="Inter SemiBold"/>
-                <a:ea typeface="Inter SemiBold"/>
-                <a:cs typeface="Inter SemiBold"/>
-                <a:sym typeface="Inter SemiBold"/>
-              </a:rPr>
-              <a:t>heure</a:t>
-            </a:r>
-            <a:endParaRPr b="0" i="0" sz="500" u="none" cap="none" strike="noStrike">
-              <a:solidFill>
-                <a:srgbClr val="0E3449"/>
-              </a:solidFill>
-              <a:latin typeface="Inter SemiBold"/>
-              <a:ea typeface="Inter SemiBold"/>
-              <a:cs typeface="Inter SemiBold"/>
-              <a:sym typeface="Inter SemiBold"/>
-            </a:endParaRPr>
-          </a:p>
-        </p:txBody>
-      </p:sp>
-      <p:sp>
-        <p:nvSpPr>
-          <p:cNvPr id="173" name="Google Shape;173;p7"/>
-          <p:cNvSpPr txBox="1"/>
-          <p:nvPr/>
-        </p:nvSpPr>
-        <p:spPr>
-          <a:xfrm>
-            <a:off x="4891125" y="4717038"/>
-            <a:ext cx="3233278" cy="125564"/>
-          </a:xfrm>
-          <a:prstGeom prst="rect">
-            <a:avLst/>
-          </a:prstGeom>
-          <a:noFill/>
-          <a:ln>
-            <a:noFill/>
-          </a:ln>
-        </p:spPr>
-        <p:txBody>
-          <a:bodyPr anchorCtr="0" anchor="t" bIns="91425" lIns="91425" spcFirstLastPara="1" rIns="91425" wrap="square" tIns="91425">
-            <a:noAutofit/>
-          </a:bodyPr>
-          <a:lstStyle/>
-          <a:p>
-            <a:pPr indent="0" lvl="0" marL="0" marR="0" rtl="0" algn="ctr">
-              <a:lnSpc>
-                <a:spcPct val="100000"/>
-              </a:lnSpc>
-              <a:spcBef>
-                <a:spcPts val="0"/>
-              </a:spcBef>
-              <a:spcAft>
-                <a:spcPts val="0"/>
-              </a:spcAft>
-              <a:buClr>
-                <a:schemeClr val="dk1"/>
-              </a:buClr>
-              <a:buSzPts val="2800"/>
-              <a:buFont typeface="Arial"/>
-              <a:buNone/>
-            </a:pPr>
-            <a:r>
-              <a:rPr b="0" i="0" lang="fr-FR" sz="500" u="none" cap="none" strike="noStrike">
-                <a:solidFill>
-                  <a:srgbClr val="0E3449"/>
-                </a:solidFill>
-                <a:latin typeface="Inter SemiBold"/>
-                <a:ea typeface="Inter SemiBold"/>
-                <a:cs typeface="Inter SemiBold"/>
-                <a:sym typeface="Inter SemiBold"/>
-              </a:rPr>
-              <a:t>heure</a:t>
-            </a:r>
-            <a:endParaRPr b="0" i="0" sz="500" u="none" cap="none" strike="noStrike">
-              <a:solidFill>
-                <a:srgbClr val="0E3449"/>
-              </a:solidFill>
-              <a:latin typeface="Inter SemiBold"/>
-              <a:ea typeface="Inter SemiBold"/>
-              <a:cs typeface="Inter SemiBold"/>
-              <a:sym typeface="Inter SemiBold"/>
-            </a:endParaRPr>
-          </a:p>
-        </p:txBody>
-      </p:sp>
-      <p:sp>
-        <p:nvSpPr>
-          <p:cNvPr id="174" name="Google Shape;174;p7"/>
+          <p:cNvPr id="167" name="Google Shape;167;g3e436c1bcfb_0_2"/>
           <p:cNvSpPr txBox="1"/>
           <p:nvPr>
             <p:ph idx="12" type="sldNum"/>
@@ -21441,7 +21153,7 @@
         <p:spPr>
           <a:xfrm>
             <a:off x="8472458" y="4939381"/>
-            <a:ext cx="548700" cy="153888"/>
+            <a:ext cx="548700" cy="153900"/>
           </a:xfrm>
           <a:prstGeom prst="rect">
             <a:avLst/>
@@ -21478,128 +21190,16 @@
           </a:p>
         </p:txBody>
       </p:sp>
-      <p:pic>
-        <p:nvPicPr>
-          <p:cNvPr id="175" name="Google Shape;175;p7"/>
-          <p:cNvPicPr preferRelativeResize="0"/>
-          <p:nvPr/>
-        </p:nvPicPr>
-        <p:blipFill>
-          <a:blip r:embed="rId4">
-            <a:alphaModFix/>
-          </a:blip>
-          <a:stretch>
-            <a:fillRect/>
-          </a:stretch>
-        </p:blipFill>
-        <p:spPr>
-          <a:xfrm>
-            <a:off x="311700" y="1358511"/>
-            <a:ext cx="3482075" cy="3396038"/>
-          </a:xfrm>
-          <a:prstGeom prst="rect">
-            <a:avLst/>
-          </a:prstGeom>
-          <a:noFill/>
-          <a:ln>
-            <a:noFill/>
-          </a:ln>
-        </p:spPr>
-      </p:pic>
-      <p:pic>
-        <p:nvPicPr>
-          <p:cNvPr id="176" name="Google Shape;176;p7"/>
-          <p:cNvPicPr preferRelativeResize="0"/>
-          <p:nvPr/>
-        </p:nvPicPr>
-        <p:blipFill>
-          <a:blip r:embed="rId5">
-            <a:alphaModFix/>
-          </a:blip>
-          <a:stretch>
-            <a:fillRect/>
-          </a:stretch>
-        </p:blipFill>
-        <p:spPr>
-          <a:xfrm>
-            <a:off x="5142725" y="1430747"/>
-            <a:ext cx="2257687" cy="3191203"/>
-          </a:xfrm>
-          <a:prstGeom prst="rect">
-            <a:avLst/>
-          </a:prstGeom>
-          <a:noFill/>
-          <a:ln>
-            <a:noFill/>
-          </a:ln>
-        </p:spPr>
-      </p:pic>
       <p:sp>
         <p:nvSpPr>
-          <p:cNvPr id="177" name="Google Shape;177;p7"/>
-          <p:cNvSpPr/>
-          <p:nvPr/>
-        </p:nvSpPr>
-        <p:spPr>
-          <a:xfrm>
-            <a:off x="7656492" y="574513"/>
-            <a:ext cx="1098600" cy="333000"/>
-          </a:xfrm>
-          <a:prstGeom prst="roundRect">
-            <a:avLst>
-              <a:gd fmla="val 16667" name="adj"/>
-            </a:avLst>
-          </a:prstGeom>
-          <a:solidFill>
-            <a:srgbClr val="F2F2F2"/>
-          </a:solidFill>
-          <a:ln>
-            <a:noFill/>
-          </a:ln>
-        </p:spPr>
-        <p:txBody>
-          <a:bodyPr anchorCtr="0" anchor="ctr" bIns="45700" lIns="91425" spcFirstLastPara="1" rIns="91425" wrap="square" tIns="45700">
-            <a:noAutofit/>
-          </a:bodyPr>
-          <a:lstStyle/>
-          <a:p>
-            <a:pPr indent="0" lvl="0" marL="0" marR="0" rtl="0" algn="ctr">
-              <a:lnSpc>
-                <a:spcPct val="100000"/>
-              </a:lnSpc>
-              <a:spcBef>
-                <a:spcPts val="0"/>
-              </a:spcBef>
-              <a:spcAft>
-                <a:spcPts val="0"/>
-              </a:spcAft>
-              <a:buNone/>
-            </a:pPr>
-            <a:r>
-              <a:t/>
-            </a:r>
-            <a:endParaRPr b="0" i="0" sz="1400" u="none" cap="none" strike="noStrike">
-              <a:solidFill>
-                <a:schemeClr val="lt1"/>
-              </a:solidFill>
-              <a:latin typeface="Arial"/>
-              <a:ea typeface="Arial"/>
-              <a:cs typeface="Arial"/>
-              <a:sym typeface="Arial"/>
-            </a:endParaRPr>
-          </a:p>
-        </p:txBody>
-      </p:sp>
-      <p:sp>
-        <p:nvSpPr>
-          <p:cNvPr id="178" name="Google Shape;178;p7"/>
+          <p:cNvPr id="168" name="Google Shape;168;g3e436c1bcfb_0_2"/>
           <p:cNvSpPr txBox="1"/>
           <p:nvPr/>
         </p:nvSpPr>
         <p:spPr>
           <a:xfrm>
-            <a:off x="7627669" y="617922"/>
-            <a:ext cx="1156200" cy="246300"/>
+            <a:off x="108975" y="1200900"/>
+            <a:ext cx="3000000" cy="3540300"/>
           </a:xfrm>
           <a:prstGeom prst="rect">
             <a:avLst/>
@@ -21610,71 +21210,626 @@
           </a:ln>
         </p:spPr>
         <p:txBody>
-          <a:bodyPr anchorCtr="0" anchor="t" bIns="45700" lIns="91425" spcFirstLastPara="1" rIns="91425" wrap="square" tIns="45700">
+          <a:bodyPr anchorCtr="0" anchor="t" bIns="91425" lIns="91425" spcFirstLastPara="1" rIns="91425" wrap="square" tIns="91425">
             <a:spAutoFit/>
           </a:bodyPr>
           <a:lstStyle/>
           <a:p>
-            <a:pPr indent="0" lvl="0" marL="0" marR="0" rtl="0" algn="ctr">
-              <a:lnSpc>
-                <a:spcPct val="100000"/>
-              </a:lnSpc>
-              <a:spcBef>
-                <a:spcPts val="0"/>
-              </a:spcBef>
-              <a:spcAft>
-                <a:spcPts val="0"/>
-              </a:spcAft>
-              <a:buNone/>
+            <a:pPr indent="-171450" lvl="0" marL="171450" rtl="0" algn="l">
+              <a:spcBef>
+                <a:spcPts val="1200"/>
+              </a:spcBef>
+              <a:spcAft>
+                <a:spcPts val="0"/>
+              </a:spcAft>
+              <a:buClr>
+                <a:schemeClr val="dk1"/>
+              </a:buClr>
+              <a:buSzPts val="1200"/>
+              <a:buChar char="•"/>
             </a:pPr>
             <a:r>
-              <a:rPr b="0" i="0" lang="fr-FR" sz="1000" u="sng" cap="none" strike="noStrike">
-                <a:solidFill>
-                  <a:schemeClr val="hlink"/>
-                </a:solidFill>
-                <a:latin typeface="Arial"/>
-                <a:ea typeface="Arial"/>
-                <a:cs typeface="Arial"/>
-                <a:sym typeface="Arial"/>
-                <a:hlinkClick r:id="rId6"/>
+              <a:rPr b="1" lang="fr-FR" sz="1200">
+                <a:solidFill>
+                  <a:schemeClr val="dk1"/>
+                </a:solidFill>
               </a:rPr>
-              <a:t>Lien Dashboard</a:t>
+              <a:t>T</a:t>
             </a:r>
-            <a:endParaRPr b="0" i="0" sz="800" u="none" cap="none" strike="noStrike">
+            <a:r>
+              <a:rPr b="1" lang="fr-FR" sz="1200">
+                <a:solidFill>
+                  <a:schemeClr val="dk1"/>
+                </a:solidFill>
+              </a:rPr>
+              <a:t>ransaction_events</a:t>
+            </a:r>
+            <a:r>
+              <a:rPr lang="fr-FR" sz="1200">
+                <a:solidFill>
+                  <a:schemeClr val="dk1"/>
+                </a:solidFill>
+              </a:rPr>
+              <a:t>:</a:t>
+            </a:r>
+            <a:endParaRPr sz="1200">
               <a:solidFill>
-                <a:srgbClr val="000000"/>
+                <a:schemeClr val="dk1"/>
               </a:solidFill>
-              <a:latin typeface="Arial"/>
-              <a:ea typeface="Arial"/>
-              <a:cs typeface="Arial"/>
-              <a:sym typeface="Arial"/>
+            </a:endParaRPr>
+          </a:p>
+          <a:p>
+            <a:pPr indent="-304800" lvl="1" marL="495000" rtl="0" algn="l">
+              <a:spcBef>
+                <a:spcPts val="1200"/>
+              </a:spcBef>
+              <a:spcAft>
+                <a:spcPts val="0"/>
+              </a:spcAft>
+              <a:buClr>
+                <a:schemeClr val="dk1"/>
+              </a:buClr>
+              <a:buSzPts val="1200"/>
+              <a:buChar char="○"/>
+            </a:pPr>
+            <a:r>
+              <a:rPr lang="fr-FR" sz="1200">
+                <a:solidFill>
+                  <a:schemeClr val="dk1"/>
+                </a:solidFill>
+              </a:rPr>
+              <a:t>(embedded device + fraud signals): reference entities (customer and merchants) and embed small context (rate at transaction, device, geo, fraud_signals, etc.)</a:t>
+            </a:r>
+            <a:endParaRPr sz="1200">
+              <a:solidFill>
+                <a:schemeClr val="dk1"/>
+              </a:solidFill>
+            </a:endParaRPr>
+          </a:p>
+          <a:p>
+            <a:pPr indent="-171450" lvl="0" marL="171450" rtl="0" algn="l">
+              <a:spcBef>
+                <a:spcPts val="1200"/>
+              </a:spcBef>
+              <a:spcAft>
+                <a:spcPts val="0"/>
+              </a:spcAft>
+              <a:buClr>
+                <a:schemeClr val="dk1"/>
+              </a:buClr>
+              <a:buSzPts val="1200"/>
+              <a:buChar char="•"/>
+            </a:pPr>
+            <a:r>
+              <a:rPr b="1" lang="fr-FR" sz="1200">
+                <a:solidFill>
+                  <a:schemeClr val="dk1"/>
+                </a:solidFill>
+              </a:rPr>
+              <a:t>Customer_profiles</a:t>
+            </a:r>
+            <a:r>
+              <a:rPr lang="fr-FR" sz="1200">
+                <a:solidFill>
+                  <a:schemeClr val="dk1"/>
+                </a:solidFill>
+              </a:rPr>
+              <a:t>:</a:t>
+            </a:r>
+            <a:endParaRPr sz="1200">
+              <a:solidFill>
+                <a:schemeClr val="dk1"/>
+              </a:solidFill>
+            </a:endParaRPr>
+          </a:p>
+          <a:p>
+            <a:pPr indent="-304800" lvl="1" marL="495000" rtl="0" algn="l">
+              <a:spcBef>
+                <a:spcPts val="1200"/>
+              </a:spcBef>
+              <a:spcAft>
+                <a:spcPts val="0"/>
+              </a:spcAft>
+              <a:buClr>
+                <a:schemeClr val="dk1"/>
+              </a:buClr>
+              <a:buSzPts val="1200"/>
+              <a:buChar char="○"/>
+            </a:pPr>
+            <a:r>
+              <a:rPr lang="fr-FR" sz="1200">
+                <a:solidFill>
+                  <a:schemeClr val="dk1"/>
+                </a:solidFill>
+              </a:rPr>
+              <a:t>embedded, updated by ML pipeline</a:t>
+            </a:r>
+            <a:endParaRPr sz="1200">
+              <a:solidFill>
+                <a:schemeClr val="dk1"/>
+              </a:solidFill>
+            </a:endParaRPr>
+          </a:p>
+          <a:p>
+            <a:pPr indent="-171450" lvl="0" marL="171450" rtl="0" algn="l">
+              <a:spcBef>
+                <a:spcPts val="1200"/>
+              </a:spcBef>
+              <a:spcAft>
+                <a:spcPts val="0"/>
+              </a:spcAft>
+              <a:buClr>
+                <a:schemeClr val="dk1"/>
+              </a:buClr>
+              <a:buSzPts val="1200"/>
+              <a:buChar char="•"/>
+            </a:pPr>
+            <a:r>
+              <a:rPr b="1" lang="fr-FR" sz="1200">
+                <a:solidFill>
+                  <a:schemeClr val="dk1"/>
+                </a:solidFill>
+              </a:rPr>
+              <a:t>User_sessions</a:t>
+            </a:r>
+            <a:r>
+              <a:rPr lang="fr-FR" sz="1200">
+                <a:solidFill>
+                  <a:schemeClr val="dk1"/>
+                </a:solidFill>
+              </a:rPr>
+              <a:t>:</a:t>
+            </a:r>
+            <a:endParaRPr sz="1200">
+              <a:solidFill>
+                <a:schemeClr val="dk1"/>
+              </a:solidFill>
+            </a:endParaRPr>
+          </a:p>
+          <a:p>
+            <a:pPr indent="-304800" lvl="1" marL="495000" rtl="0" algn="l">
+              <a:spcBef>
+                <a:spcPts val="1200"/>
+              </a:spcBef>
+              <a:spcAft>
+                <a:spcPts val="0"/>
+              </a:spcAft>
+              <a:buClr>
+                <a:schemeClr val="dk1"/>
+              </a:buClr>
+              <a:buSzPts val="1200"/>
+              <a:buChar char="○"/>
+            </a:pPr>
+            <a:r>
+              <a:rPr lang="fr-FR" sz="1200">
+                <a:solidFill>
+                  <a:schemeClr val="dk1"/>
+                </a:solidFill>
+              </a:rPr>
+              <a:t>Embed events, reference session chain, create new child document when even_count hits 100</a:t>
+            </a:r>
+            <a:endParaRPr sz="1200">
+              <a:solidFill>
+                <a:schemeClr val="dk1"/>
+              </a:solidFill>
+            </a:endParaRPr>
+          </a:p>
+        </p:txBody>
+      </p:sp>
+      <p:sp>
+        <p:nvSpPr>
+          <p:cNvPr id="169" name="Google Shape;169;g3e436c1bcfb_0_2"/>
+          <p:cNvSpPr txBox="1"/>
+          <p:nvPr/>
+        </p:nvSpPr>
+        <p:spPr>
+          <a:xfrm>
+            <a:off x="3108975" y="1200900"/>
+            <a:ext cx="3000000" cy="2124000"/>
+          </a:xfrm>
+          <a:prstGeom prst="rect">
+            <a:avLst/>
+          </a:prstGeom>
+          <a:noFill/>
+          <a:ln>
+            <a:noFill/>
+          </a:ln>
+        </p:spPr>
+        <p:txBody>
+          <a:bodyPr anchorCtr="0" anchor="t" bIns="91425" lIns="91425" spcFirstLastPara="1" rIns="91425" wrap="square" tIns="91425">
+            <a:spAutoFit/>
+          </a:bodyPr>
+          <a:lstStyle/>
+          <a:p>
+            <a:pPr indent="-171450" lvl="0" marL="171450" rtl="0" algn="l">
+              <a:spcBef>
+                <a:spcPts val="1200"/>
+              </a:spcBef>
+              <a:spcAft>
+                <a:spcPts val="0"/>
+              </a:spcAft>
+              <a:buClr>
+                <a:schemeClr val="dk1"/>
+              </a:buClr>
+              <a:buSzPts val="1200"/>
+              <a:buChar char="•"/>
+            </a:pPr>
+            <a:r>
+              <a:rPr b="1" lang="fr-FR" sz="1200">
+                <a:solidFill>
+                  <a:schemeClr val="dk1"/>
+                </a:solidFill>
+              </a:rPr>
+              <a:t>ml_features</a:t>
+            </a:r>
+            <a:r>
+              <a:rPr lang="fr-FR" sz="1200">
+                <a:solidFill>
+                  <a:schemeClr val="dk1"/>
+                </a:solidFill>
+              </a:rPr>
+              <a:t>:</a:t>
+            </a:r>
+            <a:endParaRPr sz="1200">
+              <a:solidFill>
+                <a:schemeClr val="dk1"/>
+              </a:solidFill>
+            </a:endParaRPr>
+          </a:p>
+          <a:p>
+            <a:pPr indent="-304800" lvl="1" marL="495000" rtl="0" algn="l">
+              <a:spcBef>
+                <a:spcPts val="1200"/>
+              </a:spcBef>
+              <a:spcAft>
+                <a:spcPts val="0"/>
+              </a:spcAft>
+              <a:buClr>
+                <a:schemeClr val="dk1"/>
+              </a:buClr>
+              <a:buSzPts val="1200"/>
+              <a:buChar char="○"/>
+            </a:pPr>
+            <a:r>
+              <a:rPr lang="fr-FR" sz="1200">
+                <a:solidFill>
+                  <a:schemeClr val="dk1"/>
+                </a:solidFill>
+              </a:rPr>
+              <a:t>embedded features, reference to prior versions</a:t>
+            </a:r>
+            <a:endParaRPr sz="1200">
+              <a:solidFill>
+                <a:schemeClr val="dk1"/>
+              </a:solidFill>
+            </a:endParaRPr>
+          </a:p>
+          <a:p>
+            <a:pPr indent="-171450" lvl="0" marL="171450" rtl="0" algn="l">
+              <a:spcBef>
+                <a:spcPts val="1200"/>
+              </a:spcBef>
+              <a:spcAft>
+                <a:spcPts val="0"/>
+              </a:spcAft>
+              <a:buClr>
+                <a:schemeClr val="dk1"/>
+              </a:buClr>
+              <a:buSzPts val="1200"/>
+              <a:buChar char="•"/>
+            </a:pPr>
+            <a:r>
+              <a:rPr b="1" lang="fr-FR" sz="1200">
+                <a:solidFill>
+                  <a:schemeClr val="dk1"/>
+                </a:solidFill>
+              </a:rPr>
+              <a:t>audit_log</a:t>
+            </a:r>
+            <a:r>
+              <a:rPr lang="fr-FR" sz="1200">
+                <a:solidFill>
+                  <a:schemeClr val="dk1"/>
+                </a:solidFill>
+              </a:rPr>
+              <a:t>:</a:t>
+            </a:r>
+            <a:endParaRPr sz="1200">
+              <a:solidFill>
+                <a:schemeClr val="dk1"/>
+              </a:solidFill>
+            </a:endParaRPr>
+          </a:p>
+          <a:p>
+            <a:pPr indent="-304800" lvl="1" marL="495000" rtl="0" algn="l">
+              <a:spcBef>
+                <a:spcPts val="1200"/>
+              </a:spcBef>
+              <a:spcAft>
+                <a:spcPts val="0"/>
+              </a:spcAft>
+              <a:buClr>
+                <a:schemeClr val="dk1"/>
+              </a:buClr>
+              <a:buSzPts val="1200"/>
+              <a:buChar char="○"/>
+            </a:pPr>
+            <a:r>
+              <a:rPr lang="fr-FR" sz="1200">
+                <a:solidFill>
+                  <a:schemeClr val="dk1"/>
+                </a:solidFill>
+              </a:rPr>
+              <a:t>Fully embedded, with before/after state of transaction, and a TTL to suppress the log after X days in MongoDB and push it to S3</a:t>
+            </a:r>
+            <a:endParaRPr sz="1200">
+              <a:solidFill>
+                <a:schemeClr val="dk1"/>
+              </a:solidFill>
+            </a:endParaRPr>
+          </a:p>
+        </p:txBody>
+      </p:sp>
+      <p:sp>
+        <p:nvSpPr>
+          <p:cNvPr id="170" name="Google Shape;170;g3e436c1bcfb_0_2"/>
+          <p:cNvSpPr txBox="1"/>
+          <p:nvPr/>
+        </p:nvSpPr>
+        <p:spPr>
+          <a:xfrm>
+            <a:off x="6280625" y="1313650"/>
+            <a:ext cx="2863500" cy="3324600"/>
+          </a:xfrm>
+          <a:prstGeom prst="rect">
+            <a:avLst/>
+          </a:prstGeom>
+          <a:noFill/>
+          <a:ln>
+            <a:noFill/>
+          </a:ln>
+        </p:spPr>
+        <p:txBody>
+          <a:bodyPr anchorCtr="0" anchor="t" bIns="91425" lIns="91425" spcFirstLastPara="1" rIns="91425" wrap="square" tIns="91425">
+            <a:spAutoFit/>
+          </a:bodyPr>
+          <a:lstStyle/>
+          <a:p>
+            <a:pPr indent="-171450" lvl="0" marL="171450" rtl="0" algn="l">
+              <a:spcBef>
+                <a:spcPts val="1200"/>
+              </a:spcBef>
+              <a:spcAft>
+                <a:spcPts val="0"/>
+              </a:spcAft>
+              <a:buClr>
+                <a:schemeClr val="dk1"/>
+              </a:buClr>
+              <a:buSzPts val="1200"/>
+              <a:buChar char="•"/>
+            </a:pPr>
+            <a:r>
+              <a:rPr b="1" lang="fr-FR" sz="1200">
+                <a:solidFill>
+                  <a:schemeClr val="dk1"/>
+                </a:solidFill>
+              </a:rPr>
+              <a:t>Transaction_events, Customer_profiles, User_sessions</a:t>
+            </a:r>
+            <a:r>
+              <a:rPr lang="fr-FR" sz="1200">
+                <a:solidFill>
+                  <a:schemeClr val="dk1"/>
+                </a:solidFill>
+              </a:rPr>
+              <a:t>:</a:t>
+            </a:r>
+            <a:endParaRPr sz="1200">
+              <a:solidFill>
+                <a:schemeClr val="dk1"/>
+              </a:solidFill>
+            </a:endParaRPr>
+          </a:p>
+          <a:p>
+            <a:pPr indent="-304800" lvl="1" marL="495000" rtl="0" algn="l">
+              <a:spcBef>
+                <a:spcPts val="1200"/>
+              </a:spcBef>
+              <a:spcAft>
+                <a:spcPts val="0"/>
+              </a:spcAft>
+              <a:buClr>
+                <a:schemeClr val="dk1"/>
+              </a:buClr>
+              <a:buSzPts val="1200"/>
+              <a:buChar char="○"/>
+            </a:pPr>
+            <a:r>
+              <a:rPr lang="fr-FR" sz="1200">
+                <a:solidFill>
+                  <a:schemeClr val="dk1"/>
+                </a:solidFill>
+              </a:rPr>
+              <a:t>Transaction data collected and used for requests</a:t>
+            </a:r>
+            <a:endParaRPr sz="1200">
+              <a:solidFill>
+                <a:schemeClr val="dk1"/>
+              </a:solidFill>
+            </a:endParaRPr>
+          </a:p>
+          <a:p>
+            <a:pPr indent="-171450" lvl="0" marL="171450" rtl="0" algn="l">
+              <a:spcBef>
+                <a:spcPts val="1200"/>
+              </a:spcBef>
+              <a:spcAft>
+                <a:spcPts val="0"/>
+              </a:spcAft>
+              <a:buClr>
+                <a:schemeClr val="dk1"/>
+              </a:buClr>
+              <a:buSzPts val="1200"/>
+              <a:buChar char="•"/>
+            </a:pPr>
+            <a:r>
+              <a:rPr b="1" lang="fr-FR" sz="1200">
+                <a:solidFill>
+                  <a:schemeClr val="dk1"/>
+                </a:solidFill>
+              </a:rPr>
+              <a:t>Ml_features</a:t>
+            </a:r>
+            <a:r>
+              <a:rPr lang="fr-FR" sz="1200">
+                <a:solidFill>
+                  <a:schemeClr val="dk1"/>
+                </a:solidFill>
+              </a:rPr>
+              <a:t>:</a:t>
+            </a:r>
+            <a:endParaRPr sz="1200">
+              <a:solidFill>
+                <a:schemeClr val="dk1"/>
+              </a:solidFill>
+            </a:endParaRPr>
+          </a:p>
+          <a:p>
+            <a:pPr indent="-304800" lvl="1" marL="495000" rtl="0" algn="l">
+              <a:spcBef>
+                <a:spcPts val="1200"/>
+              </a:spcBef>
+              <a:spcAft>
+                <a:spcPts val="0"/>
+              </a:spcAft>
+              <a:buClr>
+                <a:schemeClr val="dk1"/>
+              </a:buClr>
+              <a:buSzPts val="1200"/>
+              <a:buChar char="○"/>
+            </a:pPr>
+            <a:r>
+              <a:rPr lang="fr-FR" sz="1200">
+                <a:solidFill>
+                  <a:schemeClr val="dk1"/>
+                </a:solidFill>
+              </a:rPr>
+              <a:t>Collect the features used for machine learning</a:t>
+            </a:r>
+            <a:endParaRPr sz="1200">
+              <a:solidFill>
+                <a:schemeClr val="dk1"/>
+              </a:solidFill>
+            </a:endParaRPr>
+          </a:p>
+          <a:p>
+            <a:pPr indent="-171450" lvl="0" marL="171450" rtl="0" algn="l">
+              <a:spcBef>
+                <a:spcPts val="1200"/>
+              </a:spcBef>
+              <a:spcAft>
+                <a:spcPts val="0"/>
+              </a:spcAft>
+              <a:buClr>
+                <a:schemeClr val="dk1"/>
+              </a:buClr>
+              <a:buSzPts val="1200"/>
+              <a:buChar char="•"/>
+            </a:pPr>
+            <a:r>
+              <a:rPr b="1" lang="fr-FR" sz="1200">
+                <a:solidFill>
+                  <a:schemeClr val="dk1"/>
+                </a:solidFill>
+              </a:rPr>
+              <a:t>Audit_log</a:t>
+            </a:r>
+            <a:r>
+              <a:rPr lang="fr-FR" sz="1200">
+                <a:solidFill>
+                  <a:schemeClr val="dk1"/>
+                </a:solidFill>
+              </a:rPr>
+              <a:t>:</a:t>
+            </a:r>
+            <a:endParaRPr sz="1200">
+              <a:solidFill>
+                <a:schemeClr val="dk1"/>
+              </a:solidFill>
+            </a:endParaRPr>
+          </a:p>
+          <a:p>
+            <a:pPr indent="-304800" lvl="1" marL="495000" rtl="0" algn="l">
+              <a:spcBef>
+                <a:spcPts val="1200"/>
+              </a:spcBef>
+              <a:spcAft>
+                <a:spcPts val="0"/>
+              </a:spcAft>
+              <a:buClr>
+                <a:schemeClr val="dk1"/>
+              </a:buClr>
+              <a:buSzPts val="1200"/>
+              <a:buChar char="○"/>
+            </a:pPr>
+            <a:r>
+              <a:rPr lang="fr-FR" sz="1200">
+                <a:solidFill>
+                  <a:schemeClr val="dk1"/>
+                </a:solidFill>
+              </a:rPr>
+              <a:t>Record the transactions for further audits. </a:t>
+            </a:r>
+            <a:endParaRPr sz="1200">
+              <a:solidFill>
+                <a:schemeClr val="dk1"/>
+              </a:solidFill>
+            </a:endParaRPr>
+          </a:p>
+          <a:p>
+            <a:pPr indent="0" lvl="0" marL="0" rtl="0" algn="l">
+              <a:spcBef>
+                <a:spcPts val="1200"/>
+              </a:spcBef>
+              <a:spcAft>
+                <a:spcPts val="0"/>
+              </a:spcAft>
+              <a:buNone/>
+            </a:pPr>
+            <a:r>
+              <a:t/>
+            </a:r>
+            <a:endParaRPr sz="1200">
+              <a:solidFill>
+                <a:schemeClr val="dk1"/>
+              </a:solidFill>
             </a:endParaRPr>
           </a:p>
         </p:txBody>
       </p:sp>
       <p:cxnSp>
         <p:nvCxnSpPr>
-          <p:cNvPr id="179" name="Google Shape;179;p7"/>
+          <p:cNvPr id="171" name="Google Shape;171;g3e436c1bcfb_0_2"/>
           <p:cNvCxnSpPr/>
           <p:nvPr/>
         </p:nvCxnSpPr>
         <p:spPr>
-          <a:xfrm>
-            <a:off x="7057808" y="745009"/>
-            <a:ext cx="570000" cy="0"/>
+          <a:xfrm flipH="1">
+            <a:off x="6181050" y="1174475"/>
+            <a:ext cx="5700" cy="3665100"/>
           </a:xfrm>
           <a:prstGeom prst="straightConnector1">
             <a:avLst/>
           </a:prstGeom>
           <a:noFill/>
-          <a:ln cap="flat" cmpd="sng" w="76200">
+          <a:ln cap="flat" cmpd="sng" w="28575">
             <a:solidFill>
-              <a:srgbClr val="FFC000"/>
+              <a:srgbClr val="00DBD0"/>
             </a:solidFill>
             <a:prstDash val="solid"/>
             <a:round/>
-            <a:headEnd len="sm" w="sm" type="none"/>
-            <a:tailEnd len="med" w="med" type="triangle"/>
+            <a:headEnd len="med" w="med" type="none"/>
+            <a:tailEnd len="med" w="med" type="none"/>
           </a:ln>
         </p:spPr>
       </p:cxnSp>
@@ -21691,7 +21846,7 @@
   <p:cSld>
     <p:spTree>
       <p:nvGrpSpPr>
-        <p:cNvPr id="183" name="Shape 183"/>
+        <p:cNvPr id="175" name="Shape 175"/>
         <p:cNvGrpSpPr/>
         <p:nvPr/>
       </p:nvGrpSpPr>
@@ -21705,7 +21860,7 @@
       </p:grpSpPr>
       <p:sp>
         <p:nvSpPr>
-          <p:cNvPr id="184" name="Google Shape;184;p12"/>
+          <p:cNvPr id="176" name="Google Shape;176;g3e3a03c189e_0_28"/>
           <p:cNvSpPr txBox="1"/>
           <p:nvPr>
             <p:ph idx="4294967295" type="ctrTitle"/>
@@ -21757,7 +21912,7 @@
                 <a:cs typeface="Inter SemiBold"/>
                 <a:sym typeface="Inter SemiBold"/>
               </a:rPr>
-              <a:t>Conclusion</a:t>
+              <a:t>Data flows</a:t>
             </a:r>
             <a:endParaRPr b="0" i="0" sz="2500" u="none" cap="none" strike="noStrike">
               <a:solidFill>
@@ -21771,68 +21926,9 @@
           </a:p>
         </p:txBody>
       </p:sp>
-      <p:sp>
-        <p:nvSpPr>
-          <p:cNvPr id="185" name="Google Shape;185;p12"/>
-          <p:cNvSpPr/>
-          <p:nvPr/>
-        </p:nvSpPr>
-        <p:spPr>
-          <a:xfrm>
-            <a:off x="10225" y="4892025"/>
-            <a:ext cx="9144000" cy="251400"/>
-          </a:xfrm>
-          <a:prstGeom prst="rect">
-            <a:avLst/>
-          </a:prstGeom>
-          <a:solidFill>
-            <a:srgbClr val="C3FFFC"/>
-          </a:solidFill>
-          <a:ln>
-            <a:noFill/>
-          </a:ln>
-        </p:spPr>
-        <p:txBody>
-          <a:bodyPr anchorCtr="0" anchor="ctr" bIns="91425" lIns="91425" spcFirstLastPara="1" rIns="91425" wrap="square" tIns="91425">
-            <a:noAutofit/>
-          </a:bodyPr>
-          <a:lstStyle/>
-          <a:p>
-            <a:pPr indent="0" lvl="0" marL="0" marR="0" rtl="0" algn="l">
-              <a:lnSpc>
-                <a:spcPct val="100000"/>
-              </a:lnSpc>
-              <a:spcBef>
-                <a:spcPts val="0"/>
-              </a:spcBef>
-              <a:spcAft>
-                <a:spcPts val="0"/>
-              </a:spcAft>
-              <a:buClr>
-                <a:srgbClr val="000000"/>
-              </a:buClr>
-              <a:buSzPts val="1400"/>
-              <a:buFont typeface="Arial"/>
-              <a:buNone/>
-            </a:pPr>
-            <a:r>
-              <a:t/>
-            </a:r>
-            <a:endParaRPr b="0" i="0" sz="1400" u="none" cap="none" strike="noStrike">
-              <a:solidFill>
-                <a:srgbClr val="000000"/>
-              </a:solidFill>
-              <a:latin typeface="Arial"/>
-              <a:ea typeface="Arial"/>
-              <a:cs typeface="Arial"/>
-              <a:sym typeface="Arial"/>
-            </a:endParaRPr>
-          </a:p>
-        </p:txBody>
-      </p:sp>
       <p:pic>
         <p:nvPicPr>
-          <p:cNvPr id="186" name="Google Shape;186;p12"/>
+          <p:cNvPr id="177" name="Google Shape;177;g3e3a03c189e_0_28"/>
           <p:cNvPicPr preferRelativeResize="0"/>
           <p:nvPr/>
         </p:nvPicPr>
@@ -21859,7 +21955,1227 @@
       </p:pic>
       <p:sp>
         <p:nvSpPr>
-          <p:cNvPr id="187" name="Google Shape;187;p12"/>
+          <p:cNvPr id="178" name="Google Shape;178;g3e3a03c189e_0_28"/>
+          <p:cNvSpPr/>
+          <p:nvPr/>
+        </p:nvSpPr>
+        <p:spPr>
+          <a:xfrm>
+            <a:off x="10225" y="4892025"/>
+            <a:ext cx="9144000" cy="251400"/>
+          </a:xfrm>
+          <a:prstGeom prst="rect">
+            <a:avLst/>
+          </a:prstGeom>
+          <a:solidFill>
+            <a:srgbClr val="C3FFFC"/>
+          </a:solidFill>
+          <a:ln>
+            <a:noFill/>
+          </a:ln>
+        </p:spPr>
+        <p:txBody>
+          <a:bodyPr anchorCtr="0" anchor="ctr" bIns="91425" lIns="91425" spcFirstLastPara="1" rIns="91425" wrap="square" tIns="91425">
+            <a:noAutofit/>
+          </a:bodyPr>
+          <a:lstStyle/>
+          <a:p>
+            <a:pPr indent="0" lvl="0" marL="0" marR="0" rtl="0" algn="l">
+              <a:lnSpc>
+                <a:spcPct val="100000"/>
+              </a:lnSpc>
+              <a:spcBef>
+                <a:spcPts val="0"/>
+              </a:spcBef>
+              <a:spcAft>
+                <a:spcPts val="0"/>
+              </a:spcAft>
+              <a:buClr>
+                <a:srgbClr val="000000"/>
+              </a:buClr>
+              <a:buSzPts val="1400"/>
+              <a:buFont typeface="Arial"/>
+              <a:buNone/>
+            </a:pPr>
+            <a:r>
+              <a:t/>
+            </a:r>
+            <a:endParaRPr b="0" i="0" sz="1400" u="none" cap="none" strike="noStrike">
+              <a:solidFill>
+                <a:srgbClr val="000000"/>
+              </a:solidFill>
+              <a:latin typeface="Arial"/>
+              <a:ea typeface="Arial"/>
+              <a:cs typeface="Arial"/>
+              <a:sym typeface="Arial"/>
+            </a:endParaRPr>
+          </a:p>
+        </p:txBody>
+      </p:sp>
+      <p:sp>
+        <p:nvSpPr>
+          <p:cNvPr id="179" name="Google Shape;179;g3e3a03c189e_0_28"/>
+          <p:cNvSpPr txBox="1"/>
+          <p:nvPr/>
+        </p:nvSpPr>
+        <p:spPr>
+          <a:xfrm>
+            <a:off x="1192664" y="779179"/>
+            <a:ext cx="5315100" cy="375900"/>
+          </a:xfrm>
+          <a:prstGeom prst="rect">
+            <a:avLst/>
+          </a:prstGeom>
+          <a:noFill/>
+          <a:ln>
+            <a:noFill/>
+          </a:ln>
+        </p:spPr>
+        <p:txBody>
+          <a:bodyPr anchorCtr="0" anchor="t" bIns="91425" lIns="91425" spcFirstLastPara="1" rIns="91425" wrap="square" tIns="91425">
+            <a:noAutofit/>
+          </a:bodyPr>
+          <a:lstStyle/>
+          <a:p>
+            <a:pPr indent="0" lvl="0" marL="0" marR="0" rtl="0" algn="l">
+              <a:lnSpc>
+                <a:spcPct val="100000"/>
+              </a:lnSpc>
+              <a:spcBef>
+                <a:spcPts val="0"/>
+              </a:spcBef>
+              <a:spcAft>
+                <a:spcPts val="0"/>
+              </a:spcAft>
+              <a:buClr>
+                <a:schemeClr val="dk1"/>
+              </a:buClr>
+              <a:buSzPts val="2800"/>
+              <a:buFont typeface="Arial"/>
+              <a:buNone/>
+            </a:pPr>
+            <a:r>
+              <a:rPr b="1" lang="fr-FR">
+                <a:solidFill>
+                  <a:srgbClr val="0E3449"/>
+                </a:solidFill>
+                <a:latin typeface="Inter SemiBold"/>
+                <a:ea typeface="Inter SemiBold"/>
+                <a:cs typeface="Inter SemiBold"/>
+                <a:sym typeface="Inter SemiBold"/>
+              </a:rPr>
+              <a:t>Kafka streaming from OLTP</a:t>
+            </a:r>
+            <a:endParaRPr b="1" i="0" sz="1400" u="none" cap="none" strike="noStrike">
+              <a:solidFill>
+                <a:srgbClr val="0E3449"/>
+              </a:solidFill>
+              <a:latin typeface="Inter SemiBold"/>
+              <a:ea typeface="Inter SemiBold"/>
+              <a:cs typeface="Inter SemiBold"/>
+              <a:sym typeface="Inter SemiBold"/>
+            </a:endParaRPr>
+          </a:p>
+        </p:txBody>
+      </p:sp>
+      <p:sp>
+        <p:nvSpPr>
+          <p:cNvPr id="180" name="Google Shape;180;g3e3a03c189e_0_28"/>
+          <p:cNvSpPr txBox="1"/>
+          <p:nvPr>
+            <p:ph idx="12" type="sldNum"/>
+          </p:nvPr>
+        </p:nvSpPr>
+        <p:spPr>
+          <a:xfrm>
+            <a:off x="8472458" y="4939381"/>
+            <a:ext cx="548700" cy="153900"/>
+          </a:xfrm>
+          <a:prstGeom prst="rect">
+            <a:avLst/>
+          </a:prstGeom>
+          <a:noFill/>
+          <a:ln>
+            <a:noFill/>
+          </a:ln>
+        </p:spPr>
+        <p:txBody>
+          <a:bodyPr anchorCtr="0" anchor="ctr" bIns="0" lIns="0" spcFirstLastPara="1" rIns="0" wrap="square" tIns="0">
+            <a:spAutoFit/>
+          </a:bodyPr>
+          <a:lstStyle/>
+          <a:p>
+            <a:pPr indent="0" lvl="0" marL="0" rtl="0" algn="r">
+              <a:lnSpc>
+                <a:spcPct val="100000"/>
+              </a:lnSpc>
+              <a:spcBef>
+                <a:spcPts val="0"/>
+              </a:spcBef>
+              <a:spcAft>
+                <a:spcPts val="0"/>
+              </a:spcAft>
+              <a:buSzPts val="1000"/>
+              <a:buNone/>
+            </a:pPr>
+            <a:fld id="{00000000-1234-1234-1234-123412341234}" type="slidenum">
+              <a:rPr lang="fr-FR"/>
+              <a:t>‹#›</a:t>
+            </a:fld>
+            <a:endParaRPr/>
+          </a:p>
+        </p:txBody>
+      </p:sp>
+      <p:pic>
+        <p:nvPicPr>
+          <p:cNvPr id="181" name="Google Shape;181;g3e3a03c189e_0_28"/>
+          <p:cNvPicPr preferRelativeResize="0"/>
+          <p:nvPr/>
+        </p:nvPicPr>
+        <p:blipFill>
+          <a:blip r:embed="rId4">
+            <a:alphaModFix/>
+          </a:blip>
+          <a:stretch>
+            <a:fillRect/>
+          </a:stretch>
+        </p:blipFill>
+        <p:spPr>
+          <a:xfrm>
+            <a:off x="146725" y="1164317"/>
+            <a:ext cx="4448009" cy="3432145"/>
+          </a:xfrm>
+          <a:prstGeom prst="rect">
+            <a:avLst/>
+          </a:prstGeom>
+          <a:noFill/>
+          <a:ln>
+            <a:noFill/>
+          </a:ln>
+        </p:spPr>
+      </p:pic>
+      <p:pic>
+        <p:nvPicPr>
+          <p:cNvPr id="182" name="Google Shape;182;g3e3a03c189e_0_28"/>
+          <p:cNvPicPr preferRelativeResize="0"/>
+          <p:nvPr/>
+        </p:nvPicPr>
+        <p:blipFill>
+          <a:blip r:embed="rId5">
+            <a:alphaModFix/>
+          </a:blip>
+          <a:stretch>
+            <a:fillRect/>
+          </a:stretch>
+        </p:blipFill>
+        <p:spPr>
+          <a:xfrm>
+            <a:off x="146725" y="4652400"/>
+            <a:ext cx="4448000" cy="179291"/>
+          </a:xfrm>
+          <a:prstGeom prst="rect">
+            <a:avLst/>
+          </a:prstGeom>
+          <a:noFill/>
+          <a:ln>
+            <a:noFill/>
+          </a:ln>
+        </p:spPr>
+      </p:pic>
+      <p:sp>
+        <p:nvSpPr>
+          <p:cNvPr id="183" name="Google Shape;183;g3e3a03c189e_0_28"/>
+          <p:cNvSpPr txBox="1"/>
+          <p:nvPr/>
+        </p:nvSpPr>
+        <p:spPr>
+          <a:xfrm>
+            <a:off x="4943775" y="1164325"/>
+            <a:ext cx="4077300" cy="3632700"/>
+          </a:xfrm>
+          <a:prstGeom prst="rect">
+            <a:avLst/>
+          </a:prstGeom>
+          <a:noFill/>
+          <a:ln>
+            <a:noFill/>
+          </a:ln>
+        </p:spPr>
+        <p:txBody>
+          <a:bodyPr anchorCtr="0" anchor="t" bIns="91425" lIns="91425" spcFirstLastPara="1" rIns="91425" wrap="square" tIns="91425">
+            <a:spAutoFit/>
+          </a:bodyPr>
+          <a:lstStyle/>
+          <a:p>
+            <a:pPr indent="-171450" lvl="0" marL="171450" rtl="0" algn="l">
+              <a:spcBef>
+                <a:spcPts val="1200"/>
+              </a:spcBef>
+              <a:spcAft>
+                <a:spcPts val="0"/>
+              </a:spcAft>
+              <a:buClr>
+                <a:schemeClr val="dk1"/>
+              </a:buClr>
+              <a:buSzPts val="1200"/>
+              <a:buChar char="•"/>
+            </a:pPr>
+            <a:r>
+              <a:rPr b="1" lang="fr-FR" sz="1200">
+                <a:solidFill>
+                  <a:schemeClr val="dk1"/>
+                </a:solidFill>
+              </a:rPr>
+              <a:t>NoSQL stream:</a:t>
+            </a:r>
+            <a:endParaRPr b="1" sz="1200">
+              <a:solidFill>
+                <a:schemeClr val="dk1"/>
+              </a:solidFill>
+            </a:endParaRPr>
+          </a:p>
+          <a:p>
+            <a:pPr indent="-304800" lvl="1" marL="495000" rtl="0" algn="l">
+              <a:spcBef>
+                <a:spcPts val="1200"/>
+              </a:spcBef>
+              <a:spcAft>
+                <a:spcPts val="0"/>
+              </a:spcAft>
+              <a:buClr>
+                <a:schemeClr val="dk1"/>
+              </a:buClr>
+              <a:buSzPts val="1200"/>
+              <a:buChar char="○"/>
+            </a:pPr>
+            <a:r>
+              <a:rPr lang="fr-FR" sz="1200">
+                <a:solidFill>
+                  <a:schemeClr val="dk1"/>
+                </a:solidFill>
+              </a:rPr>
+              <a:t>Fills the NoSQL collections</a:t>
+            </a:r>
+            <a:endParaRPr sz="1200">
+              <a:solidFill>
+                <a:schemeClr val="dk1"/>
+              </a:solidFill>
+            </a:endParaRPr>
+          </a:p>
+          <a:p>
+            <a:pPr indent="-171450" lvl="0" marL="171450" rtl="0" algn="l">
+              <a:spcBef>
+                <a:spcPts val="1200"/>
+              </a:spcBef>
+              <a:spcAft>
+                <a:spcPts val="0"/>
+              </a:spcAft>
+              <a:buClr>
+                <a:schemeClr val="dk1"/>
+              </a:buClr>
+              <a:buSzPts val="1200"/>
+              <a:buChar char="•"/>
+            </a:pPr>
+            <a:r>
+              <a:rPr b="1" lang="fr-FR" sz="1200">
+                <a:solidFill>
+                  <a:schemeClr val="dk1"/>
+                </a:solidFill>
+              </a:rPr>
+              <a:t>OLAP stream</a:t>
+            </a:r>
+            <a:r>
+              <a:rPr lang="fr-FR" sz="1200">
+                <a:solidFill>
+                  <a:schemeClr val="dk1"/>
+                </a:solidFill>
+              </a:rPr>
+              <a:t>:</a:t>
+            </a:r>
+            <a:endParaRPr sz="1200">
+              <a:solidFill>
+                <a:schemeClr val="dk1"/>
+              </a:solidFill>
+            </a:endParaRPr>
+          </a:p>
+          <a:p>
+            <a:pPr indent="-304800" lvl="1" marL="495000" rtl="0" algn="l">
+              <a:spcBef>
+                <a:spcPts val="1200"/>
+              </a:spcBef>
+              <a:spcAft>
+                <a:spcPts val="0"/>
+              </a:spcAft>
+              <a:buClr>
+                <a:schemeClr val="dk1"/>
+              </a:buClr>
+              <a:buSzPts val="1200"/>
+              <a:buChar char="○"/>
+            </a:pPr>
+            <a:r>
+              <a:rPr lang="fr-FR" sz="1200">
+                <a:solidFill>
+                  <a:schemeClr val="dk1"/>
+                </a:solidFill>
+              </a:rPr>
+              <a:t>Update the OLAP table and generate the views (daily, monthly)</a:t>
+            </a:r>
+            <a:endParaRPr sz="1200">
+              <a:solidFill>
+                <a:schemeClr val="dk1"/>
+              </a:solidFill>
+            </a:endParaRPr>
+          </a:p>
+          <a:p>
+            <a:pPr indent="-171450" lvl="0" marL="171450" rtl="0" algn="l">
+              <a:spcBef>
+                <a:spcPts val="1200"/>
+              </a:spcBef>
+              <a:spcAft>
+                <a:spcPts val="0"/>
+              </a:spcAft>
+              <a:buClr>
+                <a:schemeClr val="dk1"/>
+              </a:buClr>
+              <a:buSzPts val="1200"/>
+              <a:buChar char="•"/>
+            </a:pPr>
+            <a:r>
+              <a:rPr b="1" lang="fr-FR" sz="1200">
+                <a:solidFill>
+                  <a:schemeClr val="dk1"/>
+                </a:solidFill>
+              </a:rPr>
+              <a:t>Redis stream</a:t>
+            </a:r>
+            <a:r>
+              <a:rPr lang="fr-FR" sz="1200">
+                <a:solidFill>
+                  <a:schemeClr val="dk1"/>
+                </a:solidFill>
+              </a:rPr>
+              <a:t>:</a:t>
+            </a:r>
+            <a:endParaRPr sz="1200">
+              <a:solidFill>
+                <a:schemeClr val="dk1"/>
+              </a:solidFill>
+            </a:endParaRPr>
+          </a:p>
+          <a:p>
+            <a:pPr indent="-304800" lvl="1" marL="495000" rtl="0" algn="l">
+              <a:spcBef>
+                <a:spcPts val="1200"/>
+              </a:spcBef>
+              <a:spcAft>
+                <a:spcPts val="0"/>
+              </a:spcAft>
+              <a:buClr>
+                <a:schemeClr val="dk1"/>
+              </a:buClr>
+              <a:buSzPts val="1200"/>
+              <a:buChar char="○"/>
+            </a:pPr>
+            <a:r>
+              <a:rPr lang="fr-FR" sz="1200">
+                <a:solidFill>
+                  <a:schemeClr val="dk1"/>
+                </a:solidFill>
+              </a:rPr>
+              <a:t>Temporarily</a:t>
+            </a:r>
+            <a:r>
+              <a:rPr lang="fr-FR" sz="1200">
+                <a:solidFill>
+                  <a:schemeClr val="dk1"/>
+                </a:solidFill>
+              </a:rPr>
+              <a:t> stores data to distribute them to </a:t>
+            </a:r>
+            <a:r>
+              <a:rPr lang="fr-FR" sz="1200">
+                <a:solidFill>
+                  <a:schemeClr val="dk1"/>
+                </a:solidFill>
+              </a:rPr>
+              <a:t>the ML inference</a:t>
+            </a:r>
+            <a:endParaRPr sz="1200">
+              <a:solidFill>
+                <a:schemeClr val="dk1"/>
+              </a:solidFill>
+            </a:endParaRPr>
+          </a:p>
+          <a:p>
+            <a:pPr indent="-171450" lvl="0" marL="171450" rtl="0" algn="l">
+              <a:spcBef>
+                <a:spcPts val="1200"/>
+              </a:spcBef>
+              <a:spcAft>
+                <a:spcPts val="0"/>
+              </a:spcAft>
+              <a:buClr>
+                <a:schemeClr val="dk1"/>
+              </a:buClr>
+              <a:buSzPts val="1200"/>
+              <a:buChar char="•"/>
+            </a:pPr>
+            <a:r>
+              <a:rPr b="1" lang="fr-FR" sz="1200">
+                <a:solidFill>
+                  <a:schemeClr val="dk1"/>
+                </a:solidFill>
+              </a:rPr>
+              <a:t>Ml_inference stream</a:t>
+            </a:r>
+            <a:r>
+              <a:rPr lang="fr-FR" sz="1200">
+                <a:solidFill>
+                  <a:schemeClr val="dk1"/>
+                </a:solidFill>
+              </a:rPr>
+              <a:t>:</a:t>
+            </a:r>
+            <a:endParaRPr sz="1200">
+              <a:solidFill>
+                <a:schemeClr val="dk1"/>
+              </a:solidFill>
+            </a:endParaRPr>
+          </a:p>
+          <a:p>
+            <a:pPr indent="-304800" lvl="1" marL="495000" rtl="0" algn="l">
+              <a:spcBef>
+                <a:spcPts val="1200"/>
+              </a:spcBef>
+              <a:spcAft>
+                <a:spcPts val="0"/>
+              </a:spcAft>
+              <a:buClr>
+                <a:schemeClr val="dk1"/>
+              </a:buClr>
+              <a:buSzPts val="1200"/>
+              <a:buChar char="○"/>
+            </a:pPr>
+            <a:r>
+              <a:rPr lang="fr-FR" sz="1200">
+                <a:solidFill>
+                  <a:schemeClr val="dk1"/>
+                </a:solidFill>
+              </a:rPr>
+              <a:t>Give a fraud score to each transaction and stores it in the OLTP and MongoDB</a:t>
+            </a:r>
+            <a:endParaRPr sz="1200">
+              <a:solidFill>
+                <a:schemeClr val="dk1"/>
+              </a:solidFill>
+            </a:endParaRPr>
+          </a:p>
+          <a:p>
+            <a:pPr indent="0" lvl="0" marL="0" rtl="0" algn="l">
+              <a:spcBef>
+                <a:spcPts val="1200"/>
+              </a:spcBef>
+              <a:spcAft>
+                <a:spcPts val="0"/>
+              </a:spcAft>
+              <a:buNone/>
+            </a:pPr>
+            <a:r>
+              <a:t/>
+            </a:r>
+            <a:endParaRPr sz="1200">
+              <a:solidFill>
+                <a:schemeClr val="dk1"/>
+              </a:solidFill>
+            </a:endParaRPr>
+          </a:p>
+        </p:txBody>
+      </p:sp>
+    </p:spTree>
+  </p:cSld>
+  <p:clrMapOvr>
+    <a:masterClrMapping/>
+  </p:clrMapOvr>
+</p:sld>
+</file>
+
+<file path=ppt/slides/slide8.xml><?xml version="1.0" encoding="utf-8"?>
+<p:sld xmlns:a="http://schemas.openxmlformats.org/drawingml/2006/main" xmlns:r="http://schemas.openxmlformats.org/officeDocument/2006/relationships" xmlns:mc="http://schemas.openxmlformats.org/markup-compatibility/2006" xmlns:mv="urn:schemas-microsoft-com:mac:vml" xmlns:p="http://schemas.openxmlformats.org/presentationml/2006/main" xmlns:c="http://schemas.openxmlformats.org/drawingml/2006/chart" xmlns:dgm="http://schemas.openxmlformats.org/drawingml/2006/diagram" xmlns:o="urn:schemas-microsoft-com:office:office" xmlns:v="urn:schemas-microsoft-com:vml" xmlns:pvml="urn:schemas-microsoft-com:office:powerpoint" xmlns:com="http://schemas.openxmlformats.org/drawingml/2006/compatibility" xmlns:p14="http://schemas.microsoft.com/office/powerpoint/2010/main" xmlns:p15="http://schemas.microsoft.com/office/powerpoint/2012/main" xmlns:ahyp="http://schemas.microsoft.com/office/drawing/2018/hyperlinkcolor">
+  <p:cSld>
+    <p:spTree>
+      <p:nvGrpSpPr>
+        <p:cNvPr id="187" name="Shape 187"/>
+        <p:cNvGrpSpPr/>
+        <p:nvPr/>
+      </p:nvGrpSpPr>
+      <p:grpSpPr>
+        <a:xfrm>
+          <a:off x="0" y="0"/>
+          <a:ext cx="0" cy="0"/>
+          <a:chOff x="0" y="0"/>
+          <a:chExt cx="0" cy="0"/>
+        </a:xfrm>
+      </p:grpSpPr>
+      <p:sp>
+        <p:nvSpPr>
+          <p:cNvPr id="188" name="Google Shape;188;g3e3a03c189e_0_42"/>
+          <p:cNvSpPr txBox="1"/>
+          <p:nvPr>
+            <p:ph idx="4294967295" type="ctrTitle"/>
+          </p:nvPr>
+        </p:nvSpPr>
+        <p:spPr>
+          <a:xfrm>
+            <a:off x="1192664" y="403309"/>
+            <a:ext cx="5315100" cy="533100"/>
+          </a:xfrm>
+          <a:prstGeom prst="rect">
+            <a:avLst/>
+          </a:prstGeom>
+          <a:noFill/>
+          <a:ln>
+            <a:noFill/>
+          </a:ln>
+        </p:spPr>
+        <p:txBody>
+          <a:bodyPr anchorCtr="0" anchor="t" bIns="91425" lIns="91425" spcFirstLastPara="1" rIns="91425" wrap="square" tIns="91425">
+            <a:noAutofit/>
+          </a:bodyPr>
+          <a:lstStyle/>
+          <a:p>
+            <a:pPr indent="0" lvl="0" marL="0" marR="0" rtl="0" algn="l">
+              <a:lnSpc>
+                <a:spcPct val="100000"/>
+              </a:lnSpc>
+              <a:spcBef>
+                <a:spcPts val="0"/>
+              </a:spcBef>
+              <a:spcAft>
+                <a:spcPts val="0"/>
+              </a:spcAft>
+              <a:buClr>
+                <a:schemeClr val="dk1"/>
+              </a:buClr>
+              <a:buSzPts val="2800"/>
+              <a:buFont typeface="Arial"/>
+              <a:buNone/>
+            </a:pPr>
+            <a:r>
+              <a:rPr lang="fr-FR" sz="2500">
+                <a:solidFill>
+                  <a:srgbClr val="0E3449"/>
+                </a:solidFill>
+                <a:latin typeface="Inter SemiBold"/>
+                <a:ea typeface="Inter SemiBold"/>
+                <a:cs typeface="Inter SemiBold"/>
+                <a:sym typeface="Inter SemiBold"/>
+              </a:rPr>
+              <a:t>Machine Learning Integration</a:t>
+            </a:r>
+            <a:endParaRPr b="0" i="0" sz="2500" u="none" cap="none" strike="noStrike">
+              <a:solidFill>
+                <a:srgbClr val="0E3449"/>
+              </a:solidFill>
+              <a:latin typeface="Inter SemiBold"/>
+              <a:ea typeface="Inter SemiBold"/>
+              <a:cs typeface="Inter SemiBold"/>
+              <a:sym typeface="Inter SemiBold"/>
+            </a:endParaRPr>
+          </a:p>
+        </p:txBody>
+      </p:sp>
+      <p:pic>
+        <p:nvPicPr>
+          <p:cNvPr id="189" name="Google Shape;189;g3e3a03c189e_0_42"/>
+          <p:cNvPicPr preferRelativeResize="0"/>
+          <p:nvPr/>
+        </p:nvPicPr>
+        <p:blipFill rotWithShape="1">
+          <a:blip r:embed="rId3">
+            <a:alphaModFix/>
+          </a:blip>
+          <a:srcRect b="0" l="0" r="0" t="0"/>
+          <a:stretch/>
+        </p:blipFill>
+        <p:spPr>
+          <a:xfrm>
+            <a:off x="463375" y="482852"/>
+            <a:ext cx="576900" cy="385904"/>
+          </a:xfrm>
+          <a:prstGeom prst="rect">
+            <a:avLst/>
+          </a:prstGeom>
+          <a:noFill/>
+          <a:ln>
+            <a:noFill/>
+          </a:ln>
+        </p:spPr>
+      </p:pic>
+      <p:sp>
+        <p:nvSpPr>
+          <p:cNvPr id="190" name="Google Shape;190;g3e3a03c189e_0_42"/>
+          <p:cNvSpPr/>
+          <p:nvPr/>
+        </p:nvSpPr>
+        <p:spPr>
+          <a:xfrm>
+            <a:off x="10225" y="4892025"/>
+            <a:ext cx="9144000" cy="251400"/>
+          </a:xfrm>
+          <a:prstGeom prst="rect">
+            <a:avLst/>
+          </a:prstGeom>
+          <a:solidFill>
+            <a:srgbClr val="C3FFFC"/>
+          </a:solidFill>
+          <a:ln>
+            <a:noFill/>
+          </a:ln>
+        </p:spPr>
+        <p:txBody>
+          <a:bodyPr anchorCtr="0" anchor="ctr" bIns="91425" lIns="91425" spcFirstLastPara="1" rIns="91425" wrap="square" tIns="91425">
+            <a:noAutofit/>
+          </a:bodyPr>
+          <a:lstStyle/>
+          <a:p>
+            <a:pPr indent="0" lvl="0" marL="0" marR="0" rtl="0" algn="l">
+              <a:lnSpc>
+                <a:spcPct val="100000"/>
+              </a:lnSpc>
+              <a:spcBef>
+                <a:spcPts val="0"/>
+              </a:spcBef>
+              <a:spcAft>
+                <a:spcPts val="0"/>
+              </a:spcAft>
+              <a:buClr>
+                <a:srgbClr val="000000"/>
+              </a:buClr>
+              <a:buSzPts val="1400"/>
+              <a:buFont typeface="Arial"/>
+              <a:buNone/>
+            </a:pPr>
+            <a:r>
+              <a:t/>
+            </a:r>
+            <a:endParaRPr b="0" i="0" sz="1400" u="none" cap="none" strike="noStrike">
+              <a:solidFill>
+                <a:srgbClr val="000000"/>
+              </a:solidFill>
+              <a:latin typeface="Arial"/>
+              <a:ea typeface="Arial"/>
+              <a:cs typeface="Arial"/>
+              <a:sym typeface="Arial"/>
+            </a:endParaRPr>
+          </a:p>
+        </p:txBody>
+      </p:sp>
+      <p:sp>
+        <p:nvSpPr>
+          <p:cNvPr id="191" name="Google Shape;191;g3e3a03c189e_0_42"/>
+          <p:cNvSpPr txBox="1"/>
+          <p:nvPr/>
+        </p:nvSpPr>
+        <p:spPr>
+          <a:xfrm>
+            <a:off x="1192664" y="779179"/>
+            <a:ext cx="5315100" cy="375900"/>
+          </a:xfrm>
+          <a:prstGeom prst="rect">
+            <a:avLst/>
+          </a:prstGeom>
+          <a:noFill/>
+          <a:ln>
+            <a:noFill/>
+          </a:ln>
+        </p:spPr>
+        <p:txBody>
+          <a:bodyPr anchorCtr="0" anchor="t" bIns="91425" lIns="91425" spcFirstLastPara="1" rIns="91425" wrap="square" tIns="91425">
+            <a:noAutofit/>
+          </a:bodyPr>
+          <a:lstStyle/>
+          <a:p>
+            <a:pPr indent="0" lvl="0" marL="0" marR="0" rtl="0" algn="l">
+              <a:lnSpc>
+                <a:spcPct val="100000"/>
+              </a:lnSpc>
+              <a:spcBef>
+                <a:spcPts val="0"/>
+              </a:spcBef>
+              <a:spcAft>
+                <a:spcPts val="0"/>
+              </a:spcAft>
+              <a:buClr>
+                <a:schemeClr val="dk1"/>
+              </a:buClr>
+              <a:buSzPts val="2800"/>
+              <a:buFont typeface="Arial"/>
+              <a:buNone/>
+            </a:pPr>
+            <a:r>
+              <a:rPr b="1" lang="fr-FR">
+                <a:solidFill>
+                  <a:srgbClr val="0E3449"/>
+                </a:solidFill>
+                <a:latin typeface="Inter SemiBold"/>
+                <a:ea typeface="Inter SemiBold"/>
+                <a:cs typeface="Inter SemiBold"/>
+                <a:sym typeface="Inter SemiBold"/>
+              </a:rPr>
+              <a:t>Inference and Monitoring</a:t>
+            </a:r>
+            <a:endParaRPr b="1" i="0" sz="1400" u="none" cap="none" strike="noStrike">
+              <a:solidFill>
+                <a:srgbClr val="0E3449"/>
+              </a:solidFill>
+              <a:latin typeface="Inter SemiBold"/>
+              <a:ea typeface="Inter SemiBold"/>
+              <a:cs typeface="Inter SemiBold"/>
+              <a:sym typeface="Inter SemiBold"/>
+            </a:endParaRPr>
+          </a:p>
+        </p:txBody>
+      </p:sp>
+      <p:sp>
+        <p:nvSpPr>
+          <p:cNvPr id="192" name="Google Shape;192;g3e3a03c189e_0_42"/>
+          <p:cNvSpPr/>
+          <p:nvPr/>
+        </p:nvSpPr>
+        <p:spPr>
+          <a:xfrm>
+            <a:off x="7500992" y="765913"/>
+            <a:ext cx="1098600" cy="333000"/>
+          </a:xfrm>
+          <a:prstGeom prst="roundRect">
+            <a:avLst>
+              <a:gd fmla="val 16667" name="adj"/>
+            </a:avLst>
+          </a:prstGeom>
+          <a:solidFill>
+            <a:srgbClr val="F2F2F2"/>
+          </a:solidFill>
+          <a:ln>
+            <a:noFill/>
+          </a:ln>
+        </p:spPr>
+        <p:txBody>
+          <a:bodyPr anchorCtr="0" anchor="ctr" bIns="45700" lIns="91425" spcFirstLastPara="1" rIns="91425" wrap="square" tIns="45700">
+            <a:noAutofit/>
+          </a:bodyPr>
+          <a:lstStyle/>
+          <a:p>
+            <a:pPr indent="0" lvl="0" marL="0" marR="0" rtl="0" algn="ctr">
+              <a:lnSpc>
+                <a:spcPct val="100000"/>
+              </a:lnSpc>
+              <a:spcBef>
+                <a:spcPts val="0"/>
+              </a:spcBef>
+              <a:spcAft>
+                <a:spcPts val="0"/>
+              </a:spcAft>
+              <a:buClr>
+                <a:srgbClr val="000000"/>
+              </a:buClr>
+              <a:buSzPts val="1400"/>
+              <a:buFont typeface="Arial"/>
+              <a:buNone/>
+            </a:pPr>
+            <a:r>
+              <a:t/>
+            </a:r>
+            <a:endParaRPr b="0" i="0" sz="1400" u="none" cap="none" strike="noStrike">
+              <a:solidFill>
+                <a:schemeClr val="lt1"/>
+              </a:solidFill>
+              <a:latin typeface="Arial"/>
+              <a:ea typeface="Arial"/>
+              <a:cs typeface="Arial"/>
+              <a:sym typeface="Arial"/>
+            </a:endParaRPr>
+          </a:p>
+        </p:txBody>
+      </p:sp>
+      <p:sp>
+        <p:nvSpPr>
+          <p:cNvPr id="193" name="Google Shape;193;g3e3a03c189e_0_42"/>
+          <p:cNvSpPr txBox="1"/>
+          <p:nvPr/>
+        </p:nvSpPr>
+        <p:spPr>
+          <a:xfrm>
+            <a:off x="7472169" y="809322"/>
+            <a:ext cx="1156200" cy="246300"/>
+          </a:xfrm>
+          <a:prstGeom prst="rect">
+            <a:avLst/>
+          </a:prstGeom>
+          <a:noFill/>
+          <a:ln>
+            <a:noFill/>
+          </a:ln>
+        </p:spPr>
+        <p:txBody>
+          <a:bodyPr anchorCtr="0" anchor="t" bIns="45700" lIns="91425" spcFirstLastPara="1" rIns="91425" wrap="square" tIns="45700">
+            <a:spAutoFit/>
+          </a:bodyPr>
+          <a:lstStyle/>
+          <a:p>
+            <a:pPr indent="0" lvl="0" marL="0" marR="0" rtl="0" algn="ctr">
+              <a:lnSpc>
+                <a:spcPct val="100000"/>
+              </a:lnSpc>
+              <a:spcBef>
+                <a:spcPts val="0"/>
+              </a:spcBef>
+              <a:spcAft>
+                <a:spcPts val="0"/>
+              </a:spcAft>
+              <a:buClr>
+                <a:srgbClr val="000000"/>
+              </a:buClr>
+              <a:buSzPts val="1000"/>
+              <a:buFont typeface="Arial"/>
+              <a:buNone/>
+            </a:pPr>
+            <a:r>
+              <a:rPr b="0" i="0" lang="fr-FR" sz="1000" u="sng" cap="none" strike="noStrike">
+                <a:solidFill>
+                  <a:schemeClr val="hlink"/>
+                </a:solidFill>
+                <a:latin typeface="Arial"/>
+                <a:ea typeface="Arial"/>
+                <a:cs typeface="Arial"/>
+                <a:sym typeface="Arial"/>
+                <a:hlinkClick r:id="rId4"/>
+              </a:rPr>
+              <a:t>Lien Dashboard</a:t>
+            </a:r>
+            <a:endParaRPr b="0" i="0" sz="800" u="none" cap="none" strike="noStrike">
+              <a:solidFill>
+                <a:srgbClr val="000000"/>
+              </a:solidFill>
+              <a:latin typeface="Arial"/>
+              <a:ea typeface="Arial"/>
+              <a:cs typeface="Arial"/>
+              <a:sym typeface="Arial"/>
+            </a:endParaRPr>
+          </a:p>
+        </p:txBody>
+      </p:sp>
+      <p:cxnSp>
+        <p:nvCxnSpPr>
+          <p:cNvPr id="194" name="Google Shape;194;g3e3a03c189e_0_42"/>
+          <p:cNvCxnSpPr/>
+          <p:nvPr/>
+        </p:nvCxnSpPr>
+        <p:spPr>
+          <a:xfrm>
+            <a:off x="6902308" y="936409"/>
+            <a:ext cx="570000" cy="0"/>
+          </a:xfrm>
+          <a:prstGeom prst="straightConnector1">
+            <a:avLst/>
+          </a:prstGeom>
+          <a:noFill/>
+          <a:ln cap="flat" cmpd="sng" w="76200">
+            <a:solidFill>
+              <a:srgbClr val="FFC000"/>
+            </a:solidFill>
+            <a:prstDash val="solid"/>
+            <a:round/>
+            <a:headEnd len="sm" w="sm" type="none"/>
+            <a:tailEnd len="med" w="med" type="triangle"/>
+          </a:ln>
+        </p:spPr>
+      </p:cxnSp>
+      <p:sp>
+        <p:nvSpPr>
+          <p:cNvPr id="195" name="Google Shape;195;g3e3a03c189e_0_42"/>
+          <p:cNvSpPr txBox="1"/>
+          <p:nvPr>
+            <p:ph idx="12" type="sldNum"/>
+          </p:nvPr>
+        </p:nvSpPr>
+        <p:spPr>
+          <a:xfrm>
+            <a:off x="8472458" y="4939381"/>
+            <a:ext cx="548700" cy="153900"/>
+          </a:xfrm>
+          <a:prstGeom prst="rect">
+            <a:avLst/>
+          </a:prstGeom>
+          <a:noFill/>
+          <a:ln>
+            <a:noFill/>
+          </a:ln>
+        </p:spPr>
+        <p:txBody>
+          <a:bodyPr anchorCtr="0" anchor="ctr" bIns="0" lIns="0" spcFirstLastPara="1" rIns="0" wrap="square" tIns="0">
+            <a:spAutoFit/>
+          </a:bodyPr>
+          <a:lstStyle/>
+          <a:p>
+            <a:pPr indent="0" lvl="0" marL="0" rtl="0" algn="r">
+              <a:lnSpc>
+                <a:spcPct val="100000"/>
+              </a:lnSpc>
+              <a:spcBef>
+                <a:spcPts val="0"/>
+              </a:spcBef>
+              <a:spcAft>
+                <a:spcPts val="0"/>
+              </a:spcAft>
+              <a:buSzPts val="1000"/>
+              <a:buNone/>
+            </a:pPr>
+            <a:fld id="{00000000-1234-1234-1234-123412341234}" type="slidenum">
+              <a:rPr lang="fr-FR"/>
+              <a:t>‹#›</a:t>
+            </a:fld>
+            <a:endParaRPr/>
+          </a:p>
+        </p:txBody>
+      </p:sp>
+      <p:pic>
+        <p:nvPicPr>
+          <p:cNvPr id="196" name="Google Shape;196;g3e3a03c189e_0_42"/>
+          <p:cNvPicPr preferRelativeResize="0"/>
+          <p:nvPr/>
+        </p:nvPicPr>
+        <p:blipFill>
+          <a:blip r:embed="rId5">
+            <a:alphaModFix/>
+          </a:blip>
+          <a:stretch>
+            <a:fillRect/>
+          </a:stretch>
+        </p:blipFill>
+        <p:spPr>
+          <a:xfrm>
+            <a:off x="237375" y="1222504"/>
+            <a:ext cx="3525426" cy="3432147"/>
+          </a:xfrm>
+          <a:prstGeom prst="rect">
+            <a:avLst/>
+          </a:prstGeom>
+          <a:noFill/>
+          <a:ln>
+            <a:noFill/>
+          </a:ln>
+        </p:spPr>
+      </p:pic>
+      <p:pic>
+        <p:nvPicPr>
+          <p:cNvPr id="197" name="Google Shape;197;g3e3a03c189e_0_42"/>
+          <p:cNvPicPr preferRelativeResize="0"/>
+          <p:nvPr/>
+        </p:nvPicPr>
+        <p:blipFill>
+          <a:blip r:embed="rId6">
+            <a:alphaModFix/>
+          </a:blip>
+          <a:stretch>
+            <a:fillRect/>
+          </a:stretch>
+        </p:blipFill>
+        <p:spPr>
+          <a:xfrm>
+            <a:off x="4114026" y="1257754"/>
+            <a:ext cx="4695045" cy="3432146"/>
+          </a:xfrm>
+          <a:prstGeom prst="rect">
+            <a:avLst/>
+          </a:prstGeom>
+          <a:noFill/>
+          <a:ln>
+            <a:noFill/>
+          </a:ln>
+        </p:spPr>
+      </p:pic>
+    </p:spTree>
+  </p:cSld>
+  <p:clrMapOvr>
+    <a:masterClrMapping/>
+  </p:clrMapOvr>
+</p:sld>
+</file>
+
+<file path=ppt/slides/slide9.xml><?xml version="1.0" encoding="utf-8"?>
+<p:sld xmlns:a="http://schemas.openxmlformats.org/drawingml/2006/main" xmlns:r="http://schemas.openxmlformats.org/officeDocument/2006/relationships" xmlns:mc="http://schemas.openxmlformats.org/markup-compatibility/2006" xmlns:mv="urn:schemas-microsoft-com:mac:vml" xmlns:p="http://schemas.openxmlformats.org/presentationml/2006/main" xmlns:c="http://schemas.openxmlformats.org/drawingml/2006/chart" xmlns:dgm="http://schemas.openxmlformats.org/drawingml/2006/diagram" xmlns:o="urn:schemas-microsoft-com:office:office" xmlns:v="urn:schemas-microsoft-com:vml" xmlns:pvml="urn:schemas-microsoft-com:office:powerpoint" xmlns:com="http://schemas.openxmlformats.org/drawingml/2006/compatibility" xmlns:p14="http://schemas.microsoft.com/office/powerpoint/2010/main" xmlns:p15="http://schemas.microsoft.com/office/powerpoint/2012/main" xmlns:ahyp="http://schemas.microsoft.com/office/drawing/2018/hyperlinkcolor">
+  <p:cSld>
+    <p:spTree>
+      <p:nvGrpSpPr>
+        <p:cNvPr id="201" name="Shape 201"/>
+        <p:cNvGrpSpPr/>
+        <p:nvPr/>
+      </p:nvGrpSpPr>
+      <p:grpSpPr>
+        <a:xfrm>
+          <a:off x="0" y="0"/>
+          <a:ext cx="0" cy="0"/>
+          <a:chOff x="0" y="0"/>
+          <a:chExt cx="0" cy="0"/>
+        </a:xfrm>
+      </p:grpSpPr>
+      <p:sp>
+        <p:nvSpPr>
+          <p:cNvPr id="202" name="Google Shape;202;p12"/>
+          <p:cNvSpPr txBox="1"/>
+          <p:nvPr>
+            <p:ph idx="4294967295" type="ctrTitle"/>
+          </p:nvPr>
+        </p:nvSpPr>
+        <p:spPr>
+          <a:xfrm>
+            <a:off x="1192664" y="403309"/>
+            <a:ext cx="5315100" cy="533100"/>
+          </a:xfrm>
+          <a:prstGeom prst="rect">
+            <a:avLst/>
+          </a:prstGeom>
+          <a:noFill/>
+          <a:ln>
+            <a:noFill/>
+          </a:ln>
+        </p:spPr>
+        <p:txBody>
+          <a:bodyPr anchorCtr="0" anchor="t" bIns="91425" lIns="91425" spcFirstLastPara="1" rIns="91425" wrap="square" tIns="91425">
+            <a:noAutofit/>
+          </a:bodyPr>
+          <a:lstStyle/>
+          <a:p>
+            <a:pPr indent="0" lvl="0" marL="0" marR="0" rtl="0" algn="l">
+              <a:lnSpc>
+                <a:spcPct val="100000"/>
+              </a:lnSpc>
+              <a:spcBef>
+                <a:spcPts val="0"/>
+              </a:spcBef>
+              <a:spcAft>
+                <a:spcPts val="0"/>
+              </a:spcAft>
+              <a:buClr>
+                <a:schemeClr val="dk1"/>
+              </a:buClr>
+              <a:buSzPts val="2800"/>
+              <a:buFont typeface="Arial"/>
+              <a:buNone/>
+            </a:pPr>
+            <a:r>
+              <a:rPr b="0" i="0" lang="fr-FR" sz="2500" u="none" cap="none" strike="noStrike">
+                <a:solidFill>
+                  <a:srgbClr val="0E3449"/>
+                </a:solidFill>
+                <a:latin typeface="Inter SemiBold"/>
+                <a:ea typeface="Inter SemiBold"/>
+                <a:cs typeface="Inter SemiBold"/>
+                <a:sym typeface="Inter SemiBold"/>
+              </a:rPr>
+              <a:t>Conclusion</a:t>
+            </a:r>
+            <a:endParaRPr b="0" i="0" sz="2500" u="none" cap="none" strike="noStrike">
+              <a:solidFill>
+                <a:srgbClr val="0E3449"/>
+              </a:solidFill>
+              <a:latin typeface="Inter SemiBold"/>
+              <a:ea typeface="Inter SemiBold"/>
+              <a:cs typeface="Inter SemiBold"/>
+              <a:sym typeface="Inter SemiBold"/>
+            </a:endParaRPr>
+          </a:p>
+        </p:txBody>
+      </p:sp>
+      <p:sp>
+        <p:nvSpPr>
+          <p:cNvPr id="203" name="Google Shape;203;p12"/>
+          <p:cNvSpPr/>
+          <p:nvPr/>
+        </p:nvSpPr>
+        <p:spPr>
+          <a:xfrm>
+            <a:off x="10225" y="4892025"/>
+            <a:ext cx="9144000" cy="251400"/>
+          </a:xfrm>
+          <a:prstGeom prst="rect">
+            <a:avLst/>
+          </a:prstGeom>
+          <a:solidFill>
+            <a:srgbClr val="C3FFFC"/>
+          </a:solidFill>
+          <a:ln>
+            <a:noFill/>
+          </a:ln>
+        </p:spPr>
+        <p:txBody>
+          <a:bodyPr anchorCtr="0" anchor="ctr" bIns="91425" lIns="91425" spcFirstLastPara="1" rIns="91425" wrap="square" tIns="91425">
+            <a:noAutofit/>
+          </a:bodyPr>
+          <a:lstStyle/>
+          <a:p>
+            <a:pPr indent="0" lvl="0" marL="0" marR="0" rtl="0" algn="l">
+              <a:lnSpc>
+                <a:spcPct val="100000"/>
+              </a:lnSpc>
+              <a:spcBef>
+                <a:spcPts val="0"/>
+              </a:spcBef>
+              <a:spcAft>
+                <a:spcPts val="0"/>
+              </a:spcAft>
+              <a:buClr>
+                <a:srgbClr val="000000"/>
+              </a:buClr>
+              <a:buSzPts val="1400"/>
+              <a:buFont typeface="Arial"/>
+              <a:buNone/>
+            </a:pPr>
+            <a:r>
+              <a:t/>
+            </a:r>
+            <a:endParaRPr b="0" i="0" sz="1400" u="none" cap="none" strike="noStrike">
+              <a:solidFill>
+                <a:srgbClr val="000000"/>
+              </a:solidFill>
+              <a:latin typeface="Arial"/>
+              <a:ea typeface="Arial"/>
+              <a:cs typeface="Arial"/>
+              <a:sym typeface="Arial"/>
+            </a:endParaRPr>
+          </a:p>
+        </p:txBody>
+      </p:sp>
+      <p:pic>
+        <p:nvPicPr>
+          <p:cNvPr id="204" name="Google Shape;204;p12"/>
+          <p:cNvPicPr preferRelativeResize="0"/>
+          <p:nvPr/>
+        </p:nvPicPr>
+        <p:blipFill rotWithShape="1">
+          <a:blip r:embed="rId3">
+            <a:alphaModFix/>
+          </a:blip>
+          <a:srcRect b="0" l="0" r="0" t="0"/>
+          <a:stretch/>
+        </p:blipFill>
+        <p:spPr>
+          <a:xfrm>
+            <a:off x="463375" y="482852"/>
+            <a:ext cx="576900" cy="385904"/>
+          </a:xfrm>
+          <a:prstGeom prst="rect">
+            <a:avLst/>
+          </a:prstGeom>
+          <a:noFill/>
+          <a:ln>
+            <a:noFill/>
+          </a:ln>
+        </p:spPr>
+      </p:pic>
+      <p:sp>
+        <p:nvSpPr>
+          <p:cNvPr id="205" name="Google Shape;205;p12"/>
           <p:cNvSpPr/>
           <p:nvPr/>
         </p:nvSpPr>
@@ -21934,25 +23250,13 @@
             </a:pPr>
             <a:r>
               <a:rPr b="1" lang="fr-FR" sz="1200"/>
-              <a:t>Outil d’aide à la décision:</a:t>
-            </a:r>
-            <a:r>
-              <a:rPr b="1" i="0" lang="fr-FR" sz="1200" u="none" cap="none" strike="noStrike">
-                <a:solidFill>
-                  <a:srgbClr val="000000"/>
-                </a:solidFill>
-                <a:latin typeface="Arial"/>
-                <a:ea typeface="Arial"/>
-                <a:cs typeface="Arial"/>
-                <a:sym typeface="Arial"/>
-              </a:rPr>
-              <a:t> </a:t>
+              <a:t>Lors d’un paiement:</a:t>
             </a:r>
             <a:r>
               <a:rPr lang="fr-FR" sz="1200"/>
-              <a:t>Accessible en ligne, avec une visualisation permettant de jauger de l’impact des décision prises.</a:t>
+              <a:t> L’ensemble des informations sont chargées dans une OLTP, incluant une outbox_events table pour assurer le flux de données dans le reste des services.</a:t>
             </a:r>
-            <a:endParaRPr/>
+            <a:endParaRPr sz="1200"/>
           </a:p>
           <a:p>
             <a:pPr indent="-171450" lvl="0" marL="171450" marR="0" rtl="0" algn="l">
@@ -21965,22 +23269,78 @@
               <a:spcAft>
                 <a:spcPts val="0"/>
               </a:spcAft>
-              <a:buClr>
-                <a:srgbClr val="000000"/>
-              </a:buClr>
               <a:buSzPts val="1200"/>
-              <a:buFont typeface="Arial"/>
               <a:buChar char="•"/>
             </a:pPr>
             <a:r>
               <a:rPr b="1" lang="fr-FR" sz="1200"/>
-              <a:t>API en ligne:</a:t>
+              <a:t>Debezium CDC+Kafka:</a:t>
             </a:r>
             <a:r>
               <a:rPr lang="fr-FR" sz="1200"/>
-              <a:t> Avec un endpoint de prédiction pour aider les propriétaires à fixer leurs prix de location. </a:t>
+              <a:t> Collectent les données de la Outbox_event et les distribuent dans les 4 flux afin de: populer l’OLAP, populer la NoSQL DB et faire le calcul d’inférence.</a:t>
             </a:r>
-            <a:endParaRPr/>
+            <a:endParaRPr sz="1200"/>
+          </a:p>
+          <a:p>
+            <a:pPr indent="-171450" lvl="0" marL="171450" marR="0" rtl="0" algn="l">
+              <a:lnSpc>
+                <a:spcPct val="100000"/>
+              </a:lnSpc>
+              <a:spcBef>
+                <a:spcPts val="1200"/>
+              </a:spcBef>
+              <a:spcAft>
+                <a:spcPts val="0"/>
+              </a:spcAft>
+              <a:buClr>
+                <a:srgbClr val="000000"/>
+              </a:buClr>
+              <a:buSzPts val="1200"/>
+              <a:buFont typeface="Arial"/>
+              <a:buChar char="•"/>
+            </a:pPr>
+            <a:r>
+              <a:rPr b="1" lang="fr-FR" sz="1200"/>
+              <a:t>Monitoring</a:t>
+            </a:r>
+            <a:r>
+              <a:rPr b="1" i="0" lang="fr-FR" sz="1200" u="none" cap="none" strike="noStrike">
+                <a:solidFill>
+                  <a:srgbClr val="000000"/>
+                </a:solidFill>
+                <a:latin typeface="Arial"/>
+                <a:ea typeface="Arial"/>
+                <a:cs typeface="Arial"/>
+                <a:sym typeface="Arial"/>
+              </a:rPr>
+              <a:t>:</a:t>
+            </a:r>
+            <a:r>
+              <a:rPr b="0" i="0" lang="fr-FR" sz="1200" u="none" cap="none" strike="noStrike">
+                <a:solidFill>
+                  <a:srgbClr val="000000"/>
+                </a:solidFill>
+                <a:latin typeface="Arial"/>
+                <a:ea typeface="Arial"/>
+                <a:cs typeface="Arial"/>
+                <a:sym typeface="Arial"/>
+              </a:rPr>
+              <a:t> 1) </a:t>
+            </a:r>
+            <a:r>
+              <a:rPr lang="fr-FR" sz="1200"/>
+              <a:t>the services performances, 2) data drift, 3) performance drop</a:t>
+            </a:r>
+            <a:endParaRPr b="0" i="0" sz="1400" u="none" cap="none" strike="noStrike">
+              <a:solidFill>
+                <a:srgbClr val="000000"/>
+              </a:solidFill>
+              <a:latin typeface="Arial"/>
+              <a:ea typeface="Arial"/>
+              <a:cs typeface="Arial"/>
+              <a:sym typeface="Arial"/>
+            </a:endParaRPr>
           </a:p>
           <a:p>
             <a:pPr indent="0" lvl="0" marL="457200" marR="0" rtl="0" algn="l">
@@ -21993,6 +23353,11 @@
               <a:spcAft>
                 <a:spcPts val="0"/>
               </a:spcAft>
+              <a:buClr>
+                <a:srgbClr val="000000"/>
+              </a:buClr>
+              <a:buSzPts val="1200"/>
+              <a:buFont typeface="Arial"/>
               <a:buNone/>
             </a:pPr>
             <a:r>
@@ -22043,7 +23408,7 @@
       </p:sp>
       <p:sp>
         <p:nvSpPr>
-          <p:cNvPr id="188" name="Google Shape;188;p12"/>
+          <p:cNvPr id="206" name="Google Shape;206;p12"/>
           <p:cNvSpPr/>
           <p:nvPr/>
         </p:nvSpPr>
@@ -22118,13 +23483,109 @@
             </a:pPr>
             <a:r>
               <a:rPr b="1" lang="fr-FR" sz="1200"/>
-              <a:t>Amélioration de l’EDA sur le dashboard: </a:t>
+              <a:t>Sécurité: </a:t>
             </a:r>
+            <a:endParaRPr b="1" sz="1200"/>
+          </a:p>
+          <a:p>
+            <a:pPr indent="-304800" lvl="1" marL="914400" marR="0" rtl="0" algn="l">
+              <a:lnSpc>
+                <a:spcPct val="100000"/>
+              </a:lnSpc>
+              <a:spcBef>
+                <a:spcPts val="1200"/>
+              </a:spcBef>
+              <a:spcAft>
+                <a:spcPts val="0"/>
+              </a:spcAft>
+              <a:buSzPts val="1200"/>
+              <a:buChar char="○"/>
+            </a:pPr>
             <a:r>
               <a:rPr lang="fr-FR" sz="1200"/>
-              <a:t>Produire plus de graphiques pertinents pour aider à discerner les leviers d’actions et les bonnes actions à prendre  pour améliorer la qualité du service.</a:t>
+              <a:t>Encodage multi-couche</a:t>
             </a:r>
-            <a:endParaRPr/>
+            <a:endParaRPr sz="1200"/>
+          </a:p>
+          <a:p>
+            <a:pPr indent="-304800" lvl="1" marL="914400" marR="0" rtl="0" algn="l">
+              <a:lnSpc>
+                <a:spcPct val="100000"/>
+              </a:lnSpc>
+              <a:spcBef>
+                <a:spcPts val="1200"/>
+              </a:spcBef>
+              <a:spcAft>
+                <a:spcPts val="0"/>
+              </a:spcAft>
+              <a:buSzPts val="1200"/>
+              <a:buChar char="○"/>
+            </a:pPr>
+            <a:r>
+              <a:rPr lang="fr-FR" sz="1200"/>
+              <a:t>Contrôle des accès</a:t>
+            </a:r>
+            <a:endParaRPr sz="1200"/>
+          </a:p>
+          <a:p>
+            <a:pPr indent="-304800" lvl="1" marL="914400" marR="0" rtl="0" algn="l">
+              <a:lnSpc>
+                <a:spcPct val="100000"/>
+              </a:lnSpc>
+              <a:spcBef>
+                <a:spcPts val="1200"/>
+              </a:spcBef>
+              <a:spcAft>
+                <a:spcPts val="0"/>
+              </a:spcAft>
+              <a:buSzPts val="1200"/>
+              <a:buChar char="○"/>
+            </a:pPr>
+            <a:r>
+              <a:rPr lang="fr-FR" sz="1200"/>
+              <a:t>Enregistrement des logs d’audit en mode compliance</a:t>
+            </a:r>
+            <a:endParaRPr sz="1200"/>
+          </a:p>
+          <a:p>
+            <a:pPr indent="-304800" lvl="1" marL="914400" marR="0" rtl="0" algn="l">
+              <a:lnSpc>
+                <a:spcPct val="100000"/>
+              </a:lnSpc>
+              <a:spcBef>
+                <a:spcPts val="1200"/>
+              </a:spcBef>
+              <a:spcAft>
+                <a:spcPts val="0"/>
+              </a:spcAft>
+              <a:buSzPts val="1200"/>
+              <a:buChar char="○"/>
+            </a:pPr>
+            <a:r>
+              <a:rPr lang="fr-FR" sz="1200"/>
+              <a:t>Effacement légal via flux automatisé</a:t>
+            </a:r>
+            <a:endParaRPr sz="1200"/>
+          </a:p>
+          <a:p>
+            <a:pPr indent="-304800" lvl="1" marL="914400" marR="0" rtl="0" algn="l">
+              <a:lnSpc>
+                <a:spcPct val="100000"/>
+              </a:lnSpc>
+              <a:spcBef>
+                <a:spcPts val="1200"/>
+              </a:spcBef>
+              <a:spcAft>
+                <a:spcPts val="0"/>
+              </a:spcAft>
+              <a:buSzPts val="1200"/>
+              <a:buChar char="○"/>
+            </a:pPr>
+            <a:r>
+              <a:rPr lang="fr-FR" sz="1200"/>
+              <a:t>Monitoring</a:t>
+            </a:r>
+            <a:endParaRPr sz="1200"/>
           </a:p>
           <a:p>
             <a:pPr indent="0" lvl="0" marL="457200" marR="0" rtl="0" algn="l">
@@ -22142,7 +23603,46 @@
             <a:r>
               <a:t/>
             </a:r>
-            <a:endParaRPr/>
+            <a:endParaRPr b="0" i="0" sz="1400" u="none" cap="none" strike="noStrike">
+              <a:solidFill>
+                <a:srgbClr val="000000"/>
+              </a:solidFill>
+              <a:latin typeface="Arial"/>
+              <a:ea typeface="Arial"/>
+              <a:cs typeface="Arial"/>
+              <a:sym typeface="Arial"/>
+            </a:endParaRPr>
+          </a:p>
+          <a:p>
+            <a:pPr indent="0" lvl="0" marL="457200" marR="0" rtl="0" algn="l">
+              <a:lnSpc>
+                <a:spcPct val="100000"/>
+              </a:lnSpc>
+              <a:spcBef>
+                <a:spcPts val="1200"/>
+              </a:spcBef>
+              <a:spcAft>
+                <a:spcPts val="0"/>
+              </a:spcAft>
+              <a:buClr>
+                <a:srgbClr val="000000"/>
+              </a:buClr>
+              <a:buSzPts val="1400"/>
+              <a:buFont typeface="Arial"/>
+              <a:buNone/>
+            </a:pPr>
+            <a:r>
+              <a:t/>
+            </a:r>
+            <a:endParaRPr b="0" i="0" sz="1400" u="none" cap="none" strike="noStrike">
+              <a:solidFill>
+                <a:srgbClr val="000000"/>
+              </a:solidFill>
+              <a:latin typeface="Arial"/>
+              <a:ea typeface="Arial"/>
+              <a:cs typeface="Arial"/>
+              <a:sym typeface="Arial"/>
+            </a:endParaRPr>
           </a:p>
           <a:p>
             <a:pPr indent="-209550" lvl="0" marL="285750" marR="0" rtl="0" algn="l">
@@ -22179,7 +23679,7 @@
       </p:sp>
       <p:sp>
         <p:nvSpPr>
-          <p:cNvPr id="189" name="Google Shape;189;p12"/>
+          <p:cNvPr id="207" name="Google Shape;207;p12"/>
           <p:cNvSpPr/>
           <p:nvPr/>
         </p:nvSpPr>
@@ -22220,6 +23720,11 @@
               <a:spcAft>
                 <a:spcPts val="0"/>
               </a:spcAft>
+              <a:buClr>
+                <a:srgbClr val="000000"/>
+              </a:buClr>
+              <a:buSzPts val="1400"/>
+              <a:buFont typeface="Arial"/>
               <a:buNone/>
             </a:pPr>
             <a:r>
@@ -22239,7 +23744,7 @@
       </p:sp>
       <p:pic>
         <p:nvPicPr>
-          <p:cNvPr id="190" name="Google Shape;190;p12"/>
+          <p:cNvPr id="208" name="Google Shape;208;p12"/>
           <p:cNvPicPr preferRelativeResize="0"/>
           <p:nvPr/>
         </p:nvPicPr>
@@ -22264,230 +23769,9 @@
           </a:ln>
         </p:spPr>
       </p:pic>
-      <p:grpSp>
-        <p:nvGrpSpPr>
-          <p:cNvPr id="191" name="Google Shape;191;p12"/>
-          <p:cNvGrpSpPr/>
-          <p:nvPr/>
-        </p:nvGrpSpPr>
-        <p:grpSpPr>
-          <a:xfrm>
-            <a:off x="4647650" y="1061359"/>
-            <a:ext cx="1522339" cy="576900"/>
-            <a:chOff x="4647650" y="1061359"/>
-            <a:chExt cx="1522339" cy="576900"/>
-          </a:xfrm>
-        </p:grpSpPr>
-        <p:sp>
-          <p:nvSpPr>
-            <p:cNvPr id="192" name="Google Shape;192;p12"/>
-            <p:cNvSpPr/>
-            <p:nvPr/>
-          </p:nvSpPr>
-          <p:spPr>
-            <a:xfrm>
-              <a:off x="4647650" y="1061359"/>
-              <a:ext cx="576900" cy="576900"/>
-            </a:xfrm>
-            <a:prstGeom prst="ellipse">
-              <a:avLst/>
-            </a:prstGeom>
-            <a:solidFill>
-              <a:schemeClr val="lt1"/>
-            </a:solidFill>
-            <a:ln cap="flat" cmpd="sng" w="25400">
-              <a:solidFill>
-                <a:srgbClr val="FF0000"/>
-              </a:solidFill>
-              <a:prstDash val="solid"/>
-              <a:round/>
-              <a:headEnd len="sm" w="sm" type="none"/>
-              <a:tailEnd len="sm" w="sm" type="none"/>
-            </a:ln>
-          </p:spPr>
-          <p:txBody>
-            <a:bodyPr anchorCtr="0" anchor="ctr" bIns="45700" lIns="91425" spcFirstLastPara="1" rIns="91425" wrap="square" tIns="45700">
-              <a:noAutofit/>
-            </a:bodyPr>
-            <a:lstStyle/>
-            <a:p>
-              <a:pPr indent="0" lvl="0" marL="0" marR="0" rtl="0" algn="ctr">
-                <a:lnSpc>
-                  <a:spcPct val="100000"/>
-                </a:lnSpc>
-                <a:spcBef>
-                  <a:spcPts val="0"/>
-                </a:spcBef>
-                <a:spcAft>
-                  <a:spcPts val="0"/>
-                </a:spcAft>
-                <a:buNone/>
-              </a:pPr>
-              <a:r>
-                <a:t/>
-              </a:r>
-              <a:endParaRPr b="0" i="0" sz="1400" u="none" cap="none" strike="noStrike">
-                <a:solidFill>
-                  <a:srgbClr val="FF0000"/>
-                </a:solidFill>
-                <a:latin typeface="Arial"/>
-                <a:ea typeface="Arial"/>
-                <a:cs typeface="Arial"/>
-                <a:sym typeface="Arial"/>
-              </a:endParaRPr>
-            </a:p>
-          </p:txBody>
-        </p:sp>
-        <p:sp>
-          <p:nvSpPr>
-            <p:cNvPr id="193" name="Google Shape;193;p12"/>
-            <p:cNvSpPr txBox="1"/>
-            <p:nvPr/>
-          </p:nvSpPr>
-          <p:spPr>
-            <a:xfrm>
-              <a:off x="4647650" y="1134365"/>
-              <a:ext cx="1522339" cy="430887"/>
-            </a:xfrm>
-            <a:prstGeom prst="rect">
-              <a:avLst/>
-            </a:prstGeom>
-            <a:noFill/>
-            <a:ln>
-              <a:noFill/>
-            </a:ln>
-          </p:spPr>
-          <p:txBody>
-            <a:bodyPr anchorCtr="0" anchor="t" bIns="45700" lIns="91425" spcFirstLastPara="1" rIns="91425" wrap="square" tIns="45700">
-              <a:spAutoFit/>
-            </a:bodyPr>
-            <a:lstStyle/>
-            <a:p>
-              <a:pPr indent="0" lvl="0" marL="0" marR="0" rtl="0" algn="l">
-                <a:lnSpc>
-                  <a:spcPct val="100000"/>
-                </a:lnSpc>
-                <a:spcBef>
-                  <a:spcPts val="0"/>
-                </a:spcBef>
-                <a:spcAft>
-                  <a:spcPts val="0"/>
-                </a:spcAft>
-                <a:buNone/>
-              </a:pPr>
-              <a:r>
-                <a:rPr b="1" i="0" lang="fr-FR" sz="1050" u="none" cap="none" strike="noStrike">
-                  <a:solidFill>
-                    <a:srgbClr val="FF0000"/>
-                  </a:solidFill>
-                  <a:latin typeface="Arial"/>
-                  <a:ea typeface="Arial"/>
-                  <a:cs typeface="Arial"/>
-                  <a:sym typeface="Arial"/>
-                </a:rPr>
-                <a:t>What’s</a:t>
-              </a:r>
-              <a:endParaRPr b="1" i="0" sz="1050" u="none" cap="none" strike="noStrike">
-                <a:solidFill>
-                  <a:srgbClr val="FF0000"/>
-                </a:solidFill>
-                <a:latin typeface="Arial"/>
-                <a:ea typeface="Arial"/>
-                <a:cs typeface="Arial"/>
-                <a:sym typeface="Arial"/>
-              </a:endParaRPr>
-            </a:p>
-            <a:p>
-              <a:pPr indent="0" lvl="0" marL="0" marR="0" rtl="0" algn="l">
-                <a:lnSpc>
-                  <a:spcPct val="100000"/>
-                </a:lnSpc>
-                <a:spcBef>
-                  <a:spcPts val="0"/>
-                </a:spcBef>
-                <a:spcAft>
-                  <a:spcPts val="0"/>
-                </a:spcAft>
-                <a:buNone/>
-              </a:pPr>
-              <a:r>
-                <a:rPr b="1" i="0" lang="fr-FR" sz="1050" u="none" cap="none" strike="noStrike">
-                  <a:solidFill>
-                    <a:srgbClr val="FF0000"/>
-                  </a:solidFill>
-                  <a:latin typeface="Arial"/>
-                  <a:ea typeface="Arial"/>
-                  <a:cs typeface="Arial"/>
-                  <a:sym typeface="Arial"/>
-                </a:rPr>
-                <a:t>next ?</a:t>
-              </a:r>
-              <a:endParaRPr/>
-            </a:p>
-          </p:txBody>
-        </p:sp>
-      </p:grpSp>
       <p:sp>
         <p:nvSpPr>
-          <p:cNvPr id="194" name="Google Shape;194;p12"/>
-          <p:cNvSpPr/>
-          <p:nvPr/>
-        </p:nvSpPr>
-        <p:spPr>
-          <a:xfrm>
-            <a:off x="3756838" y="2568491"/>
-            <a:ext cx="1120102" cy="596535"/>
-          </a:xfrm>
-          <a:prstGeom prst="rightArrow">
-            <a:avLst>
-              <a:gd fmla="val 50000" name="adj1"/>
-              <a:gd fmla="val 50000" name="adj2"/>
-            </a:avLst>
-          </a:prstGeom>
-          <a:solidFill>
-            <a:srgbClr val="FF0000"/>
-          </a:solidFill>
-          <a:ln>
-            <a:noFill/>
-          </a:ln>
-        </p:spPr>
-        <p:txBody>
-          <a:bodyPr anchorCtr="0" anchor="ctr" bIns="45700" lIns="91425" spcFirstLastPara="1" rIns="91425" wrap="square" tIns="45700">
-            <a:noAutofit/>
-          </a:bodyPr>
-          <a:lstStyle/>
-          <a:p>
-            <a:pPr indent="0" lvl="0" marL="0" marR="0" rtl="0" algn="ctr">
-              <a:lnSpc>
-                <a:spcPct val="100000"/>
-              </a:lnSpc>
-              <a:spcBef>
-                <a:spcPts val="0"/>
-              </a:spcBef>
-              <a:spcAft>
-                <a:spcPts val="0"/>
-              </a:spcAft>
-              <a:buNone/>
-            </a:pPr>
-            <a:r>
-              <a:rPr b="1" i="0" lang="fr-FR" sz="1000" u="none" cap="none" strike="noStrike">
-                <a:solidFill>
-                  <a:schemeClr val="lt1"/>
-                </a:solidFill>
-                <a:latin typeface="Arial"/>
-                <a:ea typeface="Arial"/>
-                <a:cs typeface="Arial"/>
-                <a:sym typeface="Arial"/>
-              </a:rPr>
-              <a:t>Amélioration du modèle</a:t>
-            </a:r>
-            <a:endParaRPr/>
-          </a:p>
-        </p:txBody>
-      </p:sp>
-      <p:sp>
-        <p:nvSpPr>
-          <p:cNvPr id="195" name="Google Shape;195;p12"/>
+          <p:cNvPr id="209" name="Google Shape;209;p12"/>
           <p:cNvSpPr txBox="1"/>
           <p:nvPr>
             <p:ph idx="12" type="sldNum"/>
@@ -22572,7 +23856,7 @@
                                           </p:stCondLst>
                                         </p:cTn>
                                         <p:tgtEl>
-                                          <p:spTgt spid="187"/>
+                                          <p:spTgt spid="205"/>
                                         </p:tgtEl>
                                         <p:attrNameLst>
                                           <p:attrName>style.visibility</p:attrName>
@@ -22599,7 +23883,7 @@
                                           </p:stCondLst>
                                         </p:cTn>
                                         <p:tgtEl>
-                                          <p:spTgt spid="189"/>
+                                          <p:spTgt spid="207"/>
                                         </p:tgtEl>
                                         <p:attrNameLst>
                                           <p:attrName>style.visibility</p:attrName>
@@ -22626,97 +23910,7 @@
                                           </p:stCondLst>
                                         </p:cTn>
                                         <p:tgtEl>
-                                          <p:spTgt spid="190"/>
-                                        </p:tgtEl>
-                                        <p:attrNameLst>
-                                          <p:attrName>style.visibility</p:attrName>
-                                        </p:attrNameLst>
-                                      </p:cBhvr>
-                                      <p:to>
-                                        <p:strVal val="visible"/>
-                                      </p:to>
-                                    </p:set>
-                                  </p:childTnLst>
-                                </p:cTn>
-                              </p:par>
-                            </p:childTnLst>
-                          </p:cTn>
-                        </p:par>
-                      </p:childTnLst>
-                    </p:cTn>
-                  </p:par>
-                  <p:par>
-                    <p:cTn fill="hold">
-                      <p:stCondLst>
-                        <p:cond delay="indefinite"/>
-                      </p:stCondLst>
-                      <p:childTnLst>
-                        <p:par>
-                          <p:cTn fill="hold">
-                            <p:stCondLst>
-                              <p:cond delay="0"/>
-                            </p:stCondLst>
-                            <p:childTnLst>
-                              <p:par>
-                                <p:cTn fill="hold" nodeType="clickEffect" presetClass="entr" presetID="1" presetSubtype="0">
-                                  <p:stCondLst>
-                                    <p:cond delay="0"/>
-                                  </p:stCondLst>
-                                  <p:childTnLst>
-                                    <p:set>
-                                      <p:cBhvr>
-                                        <p:cTn dur="1" fill="hold">
-                                          <p:stCondLst>
-                                            <p:cond delay="0"/>
-                                          </p:stCondLst>
-                                        </p:cTn>
-                                        <p:tgtEl>
-                                          <p:spTgt spid="194"/>
-                                        </p:tgtEl>
-                                        <p:attrNameLst>
-                                          <p:attrName>style.visibility</p:attrName>
-                                        </p:attrNameLst>
-                                      </p:cBhvr>
-                                      <p:to>
-                                        <p:strVal val="visible"/>
-                                      </p:to>
-                                    </p:set>
-                                  </p:childTnLst>
-                                </p:cTn>
-                              </p:par>
-                            </p:childTnLst>
-                          </p:cTn>
-                        </p:par>
-                      </p:childTnLst>
-                    </p:cTn>
-                  </p:par>
-                  <p:par>
-                    <p:cTn fill="hold">
-                      <p:stCondLst>
-                        <p:cond delay="indefinite"/>
-                      </p:stCondLst>
-                      <p:childTnLst>
-                        <p:par>
-                          <p:cTn fill="hold">
-                            <p:stCondLst>
-                              <p:cond delay="0"/>
-                            </p:stCondLst>
-                            <p:childTnLst>
-                              <p:par>
-                                <p:cTn fill="hold" nodeType="clickEffect" presetClass="entr" presetID="1" presetSubtype="0">
-                                  <p:stCondLst>
-                                    <p:cond delay="0"/>
-                                  </p:stCondLst>
-                                  <p:childTnLst>
-                                    <p:set>
-                                      <p:cBhvr>
-                                        <p:cTn dur="1" fill="hold">
-                                          <p:stCondLst>
-                                            <p:cond delay="0"/>
-                                          </p:stCondLst>
-                                        </p:cTn>
-                                        <p:tgtEl>
-                                          <p:spTgt spid="191"/>
+                                          <p:spTgt spid="208"/>
                                         </p:tgtEl>
                                         <p:attrNameLst>
                                           <p:attrName>style.visibility</p:attrName>
@@ -22743,7 +23937,7 @@
                                           </p:stCondLst>
                                         </p:cTn>
                                         <p:tgtEl>
-                                          <p:spTgt spid="188"/>
+                                          <p:spTgt spid="206"/>
                                         </p:tgtEl>
                                         <p:attrNameLst>
                                           <p:attrName>style.visibility</p:attrName>
@@ -22787,164 +23981,10 @@
 </p:sld>
 </file>
 
-<file path=ppt/slides/slide8.xml><?xml version="1.0" encoding="utf-8"?>
-<p:sld xmlns:a="http://schemas.openxmlformats.org/drawingml/2006/main" xmlns:r="http://schemas.openxmlformats.org/officeDocument/2006/relationships" xmlns:mc="http://schemas.openxmlformats.org/markup-compatibility/2006" xmlns:mv="urn:schemas-microsoft-com:mac:vml" xmlns:p="http://schemas.openxmlformats.org/presentationml/2006/main" xmlns:c="http://schemas.openxmlformats.org/drawingml/2006/chart" xmlns:dgm="http://schemas.openxmlformats.org/drawingml/2006/diagram" xmlns:o="urn:schemas-microsoft-com:office:office" xmlns:v="urn:schemas-microsoft-com:vml" xmlns:pvml="urn:schemas-microsoft-com:office:powerpoint" xmlns:com="http://schemas.openxmlformats.org/drawingml/2006/compatibility" xmlns:p14="http://schemas.microsoft.com/office/powerpoint/2010/main" xmlns:p15="http://schemas.microsoft.com/office/powerpoint/2012/main" xmlns:ahyp="http://schemas.microsoft.com/office/drawing/2018/hyperlinkcolor">
-  <p:cSld>
-    <p:bg>
-      <p:bgPr>
-        <a:solidFill>
-          <a:srgbClr val="00DBD0"/>
-        </a:solidFill>
-      </p:bgPr>
-    </p:bg>
-    <p:spTree>
-      <p:nvGrpSpPr>
-        <p:cNvPr id="199" name="Shape 199"/>
-        <p:cNvGrpSpPr/>
-        <p:nvPr/>
-      </p:nvGrpSpPr>
-      <p:grpSpPr>
-        <a:xfrm>
-          <a:off x="0" y="0"/>
-          <a:ext cx="0" cy="0"/>
-          <a:chOff x="0" y="0"/>
-          <a:chExt cx="0" cy="0"/>
-        </a:xfrm>
-      </p:grpSpPr>
-      <p:sp>
-        <p:nvSpPr>
-          <p:cNvPr id="200" name="Google Shape;200;p14"/>
-          <p:cNvSpPr txBox="1"/>
-          <p:nvPr>
-            <p:ph idx="4294967295" type="ctrTitle"/>
-          </p:nvPr>
-        </p:nvSpPr>
-        <p:spPr>
-          <a:xfrm>
-            <a:off x="1089725" y="1970775"/>
-            <a:ext cx="6269100" cy="698400"/>
-          </a:xfrm>
-          <a:prstGeom prst="rect">
-            <a:avLst/>
-          </a:prstGeom>
-          <a:noFill/>
-          <a:ln>
-            <a:noFill/>
-          </a:ln>
-        </p:spPr>
-        <p:txBody>
-          <a:bodyPr anchorCtr="0" anchor="t" bIns="91425" lIns="91425" spcFirstLastPara="1" rIns="91425" wrap="square" tIns="91425">
-            <a:noAutofit/>
-          </a:bodyPr>
-          <a:lstStyle/>
-          <a:p>
-            <a:pPr indent="0" lvl="0" marL="0" marR="0" rtl="0" algn="l">
-              <a:lnSpc>
-                <a:spcPct val="100000"/>
-              </a:lnSpc>
-              <a:spcBef>
-                <a:spcPts val="0"/>
-              </a:spcBef>
-              <a:spcAft>
-                <a:spcPts val="0"/>
-              </a:spcAft>
-              <a:buClr>
-                <a:schemeClr val="dk1"/>
-              </a:buClr>
-              <a:buSzPts val="2800"/>
-              <a:buFont typeface="Arial"/>
-              <a:buNone/>
-            </a:pPr>
-            <a:r>
-              <a:rPr b="0" i="0" lang="fr-FR" sz="5200" u="none" cap="none" strike="noStrike">
-                <a:solidFill>
-                  <a:srgbClr val="0E3449"/>
-                </a:solidFill>
-                <a:latin typeface="Inter SemiBold"/>
-                <a:ea typeface="Inter SemiBold"/>
-                <a:cs typeface="Inter SemiBold"/>
-                <a:sym typeface="Inter SemiBold"/>
-              </a:rPr>
-              <a:t>Des questions ?</a:t>
-            </a:r>
-            <a:endParaRPr b="0" i="0" sz="5200" u="none" cap="none" strike="noStrike">
-              <a:solidFill>
-                <a:srgbClr val="0E3449"/>
-              </a:solidFill>
-              <a:latin typeface="Inter SemiBold"/>
-              <a:ea typeface="Inter SemiBold"/>
-              <a:cs typeface="Inter SemiBold"/>
-              <a:sym typeface="Inter SemiBold"/>
-            </a:endParaRPr>
-          </a:p>
-        </p:txBody>
-      </p:sp>
-      <p:pic>
-        <p:nvPicPr>
-          <p:cNvPr id="201" name="Google Shape;201;p14"/>
-          <p:cNvPicPr preferRelativeResize="0"/>
-          <p:nvPr/>
-        </p:nvPicPr>
-        <p:blipFill rotWithShape="1">
-          <a:blip r:embed="rId3">
-            <a:alphaModFix/>
-          </a:blip>
-          <a:srcRect b="0" l="0" r="0" t="0"/>
-          <a:stretch/>
-        </p:blipFill>
-        <p:spPr>
-          <a:xfrm>
-            <a:off x="3918625" y="3006625"/>
-            <a:ext cx="4599299" cy="2136876"/>
-          </a:xfrm>
-          <a:prstGeom prst="rect">
-            <a:avLst/>
-          </a:prstGeom>
-          <a:noFill/>
-          <a:ln>
-            <a:noFill/>
-          </a:ln>
-        </p:spPr>
-      </p:pic>
-      <p:pic>
-        <p:nvPicPr>
-          <p:cNvPr id="202" name="Google Shape;202;p14"/>
-          <p:cNvPicPr preferRelativeResize="0"/>
-          <p:nvPr/>
-        </p:nvPicPr>
-        <p:blipFill rotWithShape="1">
-          <a:blip r:embed="rId4">
-            <a:alphaModFix/>
-          </a:blip>
-          <a:srcRect b="0" l="0" r="0" t="0"/>
-          <a:stretch/>
-        </p:blipFill>
-        <p:spPr>
-          <a:xfrm>
-            <a:off x="1232375" y="915775"/>
-            <a:ext cx="797425" cy="839825"/>
-          </a:xfrm>
-          <a:prstGeom prst="rect">
-            <a:avLst/>
-          </a:prstGeom>
-          <a:noFill/>
-          <a:ln>
-            <a:noFill/>
-          </a:ln>
-        </p:spPr>
-      </p:pic>
-    </p:spTree>
-  </p:cSld>
-  <p:clrMapOvr>
-    <a:masterClrMapping/>
-  </p:clrMapOvr>
-</p:sld>
-</file>
-
 <file path=ppt/theme/theme1.xml><?xml version="1.0" encoding="utf-8"?>
-<a:theme xmlns:a="http://schemas.openxmlformats.org/drawingml/2006/main" xmlns:r="http://schemas.openxmlformats.org/officeDocument/2006/relationships">
+<a:theme xmlns:a="http://schemas.openxmlformats.org/drawingml/2006/main" xmlns:r="http://schemas.openxmlformats.org/officeDocument/2006/relationships" name="1_Simple Light">
   <a:themeElements>
-    <a:clrScheme name="Default">
+    <a:clrScheme name="Simple Light">
       <a:dk1>
         <a:srgbClr val="000000"/>
       </a:dk1>
@@ -22952,34 +23992,34 @@
         <a:srgbClr val="FFFFFF"/>
       </a:lt1>
       <a:dk2>
-        <a:srgbClr val="158158"/>
+        <a:srgbClr val="595959"/>
       </a:dk2>
       <a:lt2>
-        <a:srgbClr val="F3F3F3"/>
+        <a:srgbClr val="EEEEEE"/>
       </a:lt2>
       <a:accent1>
-        <a:srgbClr val="058DC7"/>
+        <a:srgbClr val="FFAB40"/>
       </a:accent1>
       <a:accent2>
-        <a:srgbClr val="50B432"/>
+        <a:srgbClr val="212121"/>
       </a:accent2>
       <a:accent3>
-        <a:srgbClr val="ED561B"/>
+        <a:srgbClr val="78909C"/>
       </a:accent3>
       <a:accent4>
-        <a:srgbClr val="EDEF00"/>
+        <a:srgbClr val="FFAB40"/>
       </a:accent4>
       <a:accent5>
-        <a:srgbClr val="24CBE5"/>
+        <a:srgbClr val="0097A7"/>
       </a:accent5>
       <a:accent6>
-        <a:srgbClr val="64E572"/>
+        <a:srgbClr val="EEFF41"/>
       </a:accent6>
       <a:hlink>
-        <a:srgbClr val="2200CC"/>
+        <a:srgbClr val="0097A7"/>
       </a:hlink>
       <a:folHlink>
-        <a:srgbClr val="551A8B"/>
+        <a:srgbClr val="0097A7"/>
       </a:folHlink>
     </a:clrScheme>
     <a:fontScheme name="Office">
@@ -23500,9 +24540,9 @@
 </file>
 
 <file path=ppt/theme/theme3.xml><?xml version="1.0" encoding="utf-8"?>
-<a:theme xmlns:a="http://schemas.openxmlformats.org/drawingml/2006/main" xmlns:r="http://schemas.openxmlformats.org/officeDocument/2006/relationships" name="1_Simple Light">
+<a:theme xmlns:a="http://schemas.openxmlformats.org/drawingml/2006/main" xmlns:r="http://schemas.openxmlformats.org/officeDocument/2006/relationships">
   <a:themeElements>
-    <a:clrScheme name="Simple Light">
+    <a:clrScheme name="Default">
       <a:dk1>
         <a:srgbClr val="000000"/>
       </a:dk1>
@@ -23510,34 +24550,34 @@
         <a:srgbClr val="FFFFFF"/>
       </a:lt1>
       <a:dk2>
-        <a:srgbClr val="595959"/>
+        <a:srgbClr val="158158"/>
       </a:dk2>
       <a:lt2>
-        <a:srgbClr val="EEEEEE"/>
+        <a:srgbClr val="F3F3F3"/>
       </a:lt2>
       <a:accent1>
-        <a:srgbClr val="FFAB40"/>
+        <a:srgbClr val="058DC7"/>
       </a:accent1>
       <a:accent2>
-        <a:srgbClr val="212121"/>
+        <a:srgbClr val="50B432"/>
       </a:accent2>
       <a:accent3>
-        <a:srgbClr val="78909C"/>
+        <a:srgbClr val="ED561B"/>
       </a:accent3>
       <a:accent4>
-        <a:srgbClr val="FFAB40"/>
+        <a:srgbClr val="EDEF00"/>
       </a:accent4>
       <a:accent5>
-        <a:srgbClr val="0097A7"/>
+        <a:srgbClr val="24CBE5"/>
       </a:accent5>
       <a:accent6>
-        <a:srgbClr val="EEFF41"/>
+        <a:srgbClr val="64E572"/>
       </a:accent6>
       <a:hlink>
-        <a:srgbClr val="0097A7"/>
+        <a:srgbClr val="2200CC"/>
       </a:hlink>
       <a:folHlink>
-        <a:srgbClr val="0097A7"/>
+        <a:srgbClr val="551A8B"/>
       </a:folHlink>
     </a:clrScheme>
     <a:fontScheme name="Office">
